--- a/docs/deck/Sahayak_Keynote_v5.pptx
+++ b/docs/deck/Sahayak_Keynote_v5.pptx
@@ -120,72 +120,72 @@
   <p:extLst>
     <p:ext uri="{521415D9-36F7-43E2-AB2F-B90AF26B5E84}">
       <p14:sectionLst xmlns:p14="http://schemas.microsoft.com/office/powerpoint/2010/main">
-        <p14:section name="The message" id="{8d472981-6266-adad-844a-ff23886c6977}">
+        <p14:section name="The message" id="{a6222779-f308-abc3-24e5-317a21c344fb}">
           <p14:sldIdLst>
             <p14:sldId id="256"/>
           </p14:sldIdLst>
         </p14:section>
-        <p14:section name="Who reads it" id="{e6882cad-a18b-63a8-9b5b-228ff52e6ace}">
+        <p14:section name="Who reads it" id="{01a2b4f3-b88f-6c24-2c0b-47c86fe7bf1b}">
           <p14:sldIdLst>
             <p14:sldId id="257"/>
           </p14:sldIdLst>
         </p14:section>
-        <p14:section name="Every minute" id="{1c5d0156-7611-ba66-19dc-7288ec684683}">
+        <p14:section name="Every minute" id="{c5a144ad-3753-b6e1-7cc2-edf807ff1687}">
           <p14:sldIdLst>
             <p14:sldId id="258"/>
           </p14:sldIdLst>
         </p14:section>
-        <p14:section name="Introducing Sahayak" id="{645c556a-38c6-34de-8109-bb43589b12d2}">
+        <p14:section name="Introducing Sahayak" id="{748a1465-4b63-62a8-93bd-28d0fc4c4a17}">
           <p14:sldIdLst>
             <p14:sldId id="259"/>
           </p14:sldIdLst>
         </p14:section>
-        <p14:section name="It tells her why" id="{bd1d3746-0f4d-70bc-bdb6-bc7d1ba78f52}">
+        <p14:section name="It tells her why" id="{aaa5e9c8-c7eb-e089-50ad-2ee3e5fa4fe1}">
           <p14:sldIdLst>
             <p14:sldId id="260"/>
           </p14:sldIdLst>
         </p14:section>
-        <p14:section name="What she is owed" id="{5aa3a671-5df9-c12d-1498-3f25e2b7a806}">
+        <p14:section name="What she is owed" id="{20da63b6-555e-cfa9-3031-05d1591ef64f}">
           <p14:sldIdLst>
             <p14:sldId id="261"/>
           </p14:sldIdLst>
         </p14:section>
-        <p14:section name="Try it" id="{a56de404-9e00-7f42-de9f-7d72ab21b9c6}">
+        <p14:section name="Try it" id="{b6aec84f-9fd0-39a7-721c-dca1f77e5055}">
           <p14:sldIdLst>
             <p14:sldId id="262"/>
           </p14:sldIdLst>
         </p14:section>
-        <p14:section name="How it works" id="{a08eb78e-1f46-62cd-e9e5-ec763e7bcdc7}">
+        <p14:section name="How it works" id="{9064523b-ed93-f44a-6848-069770d36660}">
           <p14:sldIdLst>
             <p14:sldId id="263"/>
           </p14:sldIdLst>
         </p14:section>
-        <p14:section name="Why rules decide" id="{fc61ff12-4317-5534-2d1f-a945b980ac59}">
+        <p14:section name="Why rules decide" id="{12520189-5f56-fa34-1531-6bfd96cee726}">
           <p14:sldIdLst>
             <p14:sldId id="264"/>
           </p14:sldIdLst>
         </p14:section>
-        <p14:section name="The honest number" id="{802a517e-4355-1c3f-8286-435a5f13b7eb}">
+        <p14:section name="The honest number" id="{bd11d996-d301-54b2-9666-8a69680abc1a}">
           <p14:sldIdLst>
             <p14:sldId id="265"/>
           </p14:sldIdLst>
         </p14:section>
-        <p14:section name="The pilot" id="{05f359fd-4963-2a6f-5fa1-dec2863c7006}">
+        <p14:section name="The pilot" id="{d9880d17-cea6-3832-1eaf-23655f6685aa}">
           <p14:sldIdLst>
             <p14:sldId id="266"/>
           </p14:sldIdLst>
         </p14:section>
-        <p14:section name="The ask" id="{586550d0-9d92-77e7-4e4d-a1b47442114c}">
+        <p14:section name="The ask" id="{8c3c6461-a2d6-b74c-6855-c5d41790f95d}">
           <p14:sldIdLst>
             <p14:sldId id="267"/>
           </p14:sldIdLst>
         </p14:section>
-        <p14:section name="One more thing" id="{68fe81f6-3627-dd46-df82-ed7fbcba0f39}">
+        <p14:section name="One more thing" id="{ae3bc636-ca73-809c-a64c-0c4f0798be47}">
           <p14:sldIdLst>
             <p14:sldId id="268"/>
           </p14:sldIdLst>
         </p14:section>
-        <p14:section name="Someone to ask" id="{2060baa0-e72e-850a-3917-d0bef86d81c7}">
+        <p14:section name="Someone to ask" id="{4faaa1ce-b481-ee58-8c5c-c1dd9a0cfa18}">
           <p14:sldIdLst>
             <p14:sldId id="269"/>
           </p14:sldIdLst>
@@ -960,9 +960,9 @@
           <a:p>
             <a:r>
               <a:rPr lang="en-US" dirty="0"/>
-              <a:t>SHOW: Round one: a clickable mock-up. Today: the real thing. A phone in airplane mode.
+              <a:t>SHOW: Everything you saw today is public. A card lists the result file behind each number.
 DO: Click. Pause. Take one step toward the jury. (about 2 s)
-ISHMIIT: And, one more thing. The address you scanned is the one we gave you in round one. Back then, it opened a mock-up. Today, it opens the real Sahayak. And it works in airplane mode.</a:t>
+ISHMIIT: And, one more thing. Everything you’ve seen today is public. The code, the tests, and the file behind every number on these slides. Anyone can check our work. We’d like you to.</a:t>
             </a:r>
             <a:endParaRPr lang="en-US" dirty="0"/>
           </a:p>
@@ -4417,7 +4417,7 @@
         <p:spPr>
           <a:xfrm>
             <a:off x="822960" y="1691640"/>
-            <a:ext cx="7315200" cy="548640"/>
+            <a:ext cx="5852160" cy="548640"/>
           </a:xfrm>
           <a:prstGeom prst="rect">
             <a:avLst/>
@@ -4441,7 +4441,7 @@
                 <a:ea typeface="Arial" pitchFamily="34" charset="-122"/>
                 <a:cs typeface="Arial" pitchFamily="34" charset="-120"/>
               </a:rPr>
-              <a:t>Round one: a clickable mock-up.</a:t>
+              <a:t>Everything you saw today</a:t>
             </a:r>
             <a:endParaRPr lang="en-US" sz="2800" dirty="0"/>
           </a:p>
@@ -4456,7 +4456,7 @@
         <p:spPr>
           <a:xfrm>
             <a:off x="822960" y="2286000"/>
-            <a:ext cx="7498080" cy="1005840"/>
+            <a:ext cx="5852160" cy="1005840"/>
           </a:xfrm>
           <a:prstGeom prst="rect">
             <a:avLst/>
@@ -4472,7 +4472,7 @@
               <a:buNone/>
             </a:pPr>
             <a:r>
-              <a:rPr lang="en-US" sz="5200" b="1" dirty="0">
+              <a:rPr lang="en-US" sz="6000" b="1" dirty="0">
                 <a:solidFill>
                   <a:srgbClr val="F5F5F7"/>
                 </a:solidFill>
@@ -4480,9 +4480,9 @@
                 <a:ea typeface="Arial" pitchFamily="34" charset="-122"/>
                 <a:cs typeface="Arial" pitchFamily="34" charset="-120"/>
               </a:rPr>
-              <a:t>Today: the real thing.</a:t>
-            </a:r>
-            <a:endParaRPr lang="en-US" sz="5200" dirty="0"/>
+              <a:t>is public.</a:t>
+            </a:r>
+            <a:endParaRPr lang="en-US" sz="6000" dirty="0"/>
           </a:p>
         </p:txBody>
       </p:sp>
@@ -4495,7 +4495,7 @@
         <p:spPr>
           <a:xfrm>
             <a:off x="822960" y="3611880"/>
-            <a:ext cx="6583680" cy="0"/>
+            <a:ext cx="5577840" cy="0"/>
           </a:xfrm>
           <a:prstGeom prst="line">
             <a:avLst/>
@@ -4518,7 +4518,7 @@
         <p:spPr>
           <a:xfrm>
             <a:off x="822960" y="3712464"/>
-            <a:ext cx="6583680" cy="530352"/>
+            <a:ext cx="5577840" cy="530352"/>
           </a:xfrm>
           <a:prstGeom prst="rect">
             <a:avLst/>
@@ -4542,21 +4542,7 @@
                 <a:ea typeface="Arial" pitchFamily="34" charset="-122"/>
                 <a:cs typeface="Arial" pitchFamily="34" charset="-120"/>
               </a:rPr>
-              <a:t>Same address</a:t>
-            </a:r>
-            <a:pPr indent="0" marL="0">
-              <a:buNone/>
-            </a:pPr>
-            <a:r>
-              <a:rPr lang="en-US" sz="2400" dirty="0">
-                <a:solidFill>
-                  <a:srgbClr val="A1A1A6"/>
-                </a:solidFill>
-                <a:latin typeface="Arial" pitchFamily="34" charset="0"/>
-                <a:ea typeface="Arial" pitchFamily="34" charset="-122"/>
-                <a:cs typeface="Arial" pitchFamily="34" charset="-120"/>
-              </a:rPr>
-              <a:t> you just scanned.</a:t>
+              <a:t>The code. The tests.</a:t>
             </a:r>
             <a:endParaRPr lang="en-US" sz="2400" dirty="0"/>
           </a:p>
@@ -4571,7 +4557,7 @@
         <p:spPr>
           <a:xfrm>
             <a:off x="822960" y="4270248"/>
-            <a:ext cx="6583680" cy="0"/>
+            <a:ext cx="5577840" cy="0"/>
           </a:xfrm>
           <a:prstGeom prst="line">
             <a:avLst/>
@@ -4594,7 +4580,7 @@
         <p:spPr>
           <a:xfrm>
             <a:off x="822960" y="4370832"/>
-            <a:ext cx="6583680" cy="530352"/>
+            <a:ext cx="5577840" cy="530352"/>
           </a:xfrm>
           <a:prstGeom prst="rect">
             <a:avLst/>
@@ -4618,39 +4604,572 @@
                 <a:ea typeface="Arial" pitchFamily="34" charset="-122"/>
                 <a:cs typeface="Arial" pitchFamily="34" charset="-120"/>
               </a:rPr>
-              <a:t>Works in airplane mode.</a:t>
+              <a:t>The file behind every number.</a:t>
             </a:r>
             <a:endParaRPr lang="en-US" sz="2400" dirty="0"/>
           </a:p>
         </p:txBody>
       </p:sp>
-      <p:pic>
-        <p:nvPicPr>
-          <p:cNvPr id="9" name="Sahayak on a phone with no internet" descr="Screenshot: Sahayak on a phone with no internet">    </p:cNvPr>
-          <p:cNvPicPr>
-            <a:picLocks noChangeAspect="1"/>
-          </p:cNvPicPr>
-          <p:nvPr/>
-        </p:nvPicPr>
-        <p:blipFill>
-          <a:blip r:embed="rId1"/>
-          <a:stretch>
-            <a:fillRect/>
-          </a:stretch>
-        </p:blipFill>
-        <p:spPr>
-          <a:xfrm>
-            <a:off x="8503920" y="594360"/>
-            <a:ext cx="2715748" cy="5669280"/>
-          </a:xfrm>
-          <a:prstGeom prst="rect">
-            <a:avLst/>
-          </a:prstGeom>
-        </p:spPr>
-      </p:pic>
-      <p:sp>
-        <p:nvSpPr>
-          <p:cNvPr id="10" name="source"/>
+      <p:sp>
+        <p:nvSpPr>
+          <p:cNvPr id="9" name="repo card"/>
+          <p:cNvSpPr/>
+          <p:nvPr/>
+        </p:nvSpPr>
+        <p:spPr>
+          <a:xfrm>
+            <a:off x="6903720" y="1097280"/>
+            <a:ext cx="4480560" cy="4343400"/>
+          </a:xfrm>
+          <a:prstGeom prst="roundRect">
+            <a:avLst>
+              <a:gd name="adj" fmla="val 3789"/>
+            </a:avLst>
+          </a:prstGeom>
+          <a:solidFill>
+            <a:srgbClr val="161618"/>
+          </a:solidFill>
+          <a:ln w="12700">
+            <a:solidFill>
+              <a:srgbClr val="2C2C30"/>
+            </a:solidFill>
+            <a:prstDash val="solid"/>
+          </a:ln>
+        </p:spPr>
+      </p:sp>
+      <p:sp>
+        <p:nvSpPr>
+          <p:cNvPr id="10" name="repo"/>
+          <p:cNvSpPr txBox="1"/>
+          <p:nvPr/>
+        </p:nvSpPr>
+        <p:spPr>
+          <a:xfrm>
+            <a:off x="7223760" y="1371600"/>
+            <a:ext cx="3931920" cy="365760"/>
+          </a:xfrm>
+          <a:prstGeom prst="rect">
+            <a:avLst/>
+          </a:prstGeom>
+          <a:noFill/>
+          <a:ln/>
+        </p:spPr>
+        <p:txBody>
+          <a:bodyPr wrap="square" lIns="0" tIns="0" rIns="0" bIns="0" rtlCol="0" anchor="t"/>
+          <a:lstStyle/>
+          <a:p>
+            <a:pPr indent="0" marL="0">
+              <a:buNone/>
+            </a:pPr>
+            <a:r>
+              <a:rPr lang="en-US" sz="1600" b="1" dirty="0">
+                <a:solidFill>
+                  <a:srgbClr val="6FA8FF"/>
+                </a:solidFill>
+                <a:latin typeface="Arial" pitchFamily="34" charset="0"/>
+                <a:ea typeface="Arial" pitchFamily="34" charset="-122"/>
+                <a:cs typeface="Arial" pitchFamily="34" charset="-120"/>
+              </a:rPr>
+              <a:t>github.com/ishmiit/Sahayak</a:t>
+            </a:r>
+            <a:endParaRPr lang="en-US" sz="1600" dirty="0"/>
+          </a:p>
+        </p:txBody>
+      </p:sp>
+      <p:sp>
+        <p:nvSpPr>
+          <p:cNvPr id="11" name="repo rule"/>
+          <p:cNvSpPr/>
+          <p:nvPr/>
+        </p:nvSpPr>
+        <p:spPr>
+          <a:xfrm>
+            <a:off x="7223760" y="1874520"/>
+            <a:ext cx="3840480" cy="0"/>
+          </a:xfrm>
+          <a:prstGeom prst="line">
+            <a:avLst/>
+          </a:prstGeom>
+          <a:noFill/>
+          <a:ln w="9525">
+            <a:solidFill>
+              <a:srgbClr val="3A3A3E"/>
+            </a:solidFill>
+            <a:prstDash val="solid"/>
+          </a:ln>
+        </p:spPr>
+      </p:sp>
+      <p:sp>
+        <p:nvSpPr>
+          <p:cNvPr id="12" name="file 1"/>
+          <p:cNvSpPr txBox="1"/>
+          <p:nvPr/>
+        </p:nvSpPr>
+        <p:spPr>
+          <a:xfrm>
+            <a:off x="7223760" y="2057400"/>
+            <a:ext cx="2377440" cy="365760"/>
+          </a:xfrm>
+          <a:prstGeom prst="rect">
+            <a:avLst/>
+          </a:prstGeom>
+          <a:noFill/>
+          <a:ln/>
+        </p:spPr>
+        <p:txBody>
+          <a:bodyPr wrap="square" lIns="0" tIns="0" rIns="0" bIns="0" rtlCol="0" anchor="ctr"/>
+          <a:lstStyle/>
+          <a:p>
+            <a:pPr indent="0" marL="0">
+              <a:buNone/>
+            </a:pPr>
+            <a:r>
+              <a:rPr lang="en-US" sz="1300" dirty="0">
+                <a:solidFill>
+                  <a:srgbClr val="A1A1A6"/>
+                </a:solidFill>
+                <a:latin typeface="Courier New" pitchFamily="34" charset="0"/>
+                <a:ea typeface="Courier New" pitchFamily="34" charset="-122"/>
+                <a:cs typeface="Courier New" pitchFamily="34" charset="-120"/>
+              </a:rPr>
+              <a:t>public_v0.json</a:t>
+            </a:r>
+            <a:endParaRPr lang="en-US" sz="1300" dirty="0"/>
+          </a:p>
+        </p:txBody>
+      </p:sp>
+      <p:sp>
+        <p:nvSpPr>
+          <p:cNvPr id="13" name="file 1 number"/>
+          <p:cNvSpPr txBox="1"/>
+          <p:nvPr/>
+        </p:nvSpPr>
+        <p:spPr>
+          <a:xfrm>
+            <a:off x="9418320" y="2057400"/>
+            <a:ext cx="1691640" cy="365760"/>
+          </a:xfrm>
+          <a:prstGeom prst="rect">
+            <a:avLst/>
+          </a:prstGeom>
+          <a:noFill/>
+          <a:ln/>
+        </p:spPr>
+        <p:txBody>
+          <a:bodyPr wrap="square" lIns="0" tIns="0" rIns="0" bIns="0" rtlCol="0" anchor="ctr"/>
+          <a:lstStyle/>
+          <a:p>
+            <a:pPr algn="r" indent="0" marL="0">
+              <a:buNone/>
+            </a:pPr>
+            <a:r>
+              <a:rPr lang="en-US" sz="1500" b="1" dirty="0">
+                <a:solidFill>
+                  <a:srgbClr val="F5F5F7"/>
+                </a:solidFill>
+                <a:latin typeface="Arial" pitchFamily="34" charset="0"/>
+                <a:ea typeface="Arial" pitchFamily="34" charset="-122"/>
+                <a:cs typeface="Arial" pitchFamily="34" charset="-120"/>
+              </a:rPr>
+              <a:t>7 in 10</a:t>
+            </a:r>
+            <a:endParaRPr lang="en-US" sz="1500" dirty="0"/>
+          </a:p>
+        </p:txBody>
+      </p:sp>
+      <p:sp>
+        <p:nvSpPr>
+          <p:cNvPr id="14" name="file 2"/>
+          <p:cNvSpPr txBox="1"/>
+          <p:nvPr/>
+        </p:nvSpPr>
+        <p:spPr>
+          <a:xfrm>
+            <a:off x="7223760" y="2587752"/>
+            <a:ext cx="2377440" cy="365760"/>
+          </a:xfrm>
+          <a:prstGeom prst="rect">
+            <a:avLst/>
+          </a:prstGeom>
+          <a:noFill/>
+          <a:ln/>
+        </p:spPr>
+        <p:txBody>
+          <a:bodyPr wrap="square" lIns="0" tIns="0" rIns="0" bIns="0" rtlCol="0" anchor="ctr"/>
+          <a:lstStyle/>
+          <a:p>
+            <a:pPr indent="0" marL="0">
+              <a:buNone/>
+            </a:pPr>
+            <a:r>
+              <a:rPr lang="en-US" sz="1300" dirty="0">
+                <a:solidFill>
+                  <a:srgbClr val="A1A1A6"/>
+                </a:solidFill>
+                <a:latin typeface="Courier New" pitchFamily="34" charset="0"/>
+                <a:ea typeface="Courier New" pitchFamily="34" charset="-122"/>
+                <a:cs typeface="Courier New" pitchFamily="34" charset="-120"/>
+              </a:rPr>
+              <a:t>redteam_v1_blind.json</a:t>
+            </a:r>
+            <a:endParaRPr lang="en-US" sz="1300" dirty="0"/>
+          </a:p>
+        </p:txBody>
+      </p:sp>
+      <p:sp>
+        <p:nvSpPr>
+          <p:cNvPr id="15" name="file 2 number"/>
+          <p:cNvSpPr txBox="1"/>
+          <p:nvPr/>
+        </p:nvSpPr>
+        <p:spPr>
+          <a:xfrm>
+            <a:off x="9418320" y="2587752"/>
+            <a:ext cx="1691640" cy="365760"/>
+          </a:xfrm>
+          <a:prstGeom prst="rect">
+            <a:avLst/>
+          </a:prstGeom>
+          <a:noFill/>
+          <a:ln/>
+        </p:spPr>
+        <p:txBody>
+          <a:bodyPr wrap="square" lIns="0" tIns="0" rIns="0" bIns="0" rtlCol="0" anchor="ctr"/>
+          <a:lstStyle/>
+          <a:p>
+            <a:pPr algn="r" indent="0" marL="0">
+              <a:buNone/>
+            </a:pPr>
+            <a:r>
+              <a:rPr lang="en-US" sz="1500" b="1" dirty="0">
+                <a:solidFill>
+                  <a:srgbClr val="F5F5F7"/>
+                </a:solidFill>
+                <a:latin typeface="Arial" pitchFamily="34" charset="0"/>
+                <a:ea typeface="Arial" pitchFamily="34" charset="-122"/>
+                <a:cs typeface="Arial" pitchFamily="34" charset="-120"/>
+              </a:rPr>
+              <a:t>92 of 103</a:t>
+            </a:r>
+            <a:endParaRPr lang="en-US" sz="1500" dirty="0"/>
+          </a:p>
+        </p:txBody>
+      </p:sp>
+      <p:sp>
+        <p:nvSpPr>
+          <p:cNvPr id="16" name="file 3"/>
+          <p:cNvSpPr txBox="1"/>
+          <p:nvPr/>
+        </p:nvSpPr>
+        <p:spPr>
+          <a:xfrm>
+            <a:off x="7223760" y="3118104"/>
+            <a:ext cx="2377440" cy="365760"/>
+          </a:xfrm>
+          <a:prstGeom prst="rect">
+            <a:avLst/>
+          </a:prstGeom>
+          <a:noFill/>
+          <a:ln/>
+        </p:spPr>
+        <p:txBody>
+          <a:bodyPr wrap="square" lIns="0" tIns="0" rIns="0" bIns="0" rtlCol="0" anchor="ctr"/>
+          <a:lstStyle/>
+          <a:p>
+            <a:pPr indent="0" marL="0">
+              <a:buNone/>
+            </a:pPr>
+            <a:r>
+              <a:rPr lang="en-US" sz="1300" dirty="0">
+                <a:solidFill>
+                  <a:srgbClr val="A1A1A6"/>
+                </a:solidFill>
+                <a:latin typeface="Courier New" pitchFamily="34" charset="0"/>
+                <a:ea typeface="Courier New" pitchFamily="34" charset="-122"/>
+                <a:cs typeface="Courier New" pitchFamily="34" charset="-120"/>
+              </a:rPr>
+              <a:t>scambench_v0_test.json</a:t>
+            </a:r>
+            <a:endParaRPr lang="en-US" sz="1300" dirty="0"/>
+          </a:p>
+        </p:txBody>
+      </p:sp>
+      <p:sp>
+        <p:nvSpPr>
+          <p:cNvPr id="17" name="file 3 number"/>
+          <p:cNvSpPr txBox="1"/>
+          <p:nvPr/>
+        </p:nvSpPr>
+        <p:spPr>
+          <a:xfrm>
+            <a:off x="9418320" y="3118104"/>
+            <a:ext cx="1691640" cy="365760"/>
+          </a:xfrm>
+          <a:prstGeom prst="rect">
+            <a:avLst/>
+          </a:prstGeom>
+          <a:noFill/>
+          <a:ln/>
+        </p:spPr>
+        <p:txBody>
+          <a:bodyPr wrap="square" lIns="0" tIns="0" rIns="0" bIns="0" rtlCol="0" anchor="ctr"/>
+          <a:lstStyle/>
+          <a:p>
+            <a:pPr algn="r" indent="0" marL="0">
+              <a:buNone/>
+            </a:pPr>
+            <a:r>
+              <a:rPr lang="en-US" sz="1500" b="1" dirty="0">
+                <a:solidFill>
+                  <a:srgbClr val="F5F5F7"/>
+                </a:solidFill>
+                <a:latin typeface="Arial" pitchFamily="34" charset="0"/>
+                <a:ea typeface="Arial" pitchFamily="34" charset="-122"/>
+                <a:cs typeface="Arial" pitchFamily="34" charset="-120"/>
+              </a:rPr>
+              <a:t>34 of 37</a:t>
+            </a:r>
+            <a:endParaRPr lang="en-US" sz="1500" dirty="0"/>
+          </a:p>
+        </p:txBody>
+      </p:sp>
+      <p:sp>
+        <p:nvSpPr>
+          <p:cNvPr id="18" name="file 4"/>
+          <p:cNvSpPr txBox="1"/>
+          <p:nvPr/>
+        </p:nvSpPr>
+        <p:spPr>
+          <a:xfrm>
+            <a:off x="7223760" y="3648456"/>
+            <a:ext cx="2377440" cy="365760"/>
+          </a:xfrm>
+          <a:prstGeom prst="rect">
+            <a:avLst/>
+          </a:prstGeom>
+          <a:noFill/>
+          <a:ln/>
+        </p:spPr>
+        <p:txBody>
+          <a:bodyPr wrap="square" lIns="0" tIns="0" rIns="0" bIns="0" rtlCol="0" anchor="ctr"/>
+          <a:lstStyle/>
+          <a:p>
+            <a:pPr indent="0" marL="0">
+              <a:buNone/>
+            </a:pPr>
+            <a:r>
+              <a:rPr lang="en-US" sz="1300" dirty="0">
+                <a:solidFill>
+                  <a:srgbClr val="A1A1A6"/>
+                </a:solidFill>
+                <a:latin typeface="Courier New" pitchFamily="34" charset="0"/>
+                <a:ea typeface="Courier New" pitchFamily="34" charset="-122"/>
+                <a:cs typeface="Courier New" pitchFamily="34" charset="-120"/>
+              </a:rPr>
+              <a:t>llm_baseline.json</a:t>
+            </a:r>
+            <a:endParaRPr lang="en-US" sz="1300" dirty="0"/>
+          </a:p>
+        </p:txBody>
+      </p:sp>
+      <p:sp>
+        <p:nvSpPr>
+          <p:cNvPr id="19" name="file 4 number"/>
+          <p:cNvSpPr txBox="1"/>
+          <p:nvPr/>
+        </p:nvSpPr>
+        <p:spPr>
+          <a:xfrm>
+            <a:off x="9418320" y="3648456"/>
+            <a:ext cx="1691640" cy="365760"/>
+          </a:xfrm>
+          <a:prstGeom prst="rect">
+            <a:avLst/>
+          </a:prstGeom>
+          <a:noFill/>
+          <a:ln/>
+        </p:spPr>
+        <p:txBody>
+          <a:bodyPr wrap="square" lIns="0" tIns="0" rIns="0" bIns="0" rtlCol="0" anchor="ctr"/>
+          <a:lstStyle/>
+          <a:p>
+            <a:pPr algn="r" indent="0" marL="0">
+              <a:buNone/>
+            </a:pPr>
+            <a:r>
+              <a:rPr lang="en-US" sz="1500" b="1" dirty="0">
+                <a:solidFill>
+                  <a:srgbClr val="F5F5F7"/>
+                </a:solidFill>
+                <a:latin typeface="Arial" pitchFamily="34" charset="0"/>
+                <a:ea typeface="Arial" pitchFamily="34" charset="-122"/>
+                <a:cs typeface="Arial" pitchFamily="34" charset="-120"/>
+              </a:rPr>
+              <a:t>21 vs 11</a:t>
+            </a:r>
+            <a:endParaRPr lang="en-US" sz="1500" dirty="0"/>
+          </a:p>
+        </p:txBody>
+      </p:sp>
+      <p:sp>
+        <p:nvSpPr>
+          <p:cNvPr id="20" name="file 5"/>
+          <p:cNvSpPr txBox="1"/>
+          <p:nvPr/>
+        </p:nvSpPr>
+        <p:spPr>
+          <a:xfrm>
+            <a:off x="7223760" y="4178808"/>
+            <a:ext cx="2377440" cy="365760"/>
+          </a:xfrm>
+          <a:prstGeom prst="rect">
+            <a:avLst/>
+          </a:prstGeom>
+          <a:noFill/>
+          <a:ln/>
+        </p:spPr>
+        <p:txBody>
+          <a:bodyPr wrap="square" lIns="0" tIns="0" rIns="0" bIns="0" rtlCol="0" anchor="ctr"/>
+          <a:lstStyle/>
+          <a:p>
+            <a:pPr indent="0" marL="0">
+              <a:buNone/>
+            </a:pPr>
+            <a:r>
+              <a:rPr lang="en-US" sz="1300" dirty="0">
+                <a:solidFill>
+                  <a:srgbClr val="A1A1A6"/>
+                </a:solidFill>
+                <a:latin typeface="Courier New" pitchFamily="34" charset="0"/>
+                <a:ea typeface="Courier New" pitchFamily="34" charset="-122"/>
+                <a:cs typeface="Courier New" pitchFamily="34" charset="-120"/>
+              </a:rPr>
+              <a:t>phone_parity.json</a:t>
+            </a:r>
+            <a:endParaRPr lang="en-US" sz="1300" dirty="0"/>
+          </a:p>
+        </p:txBody>
+      </p:sp>
+      <p:sp>
+        <p:nvSpPr>
+          <p:cNvPr id="21" name="file 5 number"/>
+          <p:cNvSpPr txBox="1"/>
+          <p:nvPr/>
+        </p:nvSpPr>
+        <p:spPr>
+          <a:xfrm>
+            <a:off x="9418320" y="4178808"/>
+            <a:ext cx="1691640" cy="365760"/>
+          </a:xfrm>
+          <a:prstGeom prst="rect">
+            <a:avLst/>
+          </a:prstGeom>
+          <a:noFill/>
+          <a:ln/>
+        </p:spPr>
+        <p:txBody>
+          <a:bodyPr wrap="square" lIns="0" tIns="0" rIns="0" bIns="0" rtlCol="0" anchor="ctr"/>
+          <a:lstStyle/>
+          <a:p>
+            <a:pPr algn="r" indent="0" marL="0">
+              <a:buNone/>
+            </a:pPr>
+            <a:r>
+              <a:rPr lang="en-US" sz="1500" b="1" dirty="0">
+                <a:solidFill>
+                  <a:srgbClr val="F5F5F7"/>
+                </a:solidFill>
+                <a:latin typeface="Arial" pitchFamily="34" charset="0"/>
+                <a:ea typeface="Arial" pitchFamily="34" charset="-122"/>
+                <a:cs typeface="Arial" pitchFamily="34" charset="-120"/>
+              </a:rPr>
+              <a:t>1,841 of 1,841</a:t>
+            </a:r>
+            <a:endParaRPr lang="en-US" sz="1500" dirty="0"/>
+          </a:p>
+        </p:txBody>
+      </p:sp>
+      <p:sp>
+        <p:nvSpPr>
+          <p:cNvPr id="22" name="file 6"/>
+          <p:cNvSpPr txBox="1"/>
+          <p:nvPr/>
+        </p:nvSpPr>
+        <p:spPr>
+          <a:xfrm>
+            <a:off x="7223760" y="4709160"/>
+            <a:ext cx="2377440" cy="365760"/>
+          </a:xfrm>
+          <a:prstGeom prst="rect">
+            <a:avLst/>
+          </a:prstGeom>
+          <a:noFill/>
+          <a:ln/>
+        </p:spPr>
+        <p:txBody>
+          <a:bodyPr wrap="square" lIns="0" tIns="0" rIns="0" bIns="0" rtlCol="0" anchor="ctr"/>
+          <a:lstStyle/>
+          <a:p>
+            <a:pPr indent="0" marL="0">
+              <a:buNone/>
+            </a:pPr>
+            <a:r>
+              <a:rPr lang="en-US" sz="1300" dirty="0">
+                <a:solidFill>
+                  <a:srgbClr val="A1A1A6"/>
+                </a:solidFill>
+                <a:latin typeface="Courier New" pitchFamily="34" charset="0"/>
+                <a:ea typeface="Courier New" pitchFamily="34" charset="-122"/>
+                <a:cs typeface="Courier New" pitchFamily="34" charset="-120"/>
+              </a:rPr>
+              <a:t>facts_v3.json</a:t>
+            </a:r>
+            <a:endParaRPr lang="en-US" sz="1300" dirty="0"/>
+          </a:p>
+        </p:txBody>
+      </p:sp>
+      <p:sp>
+        <p:nvSpPr>
+          <p:cNvPr id="23" name="file 6 number"/>
+          <p:cNvSpPr txBox="1"/>
+          <p:nvPr/>
+        </p:nvSpPr>
+        <p:spPr>
+          <a:xfrm>
+            <a:off x="9418320" y="4709160"/>
+            <a:ext cx="1691640" cy="365760"/>
+          </a:xfrm>
+          <a:prstGeom prst="rect">
+            <a:avLst/>
+          </a:prstGeom>
+          <a:noFill/>
+          <a:ln/>
+        </p:spPr>
+        <p:txBody>
+          <a:bodyPr wrap="square" lIns="0" tIns="0" rIns="0" bIns="0" rtlCol="0" anchor="ctr"/>
+          <a:lstStyle/>
+          <a:p>
+            <a:pPr algn="r" indent="0" marL="0">
+              <a:buNone/>
+            </a:pPr>
+            <a:r>
+              <a:rPr lang="en-US" sz="1500" b="1" dirty="0">
+                <a:solidFill>
+                  <a:srgbClr val="F5F5F7"/>
+                </a:solidFill>
+                <a:latin typeface="Arial" pitchFamily="34" charset="0"/>
+                <a:ea typeface="Arial" pitchFamily="34" charset="-122"/>
+                <a:cs typeface="Arial" pitchFamily="34" charset="-120"/>
+              </a:rPr>
+              <a:t>₹4 lakh a minute</a:t>
+            </a:r>
+            <a:endParaRPr lang="en-US" sz="1500" dirty="0"/>
+          </a:p>
+        </p:txBody>
+      </p:sp>
+      <p:sp>
+        <p:nvSpPr>
+          <p:cNvPr id="24" name="source"/>
           <p:cNvSpPr txBox="1"/>
           <p:nvPr/>
         </p:nvSpPr>
@@ -4681,7 +5200,7 @@
                 <a:ea typeface="Arial" pitchFamily="34" charset="-122"/>
                 <a:cs typeface="Arial" pitchFamily="34" charset="-120"/>
               </a:rPr>
-              <a:t>roshworldwide.github.io/optum-v2 · screenshot: a check on a phone in airplane mode</a:t>
+              <a:t>github.com/ishmiit/Sahayak · results in bench/results, outside numbers in docs/deck/facts_v3.json, each with its source · MIT licence</a:t>
             </a:r>
             <a:endParaRPr lang="en-US" sz="1050" dirty="0"/>
           </a:p>
@@ -7253,7 +7772,7 @@
       </p:sp>
       <p:pic>
         <p:nvPicPr>
-          <p:cNvPr id="3" name="QR code" descr="QR code for https://roshworldwide.github.io/optum-v2/">    </p:cNvPr>
+          <p:cNvPr id="3" name="QR code" descr="QR code for https://ishmiit.github.io/Sahayak/">    </p:cNvPr>
           <p:cNvPicPr>
             <a:picLocks noChangeAspect="1"/>
           </p:cNvPicPr>
@@ -7308,7 +7827,7 @@
                 <a:ea typeface="Arial" pitchFamily="34" charset="-122"/>
                 <a:cs typeface="Arial" pitchFamily="34" charset="-120"/>
               </a:rPr>
-              <a:t>roshworldwide.github.io/optum-v2</a:t>
+              <a:t>ishmiit.github.io/Sahayak</a:t>
             </a:r>
             <a:endParaRPr lang="en-US" sz="1700" dirty="0"/>
           </a:p>

--- a/docs/deck/Sahayak_Keynote_v5.pptx
+++ b/docs/deck/Sahayak_Keynote_v5.pptx
@@ -120,72 +120,72 @@
   <p:extLst>
     <p:ext uri="{521415D9-36F7-43E2-AB2F-B90AF26B5E84}">
       <p14:sectionLst xmlns:p14="http://schemas.microsoft.com/office/powerpoint/2010/main">
-        <p14:section name="The message" id="{a482bcc6-2a41-a86c-b595-411ac7e5a980}">
+        <p14:section name="The message" id="{f3357668-4d6e-ff7d-3c1e-243e3222afa4}">
           <p14:sldIdLst>
             <p14:sldId id="256"/>
           </p14:sldIdLst>
         </p14:section>
-        <p14:section name="Who reads it" id="{66a3f493-0613-9a4d-1732-386e03a23fc6}">
+        <p14:section name="Who reads it" id="{e63bdcd9-2913-d9ee-f241-567fa18ef701}">
           <p14:sldIdLst>
             <p14:sldId id="257"/>
           </p14:sldIdLst>
         </p14:section>
-        <p14:section name="Every minute" id="{f6773295-9004-9579-0b8a-a83d86ec1e35}">
+        <p14:section name="Every minute" id="{a89f94f2-d4b3-86cb-fe12-b4b85dc11b02}">
           <p14:sldIdLst>
             <p14:sldId id="258"/>
           </p14:sldIdLst>
         </p14:section>
-        <p14:section name="Introducing Sahayak" id="{255de4b0-cb62-37ee-cfe5-1473b0408c30}">
+        <p14:section name="Introducing Sahayak" id="{1d03d860-787b-d953-49fc-9b63904cbad0}">
           <p14:sldIdLst>
             <p14:sldId id="259"/>
           </p14:sldIdLst>
         </p14:section>
-        <p14:section name="It tells her why" id="{b500c994-74af-f937-9244-5ac1258f4b96}">
+        <p14:section name="It tells her why" id="{cb9c9a6e-3090-b225-b7a0-ea142e59aa7b}">
           <p14:sldIdLst>
             <p14:sldId id="260"/>
           </p14:sldIdLst>
         </p14:section>
-        <p14:section name="What she is owed" id="{6153dca8-12f5-136e-f6aa-ff9f0e2361ae}">
+        <p14:section name="What she is owed" id="{dd4d9e4b-c9bd-329d-0e17-be0ccdb458de}">
           <p14:sldIdLst>
             <p14:sldId id="261"/>
           </p14:sldIdLst>
         </p14:section>
-        <p14:section name="Try it" id="{95f2bd6e-561d-a64d-01ea-0afeff54b6e8}">
+        <p14:section name="How it works" id="{7f1a7c5e-24e5-5504-9841-1c87eb0dd541}">
           <p14:sldIdLst>
             <p14:sldId id="262"/>
           </p14:sldIdLst>
         </p14:section>
-        <p14:section name="How it works" id="{75ba7f90-215b-2a2a-61d2-30346868713b}">
+        <p14:section name="Why rules decide" id="{206d4183-4621-7d3e-04ff-9da9665b7923}">
           <p14:sldIdLst>
             <p14:sldId id="263"/>
           </p14:sldIdLst>
         </p14:section>
-        <p14:section name="Why rules decide" id="{d36852c9-c337-67d4-b1cc-eea7bc1ec58a}">
+        <p14:section name="The honest number" id="{4d0f9a1f-dab4-7f98-7a2f-8753f77b2cb7}">
           <p14:sldIdLst>
             <p14:sldId id="264"/>
           </p14:sldIdLst>
         </p14:section>
-        <p14:section name="The honest number" id="{96a56ea5-ba73-47d6-6ee9-9fc45353336d}">
+        <p14:section name="The pilot" id="{534112f2-29d3-b93b-b299-b7dfb18e82b8}">
           <p14:sldIdLst>
             <p14:sldId id="265"/>
           </p14:sldIdLst>
         </p14:section>
-        <p14:section name="The pilot" id="{7117de9b-d3b6-670e-1311-6312a74b7114}">
+        <p14:section name="The ask" id="{864aa731-9c78-7eb0-1868-87a2d8384dd7}">
           <p14:sldIdLst>
             <p14:sldId id="266"/>
           </p14:sldIdLst>
         </p14:section>
-        <p14:section name="The ask" id="{7421871e-399f-2d2e-61be-a911b1f0dbff}">
+        <p14:section name="One more thing" id="{a3810166-43b9-a6bc-24db-f9a4eb474489}">
           <p14:sldIdLst>
             <p14:sldId id="267"/>
           </p14:sldIdLst>
         </p14:section>
-        <p14:section name="One more thing" id="{90c57ebc-1d64-214e-c814-a41df9a7d53a}">
+        <p14:section name="Someone to ask" id="{7954f74c-1440-85d1-3594-adb9f7c1d7cd}">
           <p14:sldIdLst>
             <p14:sldId id="268"/>
           </p14:sldIdLst>
         </p14:section>
-        <p14:section name="Someone to ask" id="{5228b047-764c-9198-878a-c0a4635c1003}">
+        <p14:section name="Try it yourself" id="{cac7665d-4b20-ac8f-c45b-ac25e4a359cf}">
           <p14:sldIdLst>
             <p14:sldId id="269"/>
           </p14:sldIdLst>
@@ -685,11 +685,9 @@
           <a:p>
             <a:r>
               <a:rPr lang="en-US" dirty="0"/>
-              <a:t>SHOW: “7 in 10” on 137 real messages, scored once, with the two bigger numbers greyed out on the left.
+              <a:t>SHOW: One district: 20 villages, 50 counters, six months, about ₹39 lakh. The next 30 days.
 DO: Click.
-ISHMIIT: We could have opened with a bigger number. Thirty-four of thirty-seven, on messages we wrote. Ninety-two of a hundred and three, against a blind red team.
-ISHMIIT: But real messages are harder. On a hundred and thirty-seven that people in India actually received, scored once, it caught seven in ten.
-ISHMIIT: That’s our number, because it’s the honest one. What it needs now is real users, with messages from their own phones.</a:t>
+ISHMIIT: So, the pilot. One district. Twenty villages. Fifty counters. Six months. About thirty-nine lakh rupees, and the biggest share goes to the local operator at each counter.</a:t>
             </a:r>
             <a:endParaRPr lang="en-US" dirty="0"/>
           </a:p>
@@ -777,10 +775,10 @@
           <a:p>
             <a:r>
               <a:rPr lang="en-US" dirty="0"/>
-              <a:t>SHOW: One district: 20 villages, 50 counters, six months, about ₹39 lakh. The next 30 days.
-DO: Click.
-ISHMIIT: So, the pilot. One district. Twenty villages. Fifty counters. Six months. About thirty-nine lakh rupees, costed line by line.
-ISHMIIT: And the biggest share goes to the local operator who runs each counter.</a:t>
+              <a:t>SHOW: “Introduce us to one district.” Above it: 6 lakh CSCs, and the 50 counters we need.
+DO: Click. Stop moving. Look at the head juror.
+ISHMIIT: And that’s where you come in. India has six lakh Common Services Centres. We need fifty counters.
+ISHMIIT: Introduce us to one district. One morning to start, then six months. And we’ll come back with real numbers, from real people.</a:t>
             </a:r>
             <a:endParaRPr lang="en-US" dirty="0"/>
           </a:p>
@@ -868,10 +866,9 @@
           <a:p>
             <a:r>
               <a:rPr lang="en-US" dirty="0"/>
-              <a:t>SHOW: “Introduce us to one district.” Above it: 6 lakh CSCs, and the 50 counters we need.
-DO: Click. Stop moving. Look at the head juror.
-ISHMIIT: And that’s where you come in. India has six lakh Common Services Centres. We need fifty counters.
-ISHMIIT: Introduce us to one district. One morning to start, then six months. And we’ll come back with real numbers, from real people.</a:t>
+              <a:t>SHOW: Spot the scam: the game on the Learn tab. Two phones: a card (Scam or real?) and Sahayak’s clues after the answer.
+DO: Click. Pause. Take one step toward the jury. (about 2 s)
+ISHMIIT: And, one more thing. The best defence is spotting a scam before it arrives. So we built a game. Spot the scam. You’ll play it in a minute.</a:t>
             </a:r>
             <a:endParaRPr lang="en-US" dirty="0"/>
           </a:p>
@@ -959,9 +956,10 @@
           <a:p>
             <a:r>
               <a:rPr lang="en-US" dirty="0"/>
-              <a:t>SHOW: Spot the scam: the game on the Learn tab. Two phones: a card (Scam or real?) and Sahayak’s clues after the answer.
-DO: Click. Pause. Take one step toward the jury. (about 2 s)
-ISHMIIT: And, one more thing. Sahayak checks a message when you have one. But the best defence is knowing a scam before it arrives. So we built a game. Spot the scam. Five messages a round. Scam, or real? Swipe your answer, and Sahayak shows you the clues it found. Points, levels, badges, and a new message every day. It’s in the Learn tab, on the phone in your hand.</a:t>
+              <a:t>SHOW: Nine at night. Now she has someone to ask. Sahayak, its two promises, and both your names.
+DO: Click.
+ISHMIIT: So, back to her, one last time. Nine at night. The bank is closed. The link is right there. But now, before she taps, she has someone to ask.
+ISHMIIT: Sahayak. Spot the scam before the money moves. Claim what you’re owed.</a:t>
             </a:r>
             <a:endParaRPr lang="en-US" dirty="0"/>
           </a:p>
@@ -1049,12 +1047,13 @@
           <a:p>
             <a:r>
               <a:rPr lang="en-US" dirty="0"/>
-              <a:t>SHOW: Nine at night. Now she has someone to ask. Sahayak, its two promises, and both your names.
+              <a:t>SHOW: The deck’s only QR code, and four things to try. The jury explores the app on their phones or on the laptop.
 DO: Click.
-ISHMIIT: So, back to her, one last time. Nine at night. The bank is closed. The link is right there. But now, before she taps, she has someone to ask.
-ISHMIIT: Sahayak. Spot the scam before the money moves. Claim what you’re owed. Thank you.
-DO: Stand still. Let them applaud. (about 2 s)
-ISHMIIT: Roshan and I would love to take your questions.
+ISHMIIT: But please, don’t take our word for it. Scan this code, and Sahayak opens on your phone. Nothing to install. No account. Or, if you’d rather watch, Roshan will show you on our laptop.
+ROSHAN: Try a scam message, ask what a seventy-four-year-old is owed, or switch to your own language. And turn on airplane mode. It still works.
+DO: Hands-on, about two minutes. Roshan drives the app on the laptop (it is on the screen behind you): the Ayushman ₹500 scam, ‘What am I owed?’ as a 74-year-old, a switch to Tamil, the Learn tab, and the new game. Ishmiit walks the demo phone to any juror whose phone won’t scan. Answer what they ask as they try it; keep it short. (about 120 s)
+DO: When the first juror looks up, or at two minutes: step back to the centre.
+ISHMIIT: Thank you. Roshan and I would love to take your questions.
 DO: Roshan steps to the centre for the questions. Ishmiit stays on stage, half a step back.</a:t>
             </a:r>
             <a:endParaRPr lang="en-US" dirty="0"/>
@@ -1419,8 +1418,8 @@
               <a:t>SHOW: Sahayak’s answer to that SMS on a phone, “Scam.”, and six short cues: three reasons, three things to do.
 DO: Click.
 ISHMIIT: Back to her message. She pastes it in, and in under a second: Scam.
-ISHMIIT: But a warning people don’t understand gets ignored. So Sahayak gives its reasons, in plain words. A bank won’t text from a personal number. That link only looks like SBI’s. And no bank updates KYC through a link.
-ISHMIIT: Then, what to do. Don’t tap. Keep the message as proof. If money’s gone, call 1930. And one more tap warns her family.</a:t>
+ISHMIIT: But a warning people don’t understand gets ignored. So Sahayak tells her why, in plain words. A bank won’t text from a personal number. That link only pretends to be SBI’s.
+ISHMIIT: And what to do: don’t tap, keep the message as proof, and if money’s gone, call 1930.</a:t>
             </a:r>
             <a:endParaRPr lang="en-US" dirty="0"/>
           </a:p>
@@ -1600,18 +1599,10 @@
           <a:p>
             <a:r>
               <a:rPr lang="en-US" dirty="0"/>
-              <a:t>SHOW: The only QR code in the deck, and three things to try.
+              <a:t>SHOW: Three cards with a few words each: You ask. Rules decide. A clear answer. Below: phone and counter agree, 1,841 of 1,841.
 DO: Click.
-ISHMIIT: Don’t take my word for it. Take out your phones, and scan this code. Nothing to install. No account.
-DO: Wait until you see phones come up. (about 3 s)
-ISHMIIT: Tap ‘Check a message’, and try the one asking five hundred rupees for an Ayushman card.
-DO: Wait for the first faces to react. (about 2 s)
-ISHMIIT: Scam. That card is free.
-ISHMIIT: Now, my favourite part. Turn on airplane mode, and try another. It still works.
-DO: Roshan holds up the demo phone.
-ROSHAN: If it doesn’t open, just raise your hand. I’ll bring you this one.
-DO: Stop talking and let them try it. Watch the jury, not the screen. Roshan walks the demo phone to anyone who raises a hand. (about 8 s)
-ISHMIIT: The phone Roshan is holding has been in airplane mode since we walked into this room.</a:t>
+ISHMIIT: She can type, speak, describe a call, or photograph a UPI QR code. Sixty-four scam signals run right on the device, so nothing she types leaves her phone.
+ISHMIIT: She gets one of four answers, and ‘safe’ isn’t one of them. Because no one can promise that.</a:t>
             </a:r>
             <a:endParaRPr lang="en-US" dirty="0"/>
           </a:p>
@@ -1699,12 +1690,13 @@
           <a:p>
             <a:r>
               <a:rPr lang="en-US" dirty="0"/>
-              <a:t>SHOW: Three cards with a few words each: You ask. Rules decide. A clear answer. Below: phone and counter agree, 1,841 of 1,841.
+              <a:t>SHOW: A 3B language model against Sahayak on the same 137 real messages. Roshan speaks.
 DO: Click.
-ISHMIIT: She can type, speak, describe a call, or photograph a UPI QR code.
-ISHMIIT: Sixty-four scam signals run right on the device, so nothing she types leaves her phone.
-ISHMIIT: She gets one of four answers, and ‘safe’ isn’t one of them. No one can promise that.
-ISHMIIT: And her phone answers exactly like the counter. We checked, eighteen hundred and forty-one times.</a:t>
+ISHMIIT: Now, you might ask: why not just let an AI model decide? We asked that too. So we tested one. Roshan.
+DO: Turn to Roshan and step back. Roshan steps forward.
+ROSHAN: On the same hundred and thirty-seven real messages, it caught more scams than we did.
+ROSHAN: But it called twenty-one of thirty-four genuine messages a scam. We did that eleven times. A warning that cries wolf gets ignored. So rules decide, and every answer says why.
+ISHMIIT: Thank you, Roshan.</a:t>
             </a:r>
             <a:endParaRPr lang="en-US" dirty="0"/>
           </a:p>
@@ -1792,14 +1784,10 @@
           <a:p>
             <a:r>
               <a:rPr lang="en-US" dirty="0"/>
-              <a:t>SHOW: A 3B language model against Sahayak on the same 137 real messages. Roshan speaks.
+              <a:t>SHOW: “7 in 10” on 137 real messages, scored once, with the two bigger numbers greyed out on the left.
 DO: Click.
-ISHMIIT: In round one, we said a large AI model would make these decisions. So we tested one. Roshan.
-DO: Turn to Roshan and step back. Roshan steps forward.
-ROSHAN: On the same hundred and thirty-seven real messages, it caught more scams than we did.
-ROSHAN: But it called twenty-one of thirty-four genuine messages a scam. We did that eleven times. A warning that cries wolf gets ignored. So rules decide.
-ROSHAN: We’ll use the model where it helps most: reading messages in the new languages, as a second opinion that can only raise a warning.
-ISHMIIT: Thank you, Roshan.</a:t>
+ISHMIIT: On messages we wrote ourselves, Sahayak caught thirty-four of thirty-seven. But real messages are harder.
+ISHMIIT: On a hundred and thirty-seven that people in India actually received, scored once, it caught seven in ten. That’s the number we stand behind.</a:t>
             </a:r>
             <a:endParaRPr lang="en-US" dirty="0"/>
           </a:p>
@@ -2528,8 +2516,8 @@
         </p:nvSpPr>
         <p:spPr>
           <a:xfrm>
-            <a:off x="822960" y="868680"/>
-            <a:ext cx="3657600" cy="310896"/>
+            <a:off x="822960" y="777240"/>
+            <a:ext cx="7315200" cy="310896"/>
           </a:xfrm>
           <a:prstGeom prst="rect">
             <a:avLst/>
@@ -2547,13 +2535,13 @@
             <a:r>
               <a:rPr lang="en-US" sz="1400" b="1" spc="300" kern="0" dirty="0">
                 <a:solidFill>
-                  <a:srgbClr val="6E6E73"/>
-                </a:solidFill>
-                <a:latin typeface="Arial" pitchFamily="34" charset="0"/>
-                <a:ea typeface="Arial" pitchFamily="34" charset="-122"/>
-                <a:cs typeface="Arial" pitchFamily="34" charset="-120"/>
-              </a:rPr>
-              <a:t>WE COULD HAVE SHOWN YOU</a:t>
+                  <a:srgbClr val="6FA8FF"/>
+                </a:solidFill>
+                <a:latin typeface="Arial" pitchFamily="34" charset="0"/>
+                <a:ea typeface="Arial" pitchFamily="34" charset="-122"/>
+                <a:cs typeface="Arial" pitchFamily="34" charset="-120"/>
+              </a:rPr>
+              <a:t>THE PILOT</a:t>
             </a:r>
             <a:endParaRPr lang="en-US" sz="1400" dirty="0"/>
           </a:p>
@@ -2561,14 +2549,53 @@
       </p:sp>
       <p:sp>
         <p:nvSpPr>
-          <p:cNvPr id="3" name="bigger number 1 rule"/>
+          <p:cNvPr id="3" name="scope"/>
+          <p:cNvSpPr txBox="1"/>
+          <p:nvPr/>
+        </p:nvSpPr>
+        <p:spPr>
+          <a:xfrm>
+            <a:off x="822960" y="1097280"/>
+            <a:ext cx="10058400" cy="960120"/>
+          </a:xfrm>
+          <a:prstGeom prst="rect">
+            <a:avLst/>
+          </a:prstGeom>
+          <a:noFill/>
+          <a:ln/>
+        </p:spPr>
+        <p:txBody>
+          <a:bodyPr wrap="square" lIns="0" tIns="0" rIns="0" bIns="0" rtlCol="0" anchor="ctr"/>
+          <a:lstStyle/>
+          <a:p>
+            <a:pPr indent="0" marL="0">
+              <a:buNone/>
+            </a:pPr>
+            <a:r>
+              <a:rPr lang="en-US" sz="6400" b="1" dirty="0">
+                <a:solidFill>
+                  <a:srgbClr val="F5F5F7"/>
+                </a:solidFill>
+                <a:latin typeface="Arial" pitchFamily="34" charset="0"/>
+                <a:ea typeface="Arial" pitchFamily="34" charset="-122"/>
+                <a:cs typeface="Arial" pitchFamily="34" charset="-120"/>
+              </a:rPr>
+              <a:t>One district.</a:t>
+            </a:r>
+            <a:endParaRPr lang="en-US" sz="6400" dirty="0"/>
+          </a:p>
+        </p:txBody>
+      </p:sp>
+      <p:sp>
+        <p:nvSpPr>
+          <p:cNvPr id="4" name="stat 1 rule"/>
           <p:cNvSpPr/>
           <p:nvPr/>
         </p:nvSpPr>
         <p:spPr>
           <a:xfrm>
-            <a:off x="822960" y="1325880"/>
-            <a:ext cx="3291840" cy="0"/>
+            <a:off x="822960" y="2377440"/>
+            <a:ext cx="2286000" cy="0"/>
           </a:xfrm>
           <a:prstGeom prst="line">
             <a:avLst/>
@@ -2584,92 +2611,92 @@
       </p:sp>
       <p:sp>
         <p:nvSpPr>
-          <p:cNvPr id="4" name="bigger number 1"/>
-          <p:cNvSpPr txBox="1"/>
-          <p:nvPr/>
-        </p:nvSpPr>
-        <p:spPr>
-          <a:xfrm>
-            <a:off x="822960" y="1463040"/>
-            <a:ext cx="3291840" cy="640080"/>
-          </a:xfrm>
-          <a:prstGeom prst="rect">
-            <a:avLst/>
-          </a:prstGeom>
-          <a:noFill/>
-          <a:ln/>
-        </p:spPr>
-        <p:txBody>
-          <a:bodyPr wrap="square" lIns="0" tIns="0" rIns="0" bIns="0" rtlCol="0" anchor="t"/>
-          <a:lstStyle/>
-          <a:p>
-            <a:pPr indent="0" marL="0">
-              <a:buNone/>
-            </a:pPr>
-            <a:r>
-              <a:rPr lang="en-US" sz="4000" b="1" dirty="0">
-                <a:solidFill>
-                  <a:srgbClr val="6E6E73"/>
-                </a:solidFill>
-                <a:latin typeface="Arial" pitchFamily="34" charset="0"/>
-                <a:ea typeface="Arial" pitchFamily="34" charset="-122"/>
-                <a:cs typeface="Arial" pitchFamily="34" charset="-120"/>
-              </a:rPr>
-              <a:t>34 of 37</a:t>
-            </a:r>
-            <a:endParaRPr lang="en-US" sz="4000" dirty="0"/>
-          </a:p>
-        </p:txBody>
-      </p:sp>
-      <p:sp>
-        <p:nvSpPr>
-          <p:cNvPr id="5" name="bigger number 1 label"/>
-          <p:cNvSpPr txBox="1"/>
-          <p:nvPr/>
-        </p:nvSpPr>
-        <p:spPr>
-          <a:xfrm>
-            <a:off x="822960" y="2103120"/>
-            <a:ext cx="3291840" cy="640080"/>
-          </a:xfrm>
-          <a:prstGeom prst="rect">
-            <a:avLst/>
-          </a:prstGeom>
-          <a:noFill/>
-          <a:ln/>
-        </p:spPr>
-        <p:txBody>
-          <a:bodyPr wrap="square" lIns="0" tIns="0" rIns="0" bIns="0" rtlCol="0" anchor="t"/>
-          <a:lstStyle/>
-          <a:p>
-            <a:pPr indent="0" marL="0">
-              <a:buNone/>
-            </a:pPr>
-            <a:r>
-              <a:rPr lang="en-US" sz="1500" dirty="0">
-                <a:solidFill>
-                  <a:srgbClr val="6E6E73"/>
-                </a:solidFill>
-                <a:latin typeface="Arial" pitchFamily="34" charset="0"/>
-                <a:ea typeface="Arial" pitchFamily="34" charset="-122"/>
-                <a:cs typeface="Arial" pitchFamily="34" charset="-120"/>
-              </a:rPr>
-              <a:t>on messages we wrote</a:t>
-            </a:r>
-            <a:endParaRPr lang="en-US" sz="1500" dirty="0"/>
-          </a:p>
-        </p:txBody>
-      </p:sp>
-      <p:sp>
-        <p:nvSpPr>
-          <p:cNvPr id="6" name="bigger number 2 rule"/>
+          <p:cNvPr id="5" name="stat 1"/>
+          <p:cNvSpPr txBox="1"/>
+          <p:nvPr/>
+        </p:nvSpPr>
+        <p:spPr>
+          <a:xfrm>
+            <a:off x="822960" y="2514600"/>
+            <a:ext cx="2286000" cy="822960"/>
+          </a:xfrm>
+          <a:prstGeom prst="rect">
+            <a:avLst/>
+          </a:prstGeom>
+          <a:noFill/>
+          <a:ln/>
+        </p:spPr>
+        <p:txBody>
+          <a:bodyPr wrap="square" lIns="0" tIns="0" rIns="0" bIns="0" rtlCol="0" anchor="t"/>
+          <a:lstStyle/>
+          <a:p>
+            <a:pPr indent="0" marL="0">
+              <a:buNone/>
+            </a:pPr>
+            <a:r>
+              <a:rPr lang="en-US" sz="5200" b="1" dirty="0">
+                <a:solidFill>
+                  <a:srgbClr val="F5F5F7"/>
+                </a:solidFill>
+                <a:latin typeface="Arial" pitchFamily="34" charset="0"/>
+                <a:ea typeface="Arial" pitchFamily="34" charset="-122"/>
+                <a:cs typeface="Arial" pitchFamily="34" charset="-120"/>
+              </a:rPr>
+              <a:t>20</a:t>
+            </a:r>
+            <a:endParaRPr lang="en-US" sz="5200" dirty="0"/>
+          </a:p>
+        </p:txBody>
+      </p:sp>
+      <p:sp>
+        <p:nvSpPr>
+          <p:cNvPr id="6" name="stat 1 label"/>
+          <p:cNvSpPr txBox="1"/>
+          <p:nvPr/>
+        </p:nvSpPr>
+        <p:spPr>
+          <a:xfrm>
+            <a:off x="822960" y="3337560"/>
+            <a:ext cx="2286000" cy="365760"/>
+          </a:xfrm>
+          <a:prstGeom prst="rect">
+            <a:avLst/>
+          </a:prstGeom>
+          <a:noFill/>
+          <a:ln/>
+        </p:spPr>
+        <p:txBody>
+          <a:bodyPr wrap="square" lIns="0" tIns="0" rIns="0" bIns="0" rtlCol="0" anchor="t"/>
+          <a:lstStyle/>
+          <a:p>
+            <a:pPr indent="0" marL="0">
+              <a:buNone/>
+            </a:pPr>
+            <a:r>
+              <a:rPr lang="en-US" sz="1800" dirty="0">
+                <a:solidFill>
+                  <a:srgbClr val="A1A1A6"/>
+                </a:solidFill>
+                <a:latin typeface="Arial" pitchFamily="34" charset="0"/>
+                <a:ea typeface="Arial" pitchFamily="34" charset="-122"/>
+                <a:cs typeface="Arial" pitchFamily="34" charset="-120"/>
+              </a:rPr>
+              <a:t>villages</a:t>
+            </a:r>
+            <a:endParaRPr lang="en-US" sz="1800" dirty="0"/>
+          </a:p>
+        </p:txBody>
+      </p:sp>
+      <p:sp>
+        <p:nvSpPr>
+          <p:cNvPr id="7" name="stat 2 rule"/>
           <p:cNvSpPr/>
           <p:nvPr/>
         </p:nvSpPr>
         <p:spPr>
           <a:xfrm>
-            <a:off x="822960" y="2926080"/>
-            <a:ext cx="3291840" cy="0"/>
+            <a:off x="3337560" y="2377440"/>
+            <a:ext cx="2286000" cy="0"/>
           </a:xfrm>
           <a:prstGeom prst="line">
             <a:avLst/>
@@ -2685,92 +2712,92 @@
       </p:sp>
       <p:sp>
         <p:nvSpPr>
-          <p:cNvPr id="7" name="bigger number 2"/>
-          <p:cNvSpPr txBox="1"/>
-          <p:nvPr/>
-        </p:nvSpPr>
-        <p:spPr>
-          <a:xfrm>
-            <a:off x="822960" y="3063240"/>
-            <a:ext cx="3291840" cy="640080"/>
-          </a:xfrm>
-          <a:prstGeom prst="rect">
-            <a:avLst/>
-          </a:prstGeom>
-          <a:noFill/>
-          <a:ln/>
-        </p:spPr>
-        <p:txBody>
-          <a:bodyPr wrap="square" lIns="0" tIns="0" rIns="0" bIns="0" rtlCol="0" anchor="t"/>
-          <a:lstStyle/>
-          <a:p>
-            <a:pPr indent="0" marL="0">
-              <a:buNone/>
-            </a:pPr>
-            <a:r>
-              <a:rPr lang="en-US" sz="4000" b="1" dirty="0">
-                <a:solidFill>
-                  <a:srgbClr val="6E6E73"/>
-                </a:solidFill>
-                <a:latin typeface="Arial" pitchFamily="34" charset="0"/>
-                <a:ea typeface="Arial" pitchFamily="34" charset="-122"/>
-                <a:cs typeface="Arial" pitchFamily="34" charset="-120"/>
-              </a:rPr>
-              <a:t>92 of 103</a:t>
-            </a:r>
-            <a:endParaRPr lang="en-US" sz="4000" dirty="0"/>
-          </a:p>
-        </p:txBody>
-      </p:sp>
-      <p:sp>
-        <p:nvSpPr>
-          <p:cNvPr id="8" name="bigger number 2 label"/>
-          <p:cNvSpPr txBox="1"/>
-          <p:nvPr/>
-        </p:nvSpPr>
-        <p:spPr>
-          <a:xfrm>
-            <a:off x="822960" y="3703320"/>
-            <a:ext cx="3291840" cy="640080"/>
-          </a:xfrm>
-          <a:prstGeom prst="rect">
-            <a:avLst/>
-          </a:prstGeom>
-          <a:noFill/>
-          <a:ln/>
-        </p:spPr>
-        <p:txBody>
-          <a:bodyPr wrap="square" lIns="0" tIns="0" rIns="0" bIns="0" rtlCol="0" anchor="t"/>
-          <a:lstStyle/>
-          <a:p>
-            <a:pPr indent="0" marL="0">
-              <a:buNone/>
-            </a:pPr>
-            <a:r>
-              <a:rPr lang="en-US" sz="1500" dirty="0">
-                <a:solidFill>
-                  <a:srgbClr val="6E6E73"/>
-                </a:solidFill>
-                <a:latin typeface="Arial" pitchFamily="34" charset="0"/>
-                <a:ea typeface="Arial" pitchFamily="34" charset="-122"/>
-                <a:cs typeface="Arial" pitchFamily="34" charset="-120"/>
-              </a:rPr>
-              <a:t>on a blind red team, written by an AI that never saw our code</a:t>
-            </a:r>
-            <a:endParaRPr lang="en-US" sz="1500" dirty="0"/>
-          </a:p>
-        </p:txBody>
-      </p:sp>
-      <p:sp>
-        <p:nvSpPr>
-          <p:cNvPr id="9" name="divider"/>
+          <p:cNvPr id="8" name="stat 2"/>
+          <p:cNvSpPr txBox="1"/>
+          <p:nvPr/>
+        </p:nvSpPr>
+        <p:spPr>
+          <a:xfrm>
+            <a:off x="3337560" y="2514600"/>
+            <a:ext cx="2286000" cy="822960"/>
+          </a:xfrm>
+          <a:prstGeom prst="rect">
+            <a:avLst/>
+          </a:prstGeom>
+          <a:noFill/>
+          <a:ln/>
+        </p:spPr>
+        <p:txBody>
+          <a:bodyPr wrap="square" lIns="0" tIns="0" rIns="0" bIns="0" rtlCol="0" anchor="t"/>
+          <a:lstStyle/>
+          <a:p>
+            <a:pPr indent="0" marL="0">
+              <a:buNone/>
+            </a:pPr>
+            <a:r>
+              <a:rPr lang="en-US" sz="5200" b="1" dirty="0">
+                <a:solidFill>
+                  <a:srgbClr val="F5F5F7"/>
+                </a:solidFill>
+                <a:latin typeface="Arial" pitchFamily="34" charset="0"/>
+                <a:ea typeface="Arial" pitchFamily="34" charset="-122"/>
+                <a:cs typeface="Arial" pitchFamily="34" charset="-120"/>
+              </a:rPr>
+              <a:t>50</a:t>
+            </a:r>
+            <a:endParaRPr lang="en-US" sz="5200" dirty="0"/>
+          </a:p>
+        </p:txBody>
+      </p:sp>
+      <p:sp>
+        <p:nvSpPr>
+          <p:cNvPr id="9" name="stat 2 label"/>
+          <p:cNvSpPr txBox="1"/>
+          <p:nvPr/>
+        </p:nvSpPr>
+        <p:spPr>
+          <a:xfrm>
+            <a:off x="3337560" y="3337560"/>
+            <a:ext cx="2286000" cy="365760"/>
+          </a:xfrm>
+          <a:prstGeom prst="rect">
+            <a:avLst/>
+          </a:prstGeom>
+          <a:noFill/>
+          <a:ln/>
+        </p:spPr>
+        <p:txBody>
+          <a:bodyPr wrap="square" lIns="0" tIns="0" rIns="0" bIns="0" rtlCol="0" anchor="t"/>
+          <a:lstStyle/>
+          <a:p>
+            <a:pPr indent="0" marL="0">
+              <a:buNone/>
+            </a:pPr>
+            <a:r>
+              <a:rPr lang="en-US" sz="1800" dirty="0">
+                <a:solidFill>
+                  <a:srgbClr val="A1A1A6"/>
+                </a:solidFill>
+                <a:latin typeface="Arial" pitchFamily="34" charset="0"/>
+                <a:ea typeface="Arial" pitchFamily="34" charset="-122"/>
+                <a:cs typeface="Arial" pitchFamily="34" charset="-120"/>
+              </a:rPr>
+              <a:t>counters</a:t>
+            </a:r>
+            <a:endParaRPr lang="en-US" sz="1800" dirty="0"/>
+          </a:p>
+        </p:txBody>
+      </p:sp>
+      <p:sp>
+        <p:nvSpPr>
+          <p:cNvPr id="10" name="stat 3 rule"/>
           <p:cNvSpPr/>
           <p:nvPr/>
         </p:nvSpPr>
         <p:spPr>
           <a:xfrm>
-            <a:off x="4572000" y="914400"/>
-            <a:ext cx="0" cy="4023360"/>
+            <a:off x="5852160" y="2377440"/>
+            <a:ext cx="2286000" cy="0"/>
           </a:xfrm>
           <a:prstGeom prst="line">
             <a:avLst/>
@@ -2786,108 +2813,30 @@
       </p:sp>
       <p:sp>
         <p:nvSpPr>
-          <p:cNvPr id="10" name="eyebrow"/>
-          <p:cNvSpPr txBox="1"/>
-          <p:nvPr/>
-        </p:nvSpPr>
-        <p:spPr>
-          <a:xfrm>
-            <a:off x="5120640" y="868680"/>
-            <a:ext cx="5486400" cy="310896"/>
-          </a:xfrm>
-          <a:prstGeom prst="rect">
-            <a:avLst/>
-          </a:prstGeom>
-          <a:noFill/>
-          <a:ln/>
-        </p:spPr>
-        <p:txBody>
-          <a:bodyPr wrap="square" lIns="0" tIns="0" rIns="0" bIns="0" rtlCol="0" anchor="t"/>
-          <a:lstStyle/>
-          <a:p>
-            <a:pPr indent="0" marL="0">
-              <a:buNone/>
-            </a:pPr>
-            <a:r>
-              <a:rPr lang="en-US" sz="1400" b="1" spc="300" kern="0" dirty="0">
-                <a:solidFill>
-                  <a:srgbClr val="6FA8FF"/>
-                </a:solidFill>
-                <a:latin typeface="Arial" pitchFamily="34" charset="0"/>
-                <a:ea typeface="Arial" pitchFamily="34" charset="-122"/>
-                <a:cs typeface="Arial" pitchFamily="34" charset="-120"/>
-              </a:rPr>
-              <a:t>THE HONEST NUMBER</a:t>
-            </a:r>
-            <a:endParaRPr lang="en-US" sz="1400" dirty="0"/>
-          </a:p>
-        </p:txBody>
-      </p:sp>
-      <p:sp>
-        <p:nvSpPr>
-          <p:cNvPr id="11" name="headline number"/>
-          <p:cNvSpPr txBox="1"/>
-          <p:nvPr/>
-        </p:nvSpPr>
-        <p:spPr>
-          <a:xfrm>
-            <a:off x="5074920" y="1143000"/>
-            <a:ext cx="6400800" cy="2103120"/>
-          </a:xfrm>
-          <a:prstGeom prst="rect">
-            <a:avLst/>
-          </a:prstGeom>
-          <a:noFill/>
-          <a:ln/>
-        </p:spPr>
-        <p:txBody>
-          <a:bodyPr wrap="square" lIns="0" tIns="0" rIns="0" bIns="0" rtlCol="0" anchor="ctr"/>
-          <a:lstStyle/>
-          <a:p>
-            <a:pPr indent="0" marL="0">
-              <a:buNone/>
-            </a:pPr>
-            <a:r>
-              <a:rPr lang="en-US" sz="15000" b="1" dirty="0">
-                <a:solidFill>
-                  <a:srgbClr val="6FA8FF"/>
-                </a:solidFill>
-                <a:latin typeface="Arial" pitchFamily="34" charset="0"/>
-                <a:ea typeface="Arial" pitchFamily="34" charset="-122"/>
-                <a:cs typeface="Arial" pitchFamily="34" charset="-120"/>
-              </a:rPr>
-              <a:t>7 in 10</a:t>
-            </a:r>
-            <a:endParaRPr lang="en-US" sz="15000" dirty="0"/>
-          </a:p>
-        </p:txBody>
-      </p:sp>
-      <p:sp>
-        <p:nvSpPr>
-          <p:cNvPr id="12" name="what it counts"/>
-          <p:cNvSpPr txBox="1"/>
-          <p:nvPr/>
-        </p:nvSpPr>
-        <p:spPr>
-          <a:xfrm>
-            <a:off x="5120640" y="3383280"/>
-            <a:ext cx="6309360" cy="868680"/>
-          </a:xfrm>
-          <a:prstGeom prst="rect">
-            <a:avLst/>
-          </a:prstGeom>
-          <a:noFill/>
-          <a:ln/>
-        </p:spPr>
-        <p:txBody>
-          <a:bodyPr wrap="square" lIns="0" tIns="0" rIns="0" bIns="0" rtlCol="0" anchor="t"/>
-          <a:lstStyle/>
-          <a:p>
-            <a:pPr indent="0" marL="0">
-              <a:buNone/>
-            </a:pPr>
-            <a:r>
-              <a:rPr lang="en-US" sz="2500" b="1" dirty="0">
+          <p:cNvPr id="11" name="stat 3"/>
+          <p:cNvSpPr txBox="1"/>
+          <p:nvPr/>
+        </p:nvSpPr>
+        <p:spPr>
+          <a:xfrm>
+            <a:off x="5852160" y="2514600"/>
+            <a:ext cx="2286000" cy="822960"/>
+          </a:xfrm>
+          <a:prstGeom prst="rect">
+            <a:avLst/>
+          </a:prstGeom>
+          <a:noFill/>
+          <a:ln/>
+        </p:spPr>
+        <p:txBody>
+          <a:bodyPr wrap="square" lIns="0" tIns="0" rIns="0" bIns="0" rtlCol="0" anchor="t"/>
+          <a:lstStyle/>
+          <a:p>
+            <a:pPr indent="0" marL="0">
+              <a:buNone/>
+            </a:pPr>
+            <a:r>
+              <a:rPr lang="en-US" sz="5200" b="1" dirty="0">
                 <a:solidFill>
                   <a:srgbClr val="F5F5F7"/>
                 </a:solidFill>
@@ -2895,38 +2844,38 @@
                 <a:ea typeface="Arial" pitchFamily="34" charset="-122"/>
                 <a:cs typeface="Arial" pitchFamily="34" charset="-120"/>
               </a:rPr>
-              <a:t>scams caught on 137 real messages people in India received.</a:t>
-            </a:r>
-            <a:endParaRPr lang="en-US" sz="2500" dirty="0"/>
-          </a:p>
-        </p:txBody>
-      </p:sp>
-      <p:sp>
-        <p:nvSpPr>
-          <p:cNvPr id="13" name="scored once"/>
-          <p:cNvSpPr txBox="1"/>
-          <p:nvPr/>
-        </p:nvSpPr>
-        <p:spPr>
-          <a:xfrm>
-            <a:off x="5120640" y="4297680"/>
-            <a:ext cx="6309360" cy="411480"/>
-          </a:xfrm>
-          <a:prstGeom prst="rect">
-            <a:avLst/>
-          </a:prstGeom>
-          <a:noFill/>
-          <a:ln/>
-        </p:spPr>
-        <p:txBody>
-          <a:bodyPr wrap="square" lIns="0" tIns="0" rIns="0" bIns="0" rtlCol="0" anchor="t"/>
-          <a:lstStyle/>
-          <a:p>
-            <a:pPr indent="0" marL="0">
-              <a:buNone/>
-            </a:pPr>
-            <a:r>
-              <a:rPr lang="en-US" sz="2200" dirty="0">
+              <a:t>6</a:t>
+            </a:r>
+            <a:endParaRPr lang="en-US" sz="5200" dirty="0"/>
+          </a:p>
+        </p:txBody>
+      </p:sp>
+      <p:sp>
+        <p:nvSpPr>
+          <p:cNvPr id="12" name="stat 3 label"/>
+          <p:cNvSpPr txBox="1"/>
+          <p:nvPr/>
+        </p:nvSpPr>
+        <p:spPr>
+          <a:xfrm>
+            <a:off x="5852160" y="3337560"/>
+            <a:ext cx="2286000" cy="365760"/>
+          </a:xfrm>
+          <a:prstGeom prst="rect">
+            <a:avLst/>
+          </a:prstGeom>
+          <a:noFill/>
+          <a:ln/>
+        </p:spPr>
+        <p:txBody>
+          <a:bodyPr wrap="square" lIns="0" tIns="0" rIns="0" bIns="0" rtlCol="0" anchor="t"/>
+          <a:lstStyle/>
+          <a:p>
+            <a:pPr indent="0" marL="0">
+              <a:buNone/>
+            </a:pPr>
+            <a:r>
+              <a:rPr lang="en-US" sz="1800" dirty="0">
                 <a:solidFill>
                   <a:srgbClr val="A1A1A6"/>
                 </a:solidFill>
@@ -2934,22 +2883,22 @@
                 <a:ea typeface="Arial" pitchFamily="34" charset="-122"/>
                 <a:cs typeface="Arial" pitchFamily="34" charset="-120"/>
               </a:rPr>
-              <a:t>Scored once.</a:t>
-            </a:r>
-            <a:endParaRPr lang="en-US" sz="2200" dirty="0"/>
-          </a:p>
-        </p:txBody>
-      </p:sp>
-      <p:sp>
-        <p:nvSpPr>
-          <p:cNvPr id="14" name="not yet rule"/>
+              <a:t>months</a:t>
+            </a:r>
+            <a:endParaRPr lang="en-US" sz="1800" dirty="0"/>
+          </a:p>
+        </p:txBody>
+      </p:sp>
+      <p:sp>
+        <p:nvSpPr>
+          <p:cNvPr id="13" name="stat 4 rule"/>
           <p:cNvSpPr/>
           <p:nvPr/>
         </p:nvSpPr>
         <p:spPr>
           <a:xfrm>
-            <a:off x="822960" y="5257800"/>
-            <a:ext cx="10545775" cy="0"/>
+            <a:off x="8366760" y="2377440"/>
+            <a:ext cx="2999232" cy="0"/>
           </a:xfrm>
           <a:prstGeom prst="line">
             <a:avLst/>
@@ -2965,30 +2914,30 @@
       </p:sp>
       <p:sp>
         <p:nvSpPr>
-          <p:cNvPr id="15" name="not yet"/>
-          <p:cNvSpPr txBox="1"/>
-          <p:nvPr/>
-        </p:nvSpPr>
-        <p:spPr>
-          <a:xfrm>
-            <a:off x="822960" y="5394960"/>
-            <a:ext cx="10545775" cy="411480"/>
-          </a:xfrm>
-          <a:prstGeom prst="rect">
-            <a:avLst/>
-          </a:prstGeom>
-          <a:noFill/>
-          <a:ln/>
-        </p:spPr>
-        <p:txBody>
-          <a:bodyPr wrap="square" lIns="0" tIns="0" rIns="0" bIns="0" rtlCol="0" anchor="t"/>
-          <a:lstStyle/>
-          <a:p>
-            <a:pPr indent="0" marL="0">
-              <a:buNone/>
-            </a:pPr>
-            <a:r>
-              <a:rPr lang="en-US" sz="2100" b="1" dirty="0">
+          <p:cNvPr id="14" name="stat 4"/>
+          <p:cNvSpPr txBox="1"/>
+          <p:nvPr/>
+        </p:nvSpPr>
+        <p:spPr>
+          <a:xfrm>
+            <a:off x="8366760" y="2514600"/>
+            <a:ext cx="2999232" cy="822960"/>
+          </a:xfrm>
+          <a:prstGeom prst="rect">
+            <a:avLst/>
+          </a:prstGeom>
+          <a:noFill/>
+          <a:ln/>
+        </p:spPr>
+        <p:txBody>
+          <a:bodyPr wrap="square" lIns="0" tIns="0" rIns="0" bIns="0" rtlCol="0" anchor="t"/>
+          <a:lstStyle/>
+          <a:p>
+            <a:pPr indent="0" marL="0">
+              <a:buNone/>
+            </a:pPr>
+            <a:r>
+              <a:rPr lang="en-US" sz="5200" b="1" dirty="0">
                 <a:solidFill>
                   <a:srgbClr val="E2C28A"/>
                 </a:solidFill>
@@ -2996,13 +2945,175 @@
                 <a:ea typeface="Arial" pitchFamily="34" charset="-122"/>
                 <a:cs typeface="Arial" pitchFamily="34" charset="-120"/>
               </a:rPr>
-              <a:t>Not yet: </a:t>
-            </a:r>
-            <a:pPr indent="0" marL="0">
-              <a:buNone/>
-            </a:pPr>
-            <a:r>
-              <a:rPr lang="en-US" sz="2100" dirty="0">
+              <a:t>₹39 lakh</a:t>
+            </a:r>
+            <a:endParaRPr lang="en-US" sz="5200" dirty="0"/>
+          </a:p>
+        </p:txBody>
+      </p:sp>
+      <p:sp>
+        <p:nvSpPr>
+          <p:cNvPr id="15" name="stat 4 label"/>
+          <p:cNvSpPr txBox="1"/>
+          <p:nvPr/>
+        </p:nvSpPr>
+        <p:spPr>
+          <a:xfrm>
+            <a:off x="8366760" y="3337560"/>
+            <a:ext cx="2999232" cy="365760"/>
+          </a:xfrm>
+          <a:prstGeom prst="rect">
+            <a:avLst/>
+          </a:prstGeom>
+          <a:noFill/>
+          <a:ln/>
+        </p:spPr>
+        <p:txBody>
+          <a:bodyPr wrap="square" lIns="0" tIns="0" rIns="0" bIns="0" rtlCol="0" anchor="t"/>
+          <a:lstStyle/>
+          <a:p>
+            <a:pPr indent="0" marL="0">
+              <a:buNone/>
+            </a:pPr>
+            <a:r>
+              <a:rPr lang="en-US" sz="1800" dirty="0">
+                <a:solidFill>
+                  <a:srgbClr val="A1A1A6"/>
+                </a:solidFill>
+                <a:latin typeface="Arial" pitchFamily="34" charset="0"/>
+                <a:ea typeface="Arial" pitchFamily="34" charset="-122"/>
+                <a:cs typeface="Arial" pitchFamily="34" charset="-120"/>
+              </a:rPr>
+              <a:t>estimated</a:t>
+            </a:r>
+            <a:endParaRPr lang="en-US" sz="1800" dirty="0"/>
+          </a:p>
+        </p:txBody>
+      </p:sp>
+      <p:sp>
+        <p:nvSpPr>
+          <p:cNvPr id="16" name="eyebrow"/>
+          <p:cNvSpPr txBox="1"/>
+          <p:nvPr/>
+        </p:nvSpPr>
+        <p:spPr>
+          <a:xfrm>
+            <a:off x="822960" y="4343400"/>
+            <a:ext cx="7315200" cy="310896"/>
+          </a:xfrm>
+          <a:prstGeom prst="rect">
+            <a:avLst/>
+          </a:prstGeom>
+          <a:noFill/>
+          <a:ln/>
+        </p:spPr>
+        <p:txBody>
+          <a:bodyPr wrap="square" lIns="0" tIns="0" rIns="0" bIns="0" rtlCol="0" anchor="t"/>
+          <a:lstStyle/>
+          <a:p>
+            <a:pPr indent="0" marL="0">
+              <a:buNone/>
+            </a:pPr>
+            <a:r>
+              <a:rPr lang="en-US" sz="1400" b="1" spc="300" kern="0" dirty="0">
+                <a:solidFill>
+                  <a:srgbClr val="6E6E73"/>
+                </a:solidFill>
+                <a:latin typeface="Arial" pitchFamily="34" charset="0"/>
+                <a:ea typeface="Arial" pitchFamily="34" charset="-122"/>
+                <a:cs typeface="Arial" pitchFamily="34" charset="-120"/>
+              </a:rPr>
+              <a:t>THE NEXT 30 DAYS</a:t>
+            </a:r>
+            <a:endParaRPr lang="en-US" sz="1400" dirty="0"/>
+          </a:p>
+        </p:txBody>
+      </p:sp>
+      <p:sp>
+        <p:nvSpPr>
+          <p:cNvPr id="17" name="number 1"/>
+          <p:cNvSpPr/>
+          <p:nvPr/>
+        </p:nvSpPr>
+        <p:spPr>
+          <a:xfrm>
+            <a:off x="822960" y="4754880"/>
+            <a:ext cx="384048" cy="384048"/>
+          </a:xfrm>
+          <a:prstGeom prst="ellipse">
+            <a:avLst/>
+          </a:prstGeom>
+          <a:solidFill>
+            <a:srgbClr val="6FA8FF"/>
+          </a:solidFill>
+          <a:ln/>
+        </p:spPr>
+      </p:sp>
+      <p:sp>
+        <p:nvSpPr>
+          <p:cNvPr id="18" name="number 1 label"/>
+          <p:cNvSpPr txBox="1"/>
+          <p:nvPr/>
+        </p:nvSpPr>
+        <p:spPr>
+          <a:xfrm>
+            <a:off x="822960" y="4754880"/>
+            <a:ext cx="384048" cy="384048"/>
+          </a:xfrm>
+          <a:prstGeom prst="rect">
+            <a:avLst/>
+          </a:prstGeom>
+          <a:noFill/>
+          <a:ln/>
+        </p:spPr>
+        <p:txBody>
+          <a:bodyPr wrap="square" lIns="0" tIns="0" rIns="0" bIns="0" rtlCol="0" anchor="ctr"/>
+          <a:lstStyle/>
+          <a:p>
+            <a:pPr algn="ctr" indent="0" marL="0">
+              <a:buNone/>
+            </a:pPr>
+            <a:r>
+              <a:rPr lang="en-US" sz="1400" b="1" dirty="0">
+                <a:solidFill>
+                  <a:srgbClr val="000000"/>
+                </a:solidFill>
+                <a:latin typeface="Arial" pitchFamily="34" charset="0"/>
+                <a:ea typeface="Arial" pitchFamily="34" charset="-122"/>
+                <a:cs typeface="Arial" pitchFamily="34" charset="-120"/>
+              </a:rPr>
+              <a:t>1</a:t>
+            </a:r>
+            <a:endParaRPr lang="en-US" sz="1400" dirty="0"/>
+          </a:p>
+        </p:txBody>
+      </p:sp>
+      <p:sp>
+        <p:nvSpPr>
+          <p:cNvPr id="19" name="next 1"/>
+          <p:cNvSpPr txBox="1"/>
+          <p:nvPr/>
+        </p:nvSpPr>
+        <p:spPr>
+          <a:xfrm>
+            <a:off x="1371600" y="4736592"/>
+            <a:ext cx="2926080" cy="731520"/>
+          </a:xfrm>
+          <a:prstGeom prst="rect">
+            <a:avLst/>
+          </a:prstGeom>
+          <a:noFill/>
+          <a:ln/>
+        </p:spPr>
+        <p:txBody>
+          <a:bodyPr wrap="square" lIns="0" tIns="0" rIns="0" bIns="0" rtlCol="0" anchor="t"/>
+          <a:lstStyle/>
+          <a:p>
+            <a:pPr indent="0" marL="0">
+              <a:buNone/>
+            </a:pPr>
+            <a:r>
+              <a:rPr lang="en-US" sz="1900" b="1" dirty="0">
                 <a:solidFill>
                   <a:srgbClr val="F5F5F7"/>
                 </a:solidFill>
@@ -3010,15 +3121,211 @@
                 <a:ea typeface="Arial" pitchFamily="34" charset="-122"/>
                 <a:cs typeface="Arial" pitchFamily="34" charset="-120"/>
               </a:rPr>
-              <a:t>real users, and messages from people’s own phones. That’s next.</a:t>
-            </a:r>
-            <a:endParaRPr lang="en-US" sz="2100" dirty="0"/>
-          </a:p>
-        </p:txBody>
-      </p:sp>
-      <p:sp>
-        <p:nvSpPr>
-          <p:cNvPr id="16" name="source"/>
+              <a:t>A field morning at a CSC</a:t>
+            </a:r>
+            <a:endParaRPr lang="en-US" sz="1900" dirty="0"/>
+          </a:p>
+        </p:txBody>
+      </p:sp>
+      <p:sp>
+        <p:nvSpPr>
+          <p:cNvPr id="20" name="number 2"/>
+          <p:cNvSpPr/>
+          <p:nvPr/>
+        </p:nvSpPr>
+        <p:spPr>
+          <a:xfrm>
+            <a:off x="4434840" y="4754880"/>
+            <a:ext cx="384048" cy="384048"/>
+          </a:xfrm>
+          <a:prstGeom prst="ellipse">
+            <a:avLst/>
+          </a:prstGeom>
+          <a:solidFill>
+            <a:srgbClr val="6FA8FF"/>
+          </a:solidFill>
+          <a:ln/>
+        </p:spPr>
+      </p:sp>
+      <p:sp>
+        <p:nvSpPr>
+          <p:cNvPr id="21" name="number 2 label"/>
+          <p:cNvSpPr txBox="1"/>
+          <p:nvPr/>
+        </p:nvSpPr>
+        <p:spPr>
+          <a:xfrm>
+            <a:off x="4434840" y="4754880"/>
+            <a:ext cx="384048" cy="384048"/>
+          </a:xfrm>
+          <a:prstGeom prst="rect">
+            <a:avLst/>
+          </a:prstGeom>
+          <a:noFill/>
+          <a:ln/>
+        </p:spPr>
+        <p:txBody>
+          <a:bodyPr wrap="square" lIns="0" tIns="0" rIns="0" bIns="0" rtlCol="0" anchor="ctr"/>
+          <a:lstStyle/>
+          <a:p>
+            <a:pPr algn="ctr" indent="0" marL="0">
+              <a:buNone/>
+            </a:pPr>
+            <a:r>
+              <a:rPr lang="en-US" sz="1400" b="1" dirty="0">
+                <a:solidFill>
+                  <a:srgbClr val="000000"/>
+                </a:solidFill>
+                <a:latin typeface="Arial" pitchFamily="34" charset="0"/>
+                <a:ea typeface="Arial" pitchFamily="34" charset="-122"/>
+                <a:cs typeface="Arial" pitchFamily="34" charset="-120"/>
+              </a:rPr>
+              <a:t>2</a:t>
+            </a:r>
+            <a:endParaRPr lang="en-US" sz="1400" dirty="0"/>
+          </a:p>
+        </p:txBody>
+      </p:sp>
+      <p:sp>
+        <p:nvSpPr>
+          <p:cNvPr id="22" name="next 2"/>
+          <p:cNvSpPr txBox="1"/>
+          <p:nvPr/>
+        </p:nvSpPr>
+        <p:spPr>
+          <a:xfrm>
+            <a:off x="4983480" y="4736592"/>
+            <a:ext cx="2926080" cy="731520"/>
+          </a:xfrm>
+          <a:prstGeom prst="rect">
+            <a:avLst/>
+          </a:prstGeom>
+          <a:noFill/>
+          <a:ln/>
+        </p:spPr>
+        <p:txBody>
+          <a:bodyPr wrap="square" lIns="0" tIns="0" rIns="0" bIns="0" rtlCol="0" anchor="t"/>
+          <a:lstStyle/>
+          <a:p>
+            <a:pPr indent="0" marL="0">
+              <a:buNone/>
+            </a:pPr>
+            <a:r>
+              <a:rPr lang="en-US" sz="1900" b="1" dirty="0">
+                <a:solidFill>
+                  <a:srgbClr val="F5F5F7"/>
+                </a:solidFill>
+                <a:latin typeface="Arial" pitchFamily="34" charset="0"/>
+                <a:ea typeface="Arial" pitchFamily="34" charset="-122"/>
+                <a:cs typeface="Arial" pitchFamily="34" charset="-120"/>
+              </a:rPr>
+              <a:t>Real messages from people’s own phones</a:t>
+            </a:r>
+            <a:endParaRPr lang="en-US" sz="1900" dirty="0"/>
+          </a:p>
+        </p:txBody>
+      </p:sp>
+      <p:sp>
+        <p:nvSpPr>
+          <p:cNvPr id="23" name="number 3"/>
+          <p:cNvSpPr/>
+          <p:nvPr/>
+        </p:nvSpPr>
+        <p:spPr>
+          <a:xfrm>
+            <a:off x="8046720" y="4754880"/>
+            <a:ext cx="384048" cy="384048"/>
+          </a:xfrm>
+          <a:prstGeom prst="ellipse">
+            <a:avLst/>
+          </a:prstGeom>
+          <a:solidFill>
+            <a:srgbClr val="6FA8FF"/>
+          </a:solidFill>
+          <a:ln/>
+        </p:spPr>
+      </p:sp>
+      <p:sp>
+        <p:nvSpPr>
+          <p:cNvPr id="24" name="number 3 label"/>
+          <p:cNvSpPr txBox="1"/>
+          <p:nvPr/>
+        </p:nvSpPr>
+        <p:spPr>
+          <a:xfrm>
+            <a:off x="8046720" y="4754880"/>
+            <a:ext cx="384048" cy="384048"/>
+          </a:xfrm>
+          <a:prstGeom prst="rect">
+            <a:avLst/>
+          </a:prstGeom>
+          <a:noFill/>
+          <a:ln/>
+        </p:spPr>
+        <p:txBody>
+          <a:bodyPr wrap="square" lIns="0" tIns="0" rIns="0" bIns="0" rtlCol="0" anchor="ctr"/>
+          <a:lstStyle/>
+          <a:p>
+            <a:pPr algn="ctr" indent="0" marL="0">
+              <a:buNone/>
+            </a:pPr>
+            <a:r>
+              <a:rPr lang="en-US" sz="1400" b="1" dirty="0">
+                <a:solidFill>
+                  <a:srgbClr val="000000"/>
+                </a:solidFill>
+                <a:latin typeface="Arial" pitchFamily="34" charset="0"/>
+                <a:ea typeface="Arial" pitchFamily="34" charset="-122"/>
+                <a:cs typeface="Arial" pitchFamily="34" charset="-120"/>
+              </a:rPr>
+              <a:t>3</a:t>
+            </a:r>
+            <a:endParaRPr lang="en-US" sz="1400" dirty="0"/>
+          </a:p>
+        </p:txBody>
+      </p:sp>
+      <p:sp>
+        <p:nvSpPr>
+          <p:cNvPr id="25" name="next 3"/>
+          <p:cNvSpPr txBox="1"/>
+          <p:nvPr/>
+        </p:nvSpPr>
+        <p:spPr>
+          <a:xfrm>
+            <a:off x="8595360" y="4736592"/>
+            <a:ext cx="2926080" cy="731520"/>
+          </a:xfrm>
+          <a:prstGeom prst="rect">
+            <a:avLst/>
+          </a:prstGeom>
+          <a:noFill/>
+          <a:ln/>
+        </p:spPr>
+        <p:txBody>
+          <a:bodyPr wrap="square" lIns="0" tIns="0" rIns="0" bIns="0" rtlCol="0" anchor="t"/>
+          <a:lstStyle/>
+          <a:p>
+            <a:pPr indent="0" marL="0">
+              <a:buNone/>
+            </a:pPr>
+            <a:r>
+              <a:rPr lang="en-US" sz="1900" b="1" dirty="0">
+                <a:solidFill>
+                  <a:srgbClr val="F5F5F7"/>
+                </a:solidFill>
+                <a:latin typeface="Arial" pitchFamily="34" charset="0"/>
+                <a:ea typeface="Arial" pitchFamily="34" charset="-122"/>
+                <a:cs typeface="Arial" pitchFamily="34" charset="-120"/>
+              </a:rPr>
+              <a:t>A district partner</a:t>
+            </a:r>
+            <a:endParaRPr lang="en-US" sz="1900" dirty="0"/>
+          </a:p>
+        </p:txBody>
+      </p:sp>
+      <p:sp>
+        <p:nvSpPr>
+          <p:cNvPr id="26" name="source"/>
           <p:cNvSpPr txBox="1"/>
           <p:nvPr/>
         </p:nvSpPr>
@@ -3049,7 +3356,7 @@
                 <a:ea typeface="Arial" pitchFamily="34" charset="-122"/>
                 <a:cs typeface="Arial" pitchFamily="34" charset="-120"/>
               </a:rPr>
-              <a:t>In Hindi, English and Hinglish: 67 of 97 scams caught, 11 of 34 genuine flagged; published by the Income Tax portal, PIB Fact Check and fact-checkers · first runs, bench/results</a:t>
+              <a:t>Estimates, not quotes: the team’s line-item budget, 7 Oct 2026 (₹39.2 lakh). At 500 counters, about ₹24,000 a counter a year; the operator’s ₹9,600 is the biggest part.</a:t>
             </a:r>
             <a:endParaRPr lang="en-US" sz="1050" dirty="0"/>
           </a:p>
@@ -3082,13 +3389,94 @@
       </p:grpSpPr>
       <p:sp>
         <p:nvSpPr>
-          <p:cNvPr id="2" name="eyebrow"/>
-          <p:cNvSpPr txBox="1"/>
-          <p:nvPr/>
-        </p:nvSpPr>
-        <p:spPr>
-          <a:xfrm>
-            <a:off x="822960" y="777240"/>
+          <p:cNvPr id="2" name="scale"/>
+          <p:cNvSpPr txBox="1"/>
+          <p:nvPr/>
+        </p:nvSpPr>
+        <p:spPr>
+          <a:xfrm>
+            <a:off x="822960" y="1417320"/>
+            <a:ext cx="10515600" cy="502920"/>
+          </a:xfrm>
+          <a:prstGeom prst="rect">
+            <a:avLst/>
+          </a:prstGeom>
+          <a:noFill/>
+          <a:ln/>
+        </p:spPr>
+        <p:txBody>
+          <a:bodyPr wrap="square" lIns="0" tIns="0" rIns="0" bIns="0" rtlCol="0" anchor="t"/>
+          <a:lstStyle/>
+          <a:p>
+            <a:pPr indent="0" marL="0">
+              <a:buNone/>
+            </a:pPr>
+            <a:r>
+              <a:rPr lang="en-US" sz="2600" dirty="0">
+                <a:solidFill>
+                  <a:srgbClr val="A1A1A6"/>
+                </a:solidFill>
+                <a:latin typeface="Arial" pitchFamily="34" charset="0"/>
+                <a:ea typeface="Arial" pitchFamily="34" charset="-122"/>
+                <a:cs typeface="Arial" pitchFamily="34" charset="-120"/>
+              </a:rPr>
+              <a:t>India has </a:t>
+            </a:r>
+            <a:pPr indent="0" marL="0">
+              <a:buNone/>
+            </a:pPr>
+            <a:r>
+              <a:rPr lang="en-US" sz="2600" b="1" dirty="0">
+                <a:solidFill>
+                  <a:srgbClr val="F5F5F7"/>
+                </a:solidFill>
+                <a:latin typeface="Arial" pitchFamily="34" charset="0"/>
+                <a:ea typeface="Arial" pitchFamily="34" charset="-122"/>
+                <a:cs typeface="Arial" pitchFamily="34" charset="-120"/>
+              </a:rPr>
+              <a:t>6 lakh CSCs.</a:t>
+            </a:r>
+            <a:pPr indent="0" marL="0">
+              <a:buNone/>
+            </a:pPr>
+            <a:r>
+              <a:rPr lang="en-US" sz="2600" dirty="0">
+                <a:solidFill>
+                  <a:srgbClr val="A1A1A6"/>
+                </a:solidFill>
+                <a:latin typeface="Arial" pitchFamily="34" charset="0"/>
+                <a:ea typeface="Arial" pitchFamily="34" charset="-122"/>
+                <a:cs typeface="Arial" pitchFamily="34" charset="-120"/>
+              </a:rPr>
+              <a:t>  We’re asking for </a:t>
+            </a:r>
+            <a:pPr indent="0" marL="0">
+              <a:buNone/>
+            </a:pPr>
+            <a:r>
+              <a:rPr lang="en-US" sz="2600" b="1" dirty="0">
+                <a:solidFill>
+                  <a:srgbClr val="F5F5F7"/>
+                </a:solidFill>
+                <a:latin typeface="Arial" pitchFamily="34" charset="0"/>
+                <a:ea typeface="Arial" pitchFamily="34" charset="-122"/>
+                <a:cs typeface="Arial" pitchFamily="34" charset="-120"/>
+              </a:rPr>
+              <a:t>50 counters.</a:t>
+            </a:r>
+            <a:endParaRPr lang="en-US" sz="2600" dirty="0"/>
+          </a:p>
+        </p:txBody>
+      </p:sp>
+      <p:sp>
+        <p:nvSpPr>
+          <p:cNvPr id="3" name="eyebrow"/>
+          <p:cNvSpPr txBox="1"/>
+          <p:nvPr/>
+        </p:nvSpPr>
+        <p:spPr>
+          <a:xfrm>
+            <a:off x="822960" y="2377440"/>
             <a:ext cx="7315200" cy="310896"/>
           </a:xfrm>
           <a:prstGeom prst="rect">
@@ -3107,13 +3495,13 @@
             <a:r>
               <a:rPr lang="en-US" sz="1400" b="1" spc="300" kern="0" dirty="0">
                 <a:solidFill>
-                  <a:srgbClr val="6FA8FF"/>
-                </a:solidFill>
-                <a:latin typeface="Arial" pitchFamily="34" charset="0"/>
-                <a:ea typeface="Arial" pitchFamily="34" charset="-122"/>
-                <a:cs typeface="Arial" pitchFamily="34" charset="-120"/>
-              </a:rPr>
-              <a:t>THE PILOT</a:t>
+                  <a:srgbClr val="E2C28A"/>
+                </a:solidFill>
+                <a:latin typeface="Arial" pitchFamily="34" charset="0"/>
+                <a:ea typeface="Arial" pitchFamily="34" charset="-122"/>
+                <a:cs typeface="Arial" pitchFamily="34" charset="-120"/>
+              </a:rPr>
+              <a:t>OUR ASK</a:t>
             </a:r>
             <a:endParaRPr lang="en-US" sz="1400" dirty="0"/>
           </a:p>
@@ -3121,14 +3509,14 @@
       </p:sp>
       <p:sp>
         <p:nvSpPr>
-          <p:cNvPr id="3" name="scope"/>
-          <p:cNvSpPr txBox="1"/>
-          <p:nvPr/>
-        </p:nvSpPr>
-        <p:spPr>
-          <a:xfrm>
-            <a:off x="822960" y="1097280"/>
-            <a:ext cx="10058400" cy="960120"/>
+          <p:cNvPr id="4" name="the ask"/>
+          <p:cNvSpPr txBox="1"/>
+          <p:nvPr/>
+        </p:nvSpPr>
+        <p:spPr>
+          <a:xfrm>
+            <a:off x="822960" y="2697480"/>
+            <a:ext cx="10607040" cy="1188720"/>
           </a:xfrm>
           <a:prstGeom prst="rect">
             <a:avLst/>
@@ -3144,7 +3532,7 @@
               <a:buNone/>
             </a:pPr>
             <a:r>
-              <a:rPr lang="en-US" sz="6400" b="1" dirty="0">
+              <a:rPr lang="en-US" sz="5600" b="1" dirty="0">
                 <a:solidFill>
                   <a:srgbClr val="F5F5F7"/>
                 </a:solidFill>
@@ -3152,22 +3540,22 @@
                 <a:ea typeface="Arial" pitchFamily="34" charset="-122"/>
                 <a:cs typeface="Arial" pitchFamily="34" charset="-120"/>
               </a:rPr>
-              <a:t>One district.</a:t>
-            </a:r>
-            <a:endParaRPr lang="en-US" sz="6400" dirty="0"/>
-          </a:p>
-        </p:txBody>
-      </p:sp>
-      <p:sp>
-        <p:nvSpPr>
-          <p:cNvPr id="4" name="stat 1 rule"/>
+              <a:t>Introduce us to one district.</a:t>
+            </a:r>
+            <a:endParaRPr lang="en-US" sz="5600" dirty="0"/>
+          </a:p>
+        </p:txBody>
+      </p:sp>
+      <p:sp>
+        <p:nvSpPr>
+          <p:cNvPr id="5" name="step 1 rule"/>
           <p:cNvSpPr/>
           <p:nvPr/>
         </p:nvSpPr>
         <p:spPr>
           <a:xfrm>
-            <a:off x="822960" y="2377440"/>
-            <a:ext cx="2286000" cy="0"/>
+            <a:off x="822960" y="4572000"/>
+            <a:ext cx="3291840" cy="0"/>
           </a:xfrm>
           <a:prstGeom prst="line">
             <a:avLst/>
@@ -3183,30 +3571,30 @@
       </p:sp>
       <p:sp>
         <p:nvSpPr>
-          <p:cNvPr id="5" name="stat 1"/>
-          <p:cNvSpPr txBox="1"/>
-          <p:nvPr/>
-        </p:nvSpPr>
-        <p:spPr>
-          <a:xfrm>
-            <a:off x="822960" y="2514600"/>
-            <a:ext cx="2286000" cy="822960"/>
-          </a:xfrm>
-          <a:prstGeom prst="rect">
-            <a:avLst/>
-          </a:prstGeom>
-          <a:noFill/>
-          <a:ln/>
-        </p:spPr>
-        <p:txBody>
-          <a:bodyPr wrap="square" lIns="0" tIns="0" rIns="0" bIns="0" rtlCol="0" anchor="t"/>
-          <a:lstStyle/>
-          <a:p>
-            <a:pPr indent="0" marL="0">
-              <a:buNone/>
-            </a:pPr>
-            <a:r>
-              <a:rPr lang="en-US" sz="5200" b="1" dirty="0">
+          <p:cNvPr id="6" name="step 1"/>
+          <p:cNvSpPr txBox="1"/>
+          <p:nvPr/>
+        </p:nvSpPr>
+        <p:spPr>
+          <a:xfrm>
+            <a:off x="822960" y="4709160"/>
+            <a:ext cx="3520440" cy="731520"/>
+          </a:xfrm>
+          <a:prstGeom prst="rect">
+            <a:avLst/>
+          </a:prstGeom>
+          <a:noFill/>
+          <a:ln/>
+        </p:spPr>
+        <p:txBody>
+          <a:bodyPr wrap="square" lIns="0" tIns="0" rIns="0" bIns="0" rtlCol="0" anchor="t"/>
+          <a:lstStyle/>
+          <a:p>
+            <a:pPr indent="0" marL="0">
+              <a:buNone/>
+            </a:pPr>
+            <a:r>
+              <a:rPr lang="en-US" sz="2100" b="1" dirty="0">
                 <a:solidFill>
                   <a:srgbClr val="F5F5F7"/>
                 </a:solidFill>
@@ -3214,61 +3602,22 @@
                 <a:ea typeface="Arial" pitchFamily="34" charset="-122"/>
                 <a:cs typeface="Arial" pitchFamily="34" charset="-120"/>
               </a:rPr>
-              <a:t>20</a:t>
-            </a:r>
-            <a:endParaRPr lang="en-US" sz="5200" dirty="0"/>
-          </a:p>
-        </p:txBody>
-      </p:sp>
-      <p:sp>
-        <p:nvSpPr>
-          <p:cNvPr id="6" name="stat 1 label"/>
-          <p:cNvSpPr txBox="1"/>
-          <p:nvPr/>
-        </p:nvSpPr>
-        <p:spPr>
-          <a:xfrm>
-            <a:off x="822960" y="3337560"/>
-            <a:ext cx="2286000" cy="365760"/>
-          </a:xfrm>
-          <a:prstGeom prst="rect">
-            <a:avLst/>
-          </a:prstGeom>
-          <a:noFill/>
-          <a:ln/>
-        </p:spPr>
-        <p:txBody>
-          <a:bodyPr wrap="square" lIns="0" tIns="0" rIns="0" bIns="0" rtlCol="0" anchor="t"/>
-          <a:lstStyle/>
-          <a:p>
-            <a:pPr indent="0" marL="0">
-              <a:buNone/>
-            </a:pPr>
-            <a:r>
-              <a:rPr lang="en-US" sz="1800" dirty="0">
-                <a:solidFill>
-                  <a:srgbClr val="A1A1A6"/>
-                </a:solidFill>
-                <a:latin typeface="Arial" pitchFamily="34" charset="0"/>
-                <a:ea typeface="Arial" pitchFamily="34" charset="-122"/>
-                <a:cs typeface="Arial" pitchFamily="34" charset="-120"/>
-              </a:rPr>
-              <a:t>villages</a:t>
-            </a:r>
-            <a:endParaRPr lang="en-US" sz="1800" dirty="0"/>
-          </a:p>
-        </p:txBody>
-      </p:sp>
-      <p:sp>
-        <p:nvSpPr>
-          <p:cNvPr id="7" name="stat 2 rule"/>
+              <a:t>One morning.</a:t>
+            </a:r>
+            <a:endParaRPr lang="en-US" sz="2100" dirty="0"/>
+          </a:p>
+        </p:txBody>
+      </p:sp>
+      <p:sp>
+        <p:nvSpPr>
+          <p:cNvPr id="7" name="step 2 rule"/>
           <p:cNvSpPr/>
           <p:nvPr/>
         </p:nvSpPr>
         <p:spPr>
           <a:xfrm>
-            <a:off x="3337560" y="2377440"/>
-            <a:ext cx="2286000" cy="0"/>
+            <a:off x="4434840" y="4572000"/>
+            <a:ext cx="3291840" cy="0"/>
           </a:xfrm>
           <a:prstGeom prst="line">
             <a:avLst/>
@@ -3284,30 +3633,30 @@
       </p:sp>
       <p:sp>
         <p:nvSpPr>
-          <p:cNvPr id="8" name="stat 2"/>
-          <p:cNvSpPr txBox="1"/>
-          <p:nvPr/>
-        </p:nvSpPr>
-        <p:spPr>
-          <a:xfrm>
-            <a:off x="3337560" y="2514600"/>
-            <a:ext cx="2286000" cy="822960"/>
-          </a:xfrm>
-          <a:prstGeom prst="rect">
-            <a:avLst/>
-          </a:prstGeom>
-          <a:noFill/>
-          <a:ln/>
-        </p:spPr>
-        <p:txBody>
-          <a:bodyPr wrap="square" lIns="0" tIns="0" rIns="0" bIns="0" rtlCol="0" anchor="t"/>
-          <a:lstStyle/>
-          <a:p>
-            <a:pPr indent="0" marL="0">
-              <a:buNone/>
-            </a:pPr>
-            <a:r>
-              <a:rPr lang="en-US" sz="5200" b="1" dirty="0">
+          <p:cNvPr id="8" name="step 2"/>
+          <p:cNvSpPr txBox="1"/>
+          <p:nvPr/>
+        </p:nvSpPr>
+        <p:spPr>
+          <a:xfrm>
+            <a:off x="4434840" y="4709160"/>
+            <a:ext cx="3520440" cy="731520"/>
+          </a:xfrm>
+          <a:prstGeom prst="rect">
+            <a:avLst/>
+          </a:prstGeom>
+          <a:noFill/>
+          <a:ln/>
+        </p:spPr>
+        <p:txBody>
+          <a:bodyPr wrap="square" lIns="0" tIns="0" rIns="0" bIns="0" rtlCol="0" anchor="t"/>
+          <a:lstStyle/>
+          <a:p>
+            <a:pPr indent="0" marL="0">
+              <a:buNone/>
+            </a:pPr>
+            <a:r>
+              <a:rPr lang="en-US" sz="2100" b="1" dirty="0">
                 <a:solidFill>
                   <a:srgbClr val="F5F5F7"/>
                 </a:solidFill>
@@ -3315,61 +3664,22 @@
                 <a:ea typeface="Arial" pitchFamily="34" charset="-122"/>
                 <a:cs typeface="Arial" pitchFamily="34" charset="-120"/>
               </a:rPr>
-              <a:t>50</a:t>
-            </a:r>
-            <a:endParaRPr lang="en-US" sz="5200" dirty="0"/>
-          </a:p>
-        </p:txBody>
-      </p:sp>
-      <p:sp>
-        <p:nvSpPr>
-          <p:cNvPr id="9" name="stat 2 label"/>
-          <p:cNvSpPr txBox="1"/>
-          <p:nvPr/>
-        </p:nvSpPr>
-        <p:spPr>
-          <a:xfrm>
-            <a:off x="3337560" y="3337560"/>
-            <a:ext cx="2286000" cy="365760"/>
-          </a:xfrm>
-          <a:prstGeom prst="rect">
-            <a:avLst/>
-          </a:prstGeom>
-          <a:noFill/>
-          <a:ln/>
-        </p:spPr>
-        <p:txBody>
-          <a:bodyPr wrap="square" lIns="0" tIns="0" rIns="0" bIns="0" rtlCol="0" anchor="t"/>
-          <a:lstStyle/>
-          <a:p>
-            <a:pPr indent="0" marL="0">
-              <a:buNone/>
-            </a:pPr>
-            <a:r>
-              <a:rPr lang="en-US" sz="1800" dirty="0">
-                <a:solidFill>
-                  <a:srgbClr val="A1A1A6"/>
-                </a:solidFill>
-                <a:latin typeface="Arial" pitchFamily="34" charset="0"/>
-                <a:ea typeface="Arial" pitchFamily="34" charset="-122"/>
-                <a:cs typeface="Arial" pitchFamily="34" charset="-120"/>
-              </a:rPr>
-              <a:t>counters</a:t>
-            </a:r>
-            <a:endParaRPr lang="en-US" sz="1800" dirty="0"/>
-          </a:p>
-        </p:txBody>
-      </p:sp>
-      <p:sp>
-        <p:nvSpPr>
-          <p:cNvPr id="10" name="stat 3 rule"/>
+              <a:t>Six months.</a:t>
+            </a:r>
+            <a:endParaRPr lang="en-US" sz="2100" dirty="0"/>
+          </a:p>
+        </p:txBody>
+      </p:sp>
+      <p:sp>
+        <p:nvSpPr>
+          <p:cNvPr id="9" name="step 3 rule"/>
           <p:cNvSpPr/>
           <p:nvPr/>
         </p:nvSpPr>
         <p:spPr>
           <a:xfrm>
-            <a:off x="5852160" y="2377440"/>
-            <a:ext cx="2286000" cy="0"/>
+            <a:off x="8046720" y="4572000"/>
+            <a:ext cx="3291840" cy="0"/>
           </a:xfrm>
           <a:prstGeom prst="line">
             <a:avLst/>
@@ -3385,519 +3695,46 @@
       </p:sp>
       <p:sp>
         <p:nvSpPr>
-          <p:cNvPr id="11" name="stat 3"/>
-          <p:cNvSpPr txBox="1"/>
-          <p:nvPr/>
-        </p:nvSpPr>
-        <p:spPr>
-          <a:xfrm>
-            <a:off x="5852160" y="2514600"/>
-            <a:ext cx="2286000" cy="822960"/>
-          </a:xfrm>
-          <a:prstGeom prst="rect">
-            <a:avLst/>
-          </a:prstGeom>
-          <a:noFill/>
-          <a:ln/>
-        </p:spPr>
-        <p:txBody>
-          <a:bodyPr wrap="square" lIns="0" tIns="0" rIns="0" bIns="0" rtlCol="0" anchor="t"/>
-          <a:lstStyle/>
-          <a:p>
-            <a:pPr indent="0" marL="0">
-              <a:buNone/>
-            </a:pPr>
-            <a:r>
-              <a:rPr lang="en-US" sz="5200" b="1" dirty="0">
-                <a:solidFill>
-                  <a:srgbClr val="F5F5F7"/>
-                </a:solidFill>
-                <a:latin typeface="Arial" pitchFamily="34" charset="0"/>
-                <a:ea typeface="Arial" pitchFamily="34" charset="-122"/>
-                <a:cs typeface="Arial" pitchFamily="34" charset="-120"/>
-              </a:rPr>
-              <a:t>6</a:t>
-            </a:r>
-            <a:endParaRPr lang="en-US" sz="5200" dirty="0"/>
-          </a:p>
-        </p:txBody>
-      </p:sp>
-      <p:sp>
-        <p:nvSpPr>
-          <p:cNvPr id="12" name="stat 3 label"/>
-          <p:cNvSpPr txBox="1"/>
-          <p:nvPr/>
-        </p:nvSpPr>
-        <p:spPr>
-          <a:xfrm>
-            <a:off x="5852160" y="3337560"/>
-            <a:ext cx="2286000" cy="365760"/>
-          </a:xfrm>
-          <a:prstGeom prst="rect">
-            <a:avLst/>
-          </a:prstGeom>
-          <a:noFill/>
-          <a:ln/>
-        </p:spPr>
-        <p:txBody>
-          <a:bodyPr wrap="square" lIns="0" tIns="0" rIns="0" bIns="0" rtlCol="0" anchor="t"/>
-          <a:lstStyle/>
-          <a:p>
-            <a:pPr indent="0" marL="0">
-              <a:buNone/>
-            </a:pPr>
-            <a:r>
-              <a:rPr lang="en-US" sz="1800" dirty="0">
-                <a:solidFill>
-                  <a:srgbClr val="A1A1A6"/>
-                </a:solidFill>
-                <a:latin typeface="Arial" pitchFamily="34" charset="0"/>
-                <a:ea typeface="Arial" pitchFamily="34" charset="-122"/>
-                <a:cs typeface="Arial" pitchFamily="34" charset="-120"/>
-              </a:rPr>
-              <a:t>months</a:t>
-            </a:r>
-            <a:endParaRPr lang="en-US" sz="1800" dirty="0"/>
-          </a:p>
-        </p:txBody>
-      </p:sp>
-      <p:sp>
-        <p:nvSpPr>
-          <p:cNvPr id="13" name="stat 4 rule"/>
-          <p:cNvSpPr/>
-          <p:nvPr/>
-        </p:nvSpPr>
-        <p:spPr>
-          <a:xfrm>
-            <a:off x="8366760" y="2377440"/>
-            <a:ext cx="2999232" cy="0"/>
-          </a:xfrm>
-          <a:prstGeom prst="line">
-            <a:avLst/>
-          </a:prstGeom>
-          <a:noFill/>
-          <a:ln w="9525">
-            <a:solidFill>
-              <a:srgbClr val="3A3A3E"/>
-            </a:solidFill>
-            <a:prstDash val="solid"/>
-          </a:ln>
-        </p:spPr>
-      </p:sp>
-      <p:sp>
-        <p:nvSpPr>
-          <p:cNvPr id="14" name="stat 4"/>
-          <p:cNvSpPr txBox="1"/>
-          <p:nvPr/>
-        </p:nvSpPr>
-        <p:spPr>
-          <a:xfrm>
-            <a:off x="8366760" y="2514600"/>
-            <a:ext cx="2999232" cy="822960"/>
-          </a:xfrm>
-          <a:prstGeom prst="rect">
-            <a:avLst/>
-          </a:prstGeom>
-          <a:noFill/>
-          <a:ln/>
-        </p:spPr>
-        <p:txBody>
-          <a:bodyPr wrap="square" lIns="0" tIns="0" rIns="0" bIns="0" rtlCol="0" anchor="t"/>
-          <a:lstStyle/>
-          <a:p>
-            <a:pPr indent="0" marL="0">
-              <a:buNone/>
-            </a:pPr>
-            <a:r>
-              <a:rPr lang="en-US" sz="5200" b="1" dirty="0">
-                <a:solidFill>
-                  <a:srgbClr val="E2C28A"/>
-                </a:solidFill>
-                <a:latin typeface="Arial" pitchFamily="34" charset="0"/>
-                <a:ea typeface="Arial" pitchFamily="34" charset="-122"/>
-                <a:cs typeface="Arial" pitchFamily="34" charset="-120"/>
-              </a:rPr>
-              <a:t>₹39 lakh</a:t>
-            </a:r>
-            <a:endParaRPr lang="en-US" sz="5200" dirty="0"/>
-          </a:p>
-        </p:txBody>
-      </p:sp>
-      <p:sp>
-        <p:nvSpPr>
-          <p:cNvPr id="15" name="stat 4 label"/>
-          <p:cNvSpPr txBox="1"/>
-          <p:nvPr/>
-        </p:nvSpPr>
-        <p:spPr>
-          <a:xfrm>
-            <a:off x="8366760" y="3337560"/>
-            <a:ext cx="2999232" cy="365760"/>
-          </a:xfrm>
-          <a:prstGeom prst="rect">
-            <a:avLst/>
-          </a:prstGeom>
-          <a:noFill/>
-          <a:ln/>
-        </p:spPr>
-        <p:txBody>
-          <a:bodyPr wrap="square" lIns="0" tIns="0" rIns="0" bIns="0" rtlCol="0" anchor="t"/>
-          <a:lstStyle/>
-          <a:p>
-            <a:pPr indent="0" marL="0">
-              <a:buNone/>
-            </a:pPr>
-            <a:r>
-              <a:rPr lang="en-US" sz="1800" dirty="0">
-                <a:solidFill>
-                  <a:srgbClr val="A1A1A6"/>
-                </a:solidFill>
-                <a:latin typeface="Arial" pitchFamily="34" charset="0"/>
-                <a:ea typeface="Arial" pitchFamily="34" charset="-122"/>
-                <a:cs typeface="Arial" pitchFamily="34" charset="-120"/>
-              </a:rPr>
-              <a:t>estimated</a:t>
-            </a:r>
-            <a:endParaRPr lang="en-US" sz="1800" dirty="0"/>
-          </a:p>
-        </p:txBody>
-      </p:sp>
-      <p:sp>
-        <p:nvSpPr>
-          <p:cNvPr id="16" name="eyebrow"/>
-          <p:cNvSpPr txBox="1"/>
-          <p:nvPr/>
-        </p:nvSpPr>
-        <p:spPr>
-          <a:xfrm>
-            <a:off x="822960" y="4343400"/>
-            <a:ext cx="7315200" cy="310896"/>
-          </a:xfrm>
-          <a:prstGeom prst="rect">
-            <a:avLst/>
-          </a:prstGeom>
-          <a:noFill/>
-          <a:ln/>
-        </p:spPr>
-        <p:txBody>
-          <a:bodyPr wrap="square" lIns="0" tIns="0" rIns="0" bIns="0" rtlCol="0" anchor="t"/>
-          <a:lstStyle/>
-          <a:p>
-            <a:pPr indent="0" marL="0">
-              <a:buNone/>
-            </a:pPr>
-            <a:r>
-              <a:rPr lang="en-US" sz="1400" b="1" spc="300" kern="0" dirty="0">
-                <a:solidFill>
-                  <a:srgbClr val="6E6E73"/>
-                </a:solidFill>
-                <a:latin typeface="Arial" pitchFamily="34" charset="0"/>
-                <a:ea typeface="Arial" pitchFamily="34" charset="-122"/>
-                <a:cs typeface="Arial" pitchFamily="34" charset="-120"/>
-              </a:rPr>
-              <a:t>THE NEXT 30 DAYS</a:t>
-            </a:r>
-            <a:endParaRPr lang="en-US" sz="1400" dirty="0"/>
-          </a:p>
-        </p:txBody>
-      </p:sp>
-      <p:sp>
-        <p:nvSpPr>
-          <p:cNvPr id="17" name="number 1"/>
-          <p:cNvSpPr/>
-          <p:nvPr/>
-        </p:nvSpPr>
-        <p:spPr>
-          <a:xfrm>
-            <a:off x="822960" y="4754880"/>
-            <a:ext cx="384048" cy="384048"/>
-          </a:xfrm>
-          <a:prstGeom prst="ellipse">
-            <a:avLst/>
-          </a:prstGeom>
-          <a:solidFill>
-            <a:srgbClr val="6FA8FF"/>
-          </a:solidFill>
-          <a:ln/>
-        </p:spPr>
-      </p:sp>
-      <p:sp>
-        <p:nvSpPr>
-          <p:cNvPr id="18" name="number 1 label"/>
-          <p:cNvSpPr txBox="1"/>
-          <p:nvPr/>
-        </p:nvSpPr>
-        <p:spPr>
-          <a:xfrm>
-            <a:off x="822960" y="4754880"/>
-            <a:ext cx="384048" cy="384048"/>
-          </a:xfrm>
-          <a:prstGeom prst="rect">
-            <a:avLst/>
-          </a:prstGeom>
-          <a:noFill/>
-          <a:ln/>
-        </p:spPr>
-        <p:txBody>
-          <a:bodyPr wrap="square" lIns="0" tIns="0" rIns="0" bIns="0" rtlCol="0" anchor="ctr"/>
-          <a:lstStyle/>
-          <a:p>
-            <a:pPr algn="ctr" indent="0" marL="0">
-              <a:buNone/>
-            </a:pPr>
-            <a:r>
-              <a:rPr lang="en-US" sz="1400" b="1" dirty="0">
-                <a:solidFill>
-                  <a:srgbClr val="000000"/>
-                </a:solidFill>
-                <a:latin typeface="Arial" pitchFamily="34" charset="0"/>
-                <a:ea typeface="Arial" pitchFamily="34" charset="-122"/>
-                <a:cs typeface="Arial" pitchFamily="34" charset="-120"/>
-              </a:rPr>
-              <a:t>1</a:t>
-            </a:r>
-            <a:endParaRPr lang="en-US" sz="1400" dirty="0"/>
-          </a:p>
-        </p:txBody>
-      </p:sp>
-      <p:sp>
-        <p:nvSpPr>
-          <p:cNvPr id="19" name="next 1"/>
-          <p:cNvSpPr txBox="1"/>
-          <p:nvPr/>
-        </p:nvSpPr>
-        <p:spPr>
-          <a:xfrm>
-            <a:off x="1371600" y="4736592"/>
-            <a:ext cx="2926080" cy="731520"/>
-          </a:xfrm>
-          <a:prstGeom prst="rect">
-            <a:avLst/>
-          </a:prstGeom>
-          <a:noFill/>
-          <a:ln/>
-        </p:spPr>
-        <p:txBody>
-          <a:bodyPr wrap="square" lIns="0" tIns="0" rIns="0" bIns="0" rtlCol="0" anchor="t"/>
-          <a:lstStyle/>
-          <a:p>
-            <a:pPr indent="0" marL="0">
-              <a:buNone/>
-            </a:pPr>
-            <a:r>
-              <a:rPr lang="en-US" sz="1900" b="1" dirty="0">
-                <a:solidFill>
-                  <a:srgbClr val="F5F5F7"/>
-                </a:solidFill>
-                <a:latin typeface="Arial" pitchFamily="34" charset="0"/>
-                <a:ea typeface="Arial" pitchFamily="34" charset="-122"/>
-                <a:cs typeface="Arial" pitchFamily="34" charset="-120"/>
-              </a:rPr>
-              <a:t>A field morning at a CSC</a:t>
-            </a:r>
-            <a:endParaRPr lang="en-US" sz="1900" dirty="0"/>
-          </a:p>
-        </p:txBody>
-      </p:sp>
-      <p:sp>
-        <p:nvSpPr>
-          <p:cNvPr id="20" name="number 2"/>
-          <p:cNvSpPr/>
-          <p:nvPr/>
-        </p:nvSpPr>
-        <p:spPr>
-          <a:xfrm>
-            <a:off x="4434840" y="4754880"/>
-            <a:ext cx="384048" cy="384048"/>
-          </a:xfrm>
-          <a:prstGeom prst="ellipse">
-            <a:avLst/>
-          </a:prstGeom>
-          <a:solidFill>
-            <a:srgbClr val="6FA8FF"/>
-          </a:solidFill>
-          <a:ln/>
-        </p:spPr>
-      </p:sp>
-      <p:sp>
-        <p:nvSpPr>
-          <p:cNvPr id="21" name="number 2 label"/>
-          <p:cNvSpPr txBox="1"/>
-          <p:nvPr/>
-        </p:nvSpPr>
-        <p:spPr>
-          <a:xfrm>
-            <a:off x="4434840" y="4754880"/>
-            <a:ext cx="384048" cy="384048"/>
-          </a:xfrm>
-          <a:prstGeom prst="rect">
-            <a:avLst/>
-          </a:prstGeom>
-          <a:noFill/>
-          <a:ln/>
-        </p:spPr>
-        <p:txBody>
-          <a:bodyPr wrap="square" lIns="0" tIns="0" rIns="0" bIns="0" rtlCol="0" anchor="ctr"/>
-          <a:lstStyle/>
-          <a:p>
-            <a:pPr algn="ctr" indent="0" marL="0">
-              <a:buNone/>
-            </a:pPr>
-            <a:r>
-              <a:rPr lang="en-US" sz="1400" b="1" dirty="0">
-                <a:solidFill>
-                  <a:srgbClr val="000000"/>
-                </a:solidFill>
-                <a:latin typeface="Arial" pitchFamily="34" charset="0"/>
-                <a:ea typeface="Arial" pitchFamily="34" charset="-122"/>
-                <a:cs typeface="Arial" pitchFamily="34" charset="-120"/>
-              </a:rPr>
-              <a:t>2</a:t>
-            </a:r>
-            <a:endParaRPr lang="en-US" sz="1400" dirty="0"/>
-          </a:p>
-        </p:txBody>
-      </p:sp>
-      <p:sp>
-        <p:nvSpPr>
-          <p:cNvPr id="22" name="next 2"/>
-          <p:cNvSpPr txBox="1"/>
-          <p:nvPr/>
-        </p:nvSpPr>
-        <p:spPr>
-          <a:xfrm>
-            <a:off x="4983480" y="4736592"/>
-            <a:ext cx="2926080" cy="731520"/>
-          </a:xfrm>
-          <a:prstGeom prst="rect">
-            <a:avLst/>
-          </a:prstGeom>
-          <a:noFill/>
-          <a:ln/>
-        </p:spPr>
-        <p:txBody>
-          <a:bodyPr wrap="square" lIns="0" tIns="0" rIns="0" bIns="0" rtlCol="0" anchor="t"/>
-          <a:lstStyle/>
-          <a:p>
-            <a:pPr indent="0" marL="0">
-              <a:buNone/>
-            </a:pPr>
-            <a:r>
-              <a:rPr lang="en-US" sz="1900" b="1" dirty="0">
-                <a:solidFill>
-                  <a:srgbClr val="F5F5F7"/>
-                </a:solidFill>
-                <a:latin typeface="Arial" pitchFamily="34" charset="0"/>
-                <a:ea typeface="Arial" pitchFamily="34" charset="-122"/>
-                <a:cs typeface="Arial" pitchFamily="34" charset="-120"/>
-              </a:rPr>
-              <a:t>Real messages from people’s own phones</a:t>
-            </a:r>
-            <a:endParaRPr lang="en-US" sz="1900" dirty="0"/>
-          </a:p>
-        </p:txBody>
-      </p:sp>
-      <p:sp>
-        <p:nvSpPr>
-          <p:cNvPr id="23" name="number 3"/>
-          <p:cNvSpPr/>
-          <p:nvPr/>
-        </p:nvSpPr>
-        <p:spPr>
-          <a:xfrm>
-            <a:off x="8046720" y="4754880"/>
-            <a:ext cx="384048" cy="384048"/>
-          </a:xfrm>
-          <a:prstGeom prst="ellipse">
-            <a:avLst/>
-          </a:prstGeom>
-          <a:solidFill>
-            <a:srgbClr val="6FA8FF"/>
-          </a:solidFill>
-          <a:ln/>
-        </p:spPr>
-      </p:sp>
-      <p:sp>
-        <p:nvSpPr>
-          <p:cNvPr id="24" name="number 3 label"/>
-          <p:cNvSpPr txBox="1"/>
-          <p:nvPr/>
-        </p:nvSpPr>
-        <p:spPr>
-          <a:xfrm>
-            <a:off x="8046720" y="4754880"/>
-            <a:ext cx="384048" cy="384048"/>
-          </a:xfrm>
-          <a:prstGeom prst="rect">
-            <a:avLst/>
-          </a:prstGeom>
-          <a:noFill/>
-          <a:ln/>
-        </p:spPr>
-        <p:txBody>
-          <a:bodyPr wrap="square" lIns="0" tIns="0" rIns="0" bIns="0" rtlCol="0" anchor="ctr"/>
-          <a:lstStyle/>
-          <a:p>
-            <a:pPr algn="ctr" indent="0" marL="0">
-              <a:buNone/>
-            </a:pPr>
-            <a:r>
-              <a:rPr lang="en-US" sz="1400" b="1" dirty="0">
-                <a:solidFill>
-                  <a:srgbClr val="000000"/>
-                </a:solidFill>
-                <a:latin typeface="Arial" pitchFamily="34" charset="0"/>
-                <a:ea typeface="Arial" pitchFamily="34" charset="-122"/>
-                <a:cs typeface="Arial" pitchFamily="34" charset="-120"/>
-              </a:rPr>
-              <a:t>3</a:t>
-            </a:r>
-            <a:endParaRPr lang="en-US" sz="1400" dirty="0"/>
-          </a:p>
-        </p:txBody>
-      </p:sp>
-      <p:sp>
-        <p:nvSpPr>
-          <p:cNvPr id="25" name="next 3"/>
-          <p:cNvSpPr txBox="1"/>
-          <p:nvPr/>
-        </p:nvSpPr>
-        <p:spPr>
-          <a:xfrm>
-            <a:off x="8595360" y="4736592"/>
-            <a:ext cx="2926080" cy="731520"/>
-          </a:xfrm>
-          <a:prstGeom prst="rect">
-            <a:avLst/>
-          </a:prstGeom>
-          <a:noFill/>
-          <a:ln/>
-        </p:spPr>
-        <p:txBody>
-          <a:bodyPr wrap="square" lIns="0" tIns="0" rIns="0" bIns="0" rtlCol="0" anchor="t"/>
-          <a:lstStyle/>
-          <a:p>
-            <a:pPr indent="0" marL="0">
-              <a:buNone/>
-            </a:pPr>
-            <a:r>
-              <a:rPr lang="en-US" sz="1900" b="1" dirty="0">
-                <a:solidFill>
-                  <a:srgbClr val="F5F5F7"/>
-                </a:solidFill>
-                <a:latin typeface="Arial" pitchFamily="34" charset="0"/>
-                <a:ea typeface="Arial" pitchFamily="34" charset="-122"/>
-                <a:cs typeface="Arial" pitchFamily="34" charset="-120"/>
-              </a:rPr>
-              <a:t>A district partner</a:t>
-            </a:r>
-            <a:endParaRPr lang="en-US" sz="1900" dirty="0"/>
-          </a:p>
-        </p:txBody>
-      </p:sp>
-      <p:sp>
-        <p:nvSpPr>
-          <p:cNvPr id="26" name="source"/>
+          <p:cNvPr id="10" name="step 3"/>
+          <p:cNvSpPr txBox="1"/>
+          <p:nvPr/>
+        </p:nvSpPr>
+        <p:spPr>
+          <a:xfrm>
+            <a:off x="8046720" y="4709160"/>
+            <a:ext cx="3520440" cy="731520"/>
+          </a:xfrm>
+          <a:prstGeom prst="rect">
+            <a:avLst/>
+          </a:prstGeom>
+          <a:noFill/>
+          <a:ln/>
+        </p:spPr>
+        <p:txBody>
+          <a:bodyPr wrap="square" lIns="0" tIns="0" rIns="0" bIns="0" rtlCol="0" anchor="t"/>
+          <a:lstStyle/>
+          <a:p>
+            <a:pPr indent="0" marL="0">
+              <a:buNone/>
+            </a:pPr>
+            <a:r>
+              <a:rPr lang="en-US" sz="2100" b="1" dirty="0">
+                <a:solidFill>
+                  <a:srgbClr val="6FA8FF"/>
+                </a:solidFill>
+                <a:latin typeface="Arial" pitchFamily="34" charset="0"/>
+                <a:ea typeface="Arial" pitchFamily="34" charset="-122"/>
+                <a:cs typeface="Arial" pitchFamily="34" charset="-120"/>
+              </a:rPr>
+              <a:t>Real numbers.</a:t>
+            </a:r>
+            <a:endParaRPr lang="en-US" sz="2100" dirty="0"/>
+          </a:p>
+        </p:txBody>
+      </p:sp>
+      <p:sp>
+        <p:nvSpPr>
+          <p:cNvPr id="11" name="source"/>
           <p:cNvSpPr txBox="1"/>
           <p:nvPr/>
         </p:nvSpPr>
@@ -3928,7 +3765,7 @@
                 <a:ea typeface="Arial" pitchFamily="34" charset="-122"/>
                 <a:cs typeface="Arial" pitchFamily="34" charset="-120"/>
               </a:rPr>
-              <a:t>Estimates, not quotes: the team’s line-item budget, 7 Oct 2026 (₹39.2 lakh). At 500 counters, about ₹24,000 a counter a year; the operator’s ₹9,600 is the biggest part.</a:t>
+              <a:t>6 lakh functional CSCs, 4.7 lakh at gram-panchayat level (MeitY, Mar 2025) · the pilot’s 50 counters: nodes at 20 CSCs, the phone app at 30 bank-agent points</a:t>
             </a:r>
             <a:endParaRPr lang="en-US" sz="1050" dirty="0"/>
           </a:p>
@@ -3961,30 +3798,108 @@
       </p:grpSpPr>
       <p:sp>
         <p:nvSpPr>
-          <p:cNvPr id="2" name="scale"/>
-          <p:cNvSpPr txBox="1"/>
-          <p:nvPr/>
-        </p:nvSpPr>
-        <p:spPr>
-          <a:xfrm>
-            <a:off x="822960" y="1417320"/>
-            <a:ext cx="10515600" cy="502920"/>
-          </a:xfrm>
-          <a:prstGeom prst="rect">
-            <a:avLst/>
-          </a:prstGeom>
-          <a:noFill/>
-          <a:ln/>
-        </p:spPr>
-        <p:txBody>
-          <a:bodyPr wrap="square" lIns="0" tIns="0" rIns="0" bIns="0" rtlCol="0" anchor="t"/>
-          <a:lstStyle/>
-          <a:p>
-            <a:pPr indent="0" marL="0">
-              <a:buNone/>
-            </a:pPr>
-            <a:r>
-              <a:rPr lang="en-US" sz="2600" dirty="0">
+          <p:cNvPr id="2" name="eyebrow"/>
+          <p:cNvSpPr txBox="1"/>
+          <p:nvPr/>
+        </p:nvSpPr>
+        <p:spPr>
+          <a:xfrm>
+            <a:off x="822960" y="1097280"/>
+            <a:ext cx="7315200" cy="310896"/>
+          </a:xfrm>
+          <a:prstGeom prst="rect">
+            <a:avLst/>
+          </a:prstGeom>
+          <a:noFill/>
+          <a:ln/>
+        </p:spPr>
+        <p:txBody>
+          <a:bodyPr wrap="square" lIns="0" tIns="0" rIns="0" bIns="0" rtlCol="0" anchor="t"/>
+          <a:lstStyle/>
+          <a:p>
+            <a:pPr indent="0" marL="0">
+              <a:buNone/>
+            </a:pPr>
+            <a:r>
+              <a:rPr lang="en-US" sz="1400" b="1" spc="300" kern="0" dirty="0">
+                <a:solidFill>
+                  <a:srgbClr val="6FA8FF"/>
+                </a:solidFill>
+                <a:latin typeface="Arial" pitchFamily="34" charset="0"/>
+                <a:ea typeface="Arial" pitchFamily="34" charset="-122"/>
+                <a:cs typeface="Arial" pitchFamily="34" charset="-120"/>
+              </a:rPr>
+              <a:t>ONE MORE THING</a:t>
+            </a:r>
+            <a:endParaRPr lang="en-US" sz="1400" dirty="0"/>
+          </a:p>
+        </p:txBody>
+      </p:sp>
+      <p:sp>
+        <p:nvSpPr>
+          <p:cNvPr id="3" name="title"/>
+          <p:cNvSpPr txBox="1"/>
+          <p:nvPr/>
+        </p:nvSpPr>
+        <p:spPr>
+          <a:xfrm>
+            <a:off x="822960" y="1463040"/>
+            <a:ext cx="5669280" cy="960120"/>
+          </a:xfrm>
+          <a:prstGeom prst="rect">
+            <a:avLst/>
+          </a:prstGeom>
+          <a:noFill/>
+          <a:ln/>
+        </p:spPr>
+        <p:txBody>
+          <a:bodyPr wrap="square" lIns="0" tIns="0" rIns="0" bIns="0" rtlCol="0" anchor="ctr"/>
+          <a:lstStyle/>
+          <a:p>
+            <a:pPr indent="0" marL="0">
+              <a:buNone/>
+            </a:pPr>
+            <a:r>
+              <a:rPr lang="en-US" sz="5400" b="1" dirty="0">
+                <a:solidFill>
+                  <a:srgbClr val="F5F5F7"/>
+                </a:solidFill>
+                <a:latin typeface="Arial" pitchFamily="34" charset="0"/>
+                <a:ea typeface="Arial" pitchFamily="34" charset="-122"/>
+                <a:cs typeface="Arial" pitchFamily="34" charset="-120"/>
+              </a:rPr>
+              <a:t>Spot the scam.</a:t>
+            </a:r>
+            <a:endParaRPr lang="en-US" sz="5400" dirty="0"/>
+          </a:p>
+        </p:txBody>
+      </p:sp>
+      <p:sp>
+        <p:nvSpPr>
+          <p:cNvPr id="4" name="tagline"/>
+          <p:cNvSpPr txBox="1"/>
+          <p:nvPr/>
+        </p:nvSpPr>
+        <p:spPr>
+          <a:xfrm>
+            <a:off x="822960" y="2514600"/>
+            <a:ext cx="5669280" cy="457200"/>
+          </a:xfrm>
+          <a:prstGeom prst="rect">
+            <a:avLst/>
+          </a:prstGeom>
+          <a:noFill/>
+          <a:ln/>
+        </p:spPr>
+        <p:txBody>
+          <a:bodyPr wrap="square" lIns="0" tIns="0" rIns="0" bIns="0" rtlCol="0" anchor="t"/>
+          <a:lstStyle/>
+          <a:p>
+            <a:pPr indent="0" marL="0">
+              <a:buNone/>
+            </a:pPr>
+            <a:r>
+              <a:rPr lang="en-US" sz="2400" i="1" dirty="0">
                 <a:solidFill>
                   <a:srgbClr val="A1A1A6"/>
                 </a:solidFill>
@@ -3992,142 +3907,22 @@
                 <a:ea typeface="Arial" pitchFamily="34" charset="-122"/>
                 <a:cs typeface="Arial" pitchFamily="34" charset="-120"/>
               </a:rPr>
-              <a:t>India has </a:t>
-            </a:r>
-            <a:pPr indent="0" marL="0">
-              <a:buNone/>
-            </a:pPr>
-            <a:r>
-              <a:rPr lang="en-US" sz="2600" b="1" dirty="0">
-                <a:solidFill>
-                  <a:srgbClr val="F5F5F7"/>
-                </a:solidFill>
-                <a:latin typeface="Arial" pitchFamily="34" charset="0"/>
-                <a:ea typeface="Arial" pitchFamily="34" charset="-122"/>
-                <a:cs typeface="Arial" pitchFamily="34" charset="-120"/>
-              </a:rPr>
-              <a:t>6 lakh CSCs.</a:t>
-            </a:r>
-            <a:pPr indent="0" marL="0">
-              <a:buNone/>
-            </a:pPr>
-            <a:r>
-              <a:rPr lang="en-US" sz="2600" dirty="0">
-                <a:solidFill>
-                  <a:srgbClr val="A1A1A6"/>
-                </a:solidFill>
-                <a:latin typeface="Arial" pitchFamily="34" charset="0"/>
-                <a:ea typeface="Arial" pitchFamily="34" charset="-122"/>
-                <a:cs typeface="Arial" pitchFamily="34" charset="-120"/>
-              </a:rPr>
-              <a:t>  We’re asking for </a:t>
-            </a:r>
-            <a:pPr indent="0" marL="0">
-              <a:buNone/>
-            </a:pPr>
-            <a:r>
-              <a:rPr lang="en-US" sz="2600" b="1" dirty="0">
-                <a:solidFill>
-                  <a:srgbClr val="F5F5F7"/>
-                </a:solidFill>
-                <a:latin typeface="Arial" pitchFamily="34" charset="0"/>
-                <a:ea typeface="Arial" pitchFamily="34" charset="-122"/>
-                <a:cs typeface="Arial" pitchFamily="34" charset="-120"/>
-              </a:rPr>
-              <a:t>50 counters.</a:t>
-            </a:r>
-            <a:endParaRPr lang="en-US" sz="2600" dirty="0"/>
-          </a:p>
-        </p:txBody>
-      </p:sp>
-      <p:sp>
-        <p:nvSpPr>
-          <p:cNvPr id="3" name="eyebrow"/>
-          <p:cNvSpPr txBox="1"/>
-          <p:nvPr/>
-        </p:nvSpPr>
-        <p:spPr>
-          <a:xfrm>
-            <a:off x="822960" y="2377440"/>
-            <a:ext cx="7315200" cy="310896"/>
-          </a:xfrm>
-          <a:prstGeom prst="rect">
-            <a:avLst/>
-          </a:prstGeom>
-          <a:noFill/>
-          <a:ln/>
-        </p:spPr>
-        <p:txBody>
-          <a:bodyPr wrap="square" lIns="0" tIns="0" rIns="0" bIns="0" rtlCol="0" anchor="t"/>
-          <a:lstStyle/>
-          <a:p>
-            <a:pPr indent="0" marL="0">
-              <a:buNone/>
-            </a:pPr>
-            <a:r>
-              <a:rPr lang="en-US" sz="1400" b="1" spc="300" kern="0" dirty="0">
-                <a:solidFill>
-                  <a:srgbClr val="E2C28A"/>
-                </a:solidFill>
-                <a:latin typeface="Arial" pitchFamily="34" charset="0"/>
-                <a:ea typeface="Arial" pitchFamily="34" charset="-122"/>
-                <a:cs typeface="Arial" pitchFamily="34" charset="-120"/>
-              </a:rPr>
-              <a:t>OUR ASK</a:t>
-            </a:r>
-            <a:endParaRPr lang="en-US" sz="1400" dirty="0"/>
-          </a:p>
-        </p:txBody>
-      </p:sp>
-      <p:sp>
-        <p:nvSpPr>
-          <p:cNvPr id="4" name="the ask"/>
-          <p:cNvSpPr txBox="1"/>
-          <p:nvPr/>
-        </p:nvSpPr>
-        <p:spPr>
-          <a:xfrm>
-            <a:off x="822960" y="2697480"/>
-            <a:ext cx="10607040" cy="1188720"/>
-          </a:xfrm>
-          <a:prstGeom prst="rect">
-            <a:avLst/>
-          </a:prstGeom>
-          <a:noFill/>
-          <a:ln/>
-        </p:spPr>
-        <p:txBody>
-          <a:bodyPr wrap="square" lIns="0" tIns="0" rIns="0" bIns="0" rtlCol="0" anchor="ctr"/>
-          <a:lstStyle/>
-          <a:p>
-            <a:pPr indent="0" marL="0">
-              <a:buNone/>
-            </a:pPr>
-            <a:r>
-              <a:rPr lang="en-US" sz="5600" b="1" dirty="0">
-                <a:solidFill>
-                  <a:srgbClr val="F5F5F7"/>
-                </a:solidFill>
-                <a:latin typeface="Arial" pitchFamily="34" charset="0"/>
-                <a:ea typeface="Arial" pitchFamily="34" charset="-122"/>
-                <a:cs typeface="Arial" pitchFamily="34" charset="-120"/>
-              </a:rPr>
-              <a:t>Introduce us to one district.</a:t>
-            </a:r>
-            <a:endParaRPr lang="en-US" sz="5600" dirty="0"/>
-          </a:p>
-        </p:txBody>
-      </p:sp>
-      <p:sp>
-        <p:nvSpPr>
-          <p:cNvPr id="5" name="step 1 rule"/>
+              <a:t>Know a scam before it arrives.</a:t>
+            </a:r>
+            <a:endParaRPr lang="en-US" sz="2400" dirty="0"/>
+          </a:p>
+        </p:txBody>
+      </p:sp>
+      <p:sp>
+        <p:nvSpPr>
+          <p:cNvPr id="5" name="point 1 rule"/>
           <p:cNvSpPr/>
           <p:nvPr/>
         </p:nvSpPr>
         <p:spPr>
           <a:xfrm>
-            <a:off x="822960" y="4572000"/>
-            <a:ext cx="3291840" cy="0"/>
+            <a:off x="822960" y="3291840"/>
+            <a:ext cx="5120640" cy="0"/>
           </a:xfrm>
           <a:prstGeom prst="line">
             <a:avLst/>
@@ -4143,14 +3938,14 @@
       </p:sp>
       <p:sp>
         <p:nvSpPr>
-          <p:cNvPr id="6" name="step 1"/>
-          <p:cNvSpPr txBox="1"/>
-          <p:nvPr/>
-        </p:nvSpPr>
-        <p:spPr>
-          <a:xfrm>
-            <a:off x="822960" y="4709160"/>
-            <a:ext cx="3520440" cy="731520"/>
+          <p:cNvPr id="6" name="point 1"/>
+          <p:cNvSpPr txBox="1"/>
+          <p:nvPr/>
+        </p:nvSpPr>
+        <p:spPr>
+          <a:xfrm>
+            <a:off x="822960" y="3392424"/>
+            <a:ext cx="5120640" cy="493776"/>
           </a:xfrm>
           <a:prstGeom prst="rect">
             <a:avLst/>
@@ -4174,7 +3969,21 @@
                 <a:ea typeface="Arial" pitchFamily="34" charset="-122"/>
                 <a:cs typeface="Arial" pitchFamily="34" charset="-120"/>
               </a:rPr>
-              <a:t>One morning.</a:t>
+              <a:t>5 cards a round</a:t>
+            </a:r>
+            <a:pPr indent="0" marL="0">
+              <a:buNone/>
+            </a:pPr>
+            <a:r>
+              <a:rPr lang="en-US" sz="2100" dirty="0">
+                <a:solidFill>
+                  <a:srgbClr val="A1A1A6"/>
+                </a:solidFill>
+                <a:latin typeface="Arial" pitchFamily="34" charset="0"/>
+                <a:ea typeface="Arial" pitchFamily="34" charset="-122"/>
+                <a:cs typeface="Arial" pitchFamily="34" charset="-120"/>
+              </a:rPr>
+              <a:t> · scam or real?</a:t>
             </a:r>
             <a:endParaRPr lang="en-US" sz="2100" dirty="0"/>
           </a:p>
@@ -4182,14 +3991,14 @@
       </p:sp>
       <p:sp>
         <p:nvSpPr>
-          <p:cNvPr id="7" name="step 2 rule"/>
+          <p:cNvPr id="7" name="point 2 rule"/>
           <p:cNvSpPr/>
           <p:nvPr/>
         </p:nvSpPr>
         <p:spPr>
           <a:xfrm>
-            <a:off x="4434840" y="4572000"/>
-            <a:ext cx="3291840" cy="0"/>
+            <a:off x="822960" y="3913632"/>
+            <a:ext cx="5120640" cy="0"/>
           </a:xfrm>
           <a:prstGeom prst="line">
             <a:avLst/>
@@ -4205,14 +4014,14 @@
       </p:sp>
       <p:sp>
         <p:nvSpPr>
-          <p:cNvPr id="8" name="step 2"/>
-          <p:cNvSpPr txBox="1"/>
-          <p:nvPr/>
-        </p:nvSpPr>
-        <p:spPr>
-          <a:xfrm>
-            <a:off x="4434840" y="4709160"/>
-            <a:ext cx="3520440" cy="731520"/>
+          <p:cNvPr id="8" name="point 2"/>
+          <p:cNvSpPr txBox="1"/>
+          <p:nvPr/>
+        </p:nvSpPr>
+        <p:spPr>
+          <a:xfrm>
+            <a:off x="822960" y="4014216"/>
+            <a:ext cx="5120640" cy="493776"/>
           </a:xfrm>
           <a:prstGeom prst="rect">
             <a:avLst/>
@@ -4230,13 +4039,27 @@
             <a:r>
               <a:rPr lang="en-US" sz="2100" b="1" dirty="0">
                 <a:solidFill>
-                  <a:srgbClr val="F5F5F7"/>
-                </a:solidFill>
-                <a:latin typeface="Arial" pitchFamily="34" charset="0"/>
-                <a:ea typeface="Arial" pitchFamily="34" charset="-122"/>
-                <a:cs typeface="Arial" pitchFamily="34" charset="-120"/>
-              </a:rPr>
-              <a:t>Six months.</a:t>
+                  <a:srgbClr val="6FA8FF"/>
+                </a:solidFill>
+                <a:latin typeface="Arial" pitchFamily="34" charset="0"/>
+                <a:ea typeface="Arial" pitchFamily="34" charset="-122"/>
+                <a:cs typeface="Arial" pitchFamily="34" charset="-120"/>
+              </a:rPr>
+              <a:t>Sahayak’s own clues</a:t>
+            </a:r>
+            <a:pPr indent="0" marL="0">
+              <a:buNone/>
+            </a:pPr>
+            <a:r>
+              <a:rPr lang="en-US" sz="2100" dirty="0">
+                <a:solidFill>
+                  <a:srgbClr val="A1A1A6"/>
+                </a:solidFill>
+                <a:latin typeface="Arial" pitchFamily="34" charset="0"/>
+                <a:ea typeface="Arial" pitchFamily="34" charset="-122"/>
+                <a:cs typeface="Arial" pitchFamily="34" charset="-120"/>
+              </a:rPr>
+              <a:t> after every answer</a:t>
             </a:r>
             <a:endParaRPr lang="en-US" sz="2100" dirty="0"/>
           </a:p>
@@ -4244,14 +4067,14 @@
       </p:sp>
       <p:sp>
         <p:nvSpPr>
-          <p:cNvPr id="9" name="step 3 rule"/>
+          <p:cNvPr id="9" name="point 3 rule"/>
           <p:cNvSpPr/>
           <p:nvPr/>
         </p:nvSpPr>
         <p:spPr>
           <a:xfrm>
-            <a:off x="8046720" y="4572000"/>
-            <a:ext cx="3291840" cy="0"/>
+            <a:off x="822960" y="4535424"/>
+            <a:ext cx="5120640" cy="0"/>
           </a:xfrm>
           <a:prstGeom prst="line">
             <a:avLst/>
@@ -4267,14 +4090,14 @@
       </p:sp>
       <p:sp>
         <p:nvSpPr>
-          <p:cNvPr id="10" name="step 3"/>
-          <p:cNvSpPr txBox="1"/>
-          <p:nvPr/>
-        </p:nvSpPr>
-        <p:spPr>
-          <a:xfrm>
-            <a:off x="8046720" y="4709160"/>
-            <a:ext cx="3520440" cy="731520"/>
+          <p:cNvPr id="10" name="point 3"/>
+          <p:cNvSpPr txBox="1"/>
+          <p:nvPr/>
+        </p:nvSpPr>
+        <p:spPr>
+          <a:xfrm>
+            <a:off x="822960" y="4636008"/>
+            <a:ext cx="5120640" cy="493776"/>
           </a:xfrm>
           <a:prstGeom prst="rect">
             <a:avLst/>
@@ -4292,21 +4115,83 @@
             <a:r>
               <a:rPr lang="en-US" sz="2100" b="1" dirty="0">
                 <a:solidFill>
-                  <a:srgbClr val="6FA8FF"/>
-                </a:solidFill>
-                <a:latin typeface="Arial" pitchFamily="34" charset="0"/>
-                <a:ea typeface="Arial" pitchFamily="34" charset="-122"/>
-                <a:cs typeface="Arial" pitchFamily="34" charset="-120"/>
-              </a:rPr>
-              <a:t>Real numbers.</a:t>
+                  <a:srgbClr val="F5F5F7"/>
+                </a:solidFill>
+                <a:latin typeface="Arial" pitchFamily="34" charset="0"/>
+                <a:ea typeface="Arial" pitchFamily="34" charset="-122"/>
+                <a:cs typeface="Arial" pitchFamily="34" charset="-120"/>
+              </a:rPr>
+              <a:t>Levels, badges</a:t>
+            </a:r>
+            <a:pPr indent="0" marL="0">
+              <a:buNone/>
+            </a:pPr>
+            <a:r>
+              <a:rPr lang="en-US" sz="2100" dirty="0">
+                <a:solidFill>
+                  <a:srgbClr val="A1A1A6"/>
+                </a:solidFill>
+                <a:latin typeface="Arial" pitchFamily="34" charset="0"/>
+                <a:ea typeface="Arial" pitchFamily="34" charset="-122"/>
+                <a:cs typeface="Arial" pitchFamily="34" charset="-120"/>
+              </a:rPr>
+              <a:t> · a new message daily</a:t>
             </a:r>
             <a:endParaRPr lang="en-US" sz="2100" dirty="0"/>
           </a:p>
         </p:txBody>
       </p:sp>
-      <p:sp>
-        <p:nvSpPr>
-          <p:cNvPr id="11" name="source"/>
+      <p:pic>
+        <p:nvPicPr>
+          <p:cNvPr id="11" name="Spot the scam: a card" descr="Screenshot: Spot the scam: a card">    </p:cNvPr>
+          <p:cNvPicPr>
+            <a:picLocks noChangeAspect="1"/>
+          </p:cNvPicPr>
+          <p:nvPr/>
+        </p:nvPicPr>
+        <p:blipFill>
+          <a:blip r:embed="rId1"/>
+          <a:stretch>
+            <a:fillRect/>
+          </a:stretch>
+        </p:blipFill>
+        <p:spPr>
+          <a:xfrm>
+            <a:off x="6355080" y="685800"/>
+            <a:ext cx="2518637" cy="5257800"/>
+          </a:xfrm>
+          <a:prstGeom prst="rect">
+            <a:avLst/>
+          </a:prstGeom>
+        </p:spPr>
+      </p:pic>
+      <p:pic>
+        <p:nvPicPr>
+          <p:cNvPr id="12" name="Spot the scam: Sahayak's clues after the answer" descr="Screenshot: Spot the scam: Sahayak's clues after the answer">    </p:cNvPr>
+          <p:cNvPicPr>
+            <a:picLocks noChangeAspect="1"/>
+          </p:cNvPicPr>
+          <p:nvPr/>
+        </p:nvPicPr>
+        <p:blipFill>
+          <a:blip r:embed="rId2"/>
+          <a:stretch>
+            <a:fillRect/>
+          </a:stretch>
+        </p:blipFill>
+        <p:spPr>
+          <a:xfrm>
+            <a:off x="8961120" y="685800"/>
+            <a:ext cx="2518637" cy="5257800"/>
+          </a:xfrm>
+          <a:prstGeom prst="rect">
+            <a:avLst/>
+          </a:prstGeom>
+        </p:spPr>
+      </p:pic>
+      <p:sp>
+        <p:nvSpPr>
+          <p:cNvPr id="13" name="source"/>
           <p:cNvSpPr txBox="1"/>
           <p:nvPr/>
         </p:nvSpPr>
@@ -4337,7 +4222,7 @@
                 <a:ea typeface="Arial" pitchFamily="34" charset="-122"/>
                 <a:cs typeface="Arial" pitchFamily="34" charset="-120"/>
               </a:rPr>
-              <a:t>6 lakh functional CSCs, 4.7 lakh at gram-panchayat level (MeitY, Mar 2025) · the pilot’s 50 counters: nodes at 20 CSCs, the phone app at 30 bank-agent points</a:t>
+              <a:t>The Learn tab of the same app · every card agrees with Sahayak’s own check (tests/test_game.py) · nothing leaves the phone</a:t>
             </a:r>
             <a:endParaRPr lang="en-US" sz="1050" dirty="0"/>
           </a:p>
@@ -4370,53 +4255,53 @@
       </p:grpSpPr>
       <p:sp>
         <p:nvSpPr>
-          <p:cNvPr id="2" name="eyebrow"/>
-          <p:cNvSpPr txBox="1"/>
-          <p:nvPr/>
-        </p:nvSpPr>
-        <p:spPr>
-          <a:xfrm>
-            <a:off x="822960" y="1097280"/>
-            <a:ext cx="7315200" cy="310896"/>
-          </a:xfrm>
-          <a:prstGeom prst="rect">
-            <a:avLst/>
-          </a:prstGeom>
-          <a:noFill/>
-          <a:ln/>
-        </p:spPr>
-        <p:txBody>
-          <a:bodyPr wrap="square" lIns="0" tIns="0" rIns="0" bIns="0" rtlCol="0" anchor="t"/>
-          <a:lstStyle/>
-          <a:p>
-            <a:pPr indent="0" marL="0">
-              <a:buNone/>
-            </a:pPr>
-            <a:r>
-              <a:rPr lang="en-US" sz="1400" b="1" spc="300" kern="0" dirty="0">
-                <a:solidFill>
-                  <a:srgbClr val="6FA8FF"/>
-                </a:solidFill>
-                <a:latin typeface="Arial" pitchFamily="34" charset="0"/>
-                <a:ea typeface="Arial" pitchFamily="34" charset="-122"/>
-                <a:cs typeface="Arial" pitchFamily="34" charset="-120"/>
-              </a:rPr>
-              <a:t>ONE MORE THING</a:t>
-            </a:r>
-            <a:endParaRPr lang="en-US" sz="1400" dirty="0"/>
-          </a:p>
-        </p:txBody>
-      </p:sp>
-      <p:sp>
-        <p:nvSpPr>
-          <p:cNvPr id="3" name="title"/>
-          <p:cNvSpPr txBox="1"/>
-          <p:nvPr/>
-        </p:nvSpPr>
-        <p:spPr>
-          <a:xfrm>
-            <a:off x="822960" y="1463040"/>
-            <a:ext cx="5669280" cy="960120"/>
+          <p:cNvPr id="2" name="then"/>
+          <p:cNvSpPr txBox="1"/>
+          <p:nvPr/>
+        </p:nvSpPr>
+        <p:spPr>
+          <a:xfrm>
+            <a:off x="457200" y="1143000"/>
+            <a:ext cx="11277295" cy="548640"/>
+          </a:xfrm>
+          <a:prstGeom prst="rect">
+            <a:avLst/>
+          </a:prstGeom>
+          <a:noFill/>
+          <a:ln/>
+        </p:spPr>
+        <p:txBody>
+          <a:bodyPr wrap="square" lIns="0" tIns="0" rIns="0" bIns="0" rtlCol="0" anchor="t"/>
+          <a:lstStyle/>
+          <a:p>
+            <a:pPr algn="ctr" indent="0" marL="0">
+              <a:buNone/>
+            </a:pPr>
+            <a:r>
+              <a:rPr lang="en-US" sz="3000" dirty="0">
+                <a:solidFill>
+                  <a:srgbClr val="6E6E73"/>
+                </a:solidFill>
+                <a:latin typeface="Arial" pitchFamily="34" charset="0"/>
+                <a:ea typeface="Arial" pitchFamily="34" charset="-122"/>
+                <a:cs typeface="Arial" pitchFamily="34" charset="-120"/>
+              </a:rPr>
+              <a:t>Nine at night. The bank is closed.</a:t>
+            </a:r>
+            <a:endParaRPr lang="en-US" sz="3000" dirty="0"/>
+          </a:p>
+        </p:txBody>
+      </p:sp>
+      <p:sp>
+        <p:nvSpPr>
+          <p:cNvPr id="3" name="now"/>
+          <p:cNvSpPr txBox="1"/>
+          <p:nvPr/>
+        </p:nvSpPr>
+        <p:spPr>
+          <a:xfrm>
+            <a:off x="457200" y="1783080"/>
+            <a:ext cx="11277295" cy="1097280"/>
           </a:xfrm>
           <a:prstGeom prst="rect">
             <a:avLst/>
@@ -4428,11 +4313,11 @@
           <a:bodyPr wrap="square" lIns="0" tIns="0" rIns="0" bIns="0" rtlCol="0" anchor="ctr"/>
           <a:lstStyle/>
           <a:p>
-            <a:pPr indent="0" marL="0">
-              <a:buNone/>
-            </a:pPr>
-            <a:r>
-              <a:rPr lang="en-US" sz="5400" b="1" dirty="0">
+            <a:pPr algn="ctr" indent="0" marL="0">
+              <a:buNone/>
+            </a:pPr>
+            <a:r>
+              <a:rPr lang="en-US" sz="6000" b="1" dirty="0">
                 <a:solidFill>
                   <a:srgbClr val="F5F5F7"/>
                 </a:solidFill>
@@ -4440,61 +4325,22 @@
                 <a:ea typeface="Arial" pitchFamily="34" charset="-122"/>
                 <a:cs typeface="Arial" pitchFamily="34" charset="-120"/>
               </a:rPr>
-              <a:t>Spot the scam.</a:t>
-            </a:r>
-            <a:endParaRPr lang="en-US" sz="5400" dirty="0"/>
-          </a:p>
-        </p:txBody>
-      </p:sp>
-      <p:sp>
-        <p:nvSpPr>
-          <p:cNvPr id="4" name="tagline"/>
-          <p:cNvSpPr txBox="1"/>
-          <p:nvPr/>
-        </p:nvSpPr>
-        <p:spPr>
-          <a:xfrm>
-            <a:off x="822960" y="2514600"/>
-            <a:ext cx="5669280" cy="457200"/>
-          </a:xfrm>
-          <a:prstGeom prst="rect">
-            <a:avLst/>
-          </a:prstGeom>
-          <a:noFill/>
-          <a:ln/>
-        </p:spPr>
-        <p:txBody>
-          <a:bodyPr wrap="square" lIns="0" tIns="0" rIns="0" bIns="0" rtlCol="0" anchor="t"/>
-          <a:lstStyle/>
-          <a:p>
-            <a:pPr indent="0" marL="0">
-              <a:buNone/>
-            </a:pPr>
-            <a:r>
-              <a:rPr lang="en-US" sz="2400" i="1" dirty="0">
-                <a:solidFill>
-                  <a:srgbClr val="A1A1A6"/>
-                </a:solidFill>
-                <a:latin typeface="Arial" pitchFamily="34" charset="0"/>
-                <a:ea typeface="Arial" pitchFamily="34" charset="-122"/>
-                <a:cs typeface="Arial" pitchFamily="34" charset="-120"/>
-              </a:rPr>
-              <a:t>Know a scam before it arrives.</a:t>
-            </a:r>
-            <a:endParaRPr lang="en-US" sz="2400" dirty="0"/>
-          </a:p>
-        </p:txBody>
-      </p:sp>
-      <p:sp>
-        <p:nvSpPr>
-          <p:cNvPr id="5" name="point 1 rule"/>
+              <a:t>Now she has someone to ask.</a:t>
+            </a:r>
+            <a:endParaRPr lang="en-US" sz="6000" dirty="0"/>
+          </a:p>
+        </p:txBody>
+      </p:sp>
+      <p:sp>
+        <p:nvSpPr>
+          <p:cNvPr id="4" name="divider"/>
           <p:cNvSpPr/>
           <p:nvPr/>
         </p:nvSpPr>
         <p:spPr>
           <a:xfrm>
-            <a:off x="822960" y="3291840"/>
-            <a:ext cx="5120640" cy="0"/>
+            <a:off x="5547208" y="3429000"/>
+            <a:ext cx="1097280" cy="0"/>
           </a:xfrm>
           <a:prstGeom prst="line">
             <a:avLst/>
@@ -4510,30 +4356,30 @@
       </p:sp>
       <p:sp>
         <p:nvSpPr>
-          <p:cNvPr id="6" name="point 1"/>
-          <p:cNvSpPr txBox="1"/>
-          <p:nvPr/>
-        </p:nvSpPr>
-        <p:spPr>
-          <a:xfrm>
-            <a:off x="822960" y="3392424"/>
-            <a:ext cx="5120640" cy="493776"/>
-          </a:xfrm>
-          <a:prstGeom prst="rect">
-            <a:avLst/>
-          </a:prstGeom>
-          <a:noFill/>
-          <a:ln/>
-        </p:spPr>
-        <p:txBody>
-          <a:bodyPr wrap="square" lIns="0" tIns="0" rIns="0" bIns="0" rtlCol="0" anchor="t"/>
-          <a:lstStyle/>
-          <a:p>
-            <a:pPr indent="0" marL="0">
-              <a:buNone/>
-            </a:pPr>
-            <a:r>
-              <a:rPr lang="en-US" sz="2100" b="1" dirty="0">
+          <p:cNvPr id="5" name="name"/>
+          <p:cNvSpPr txBox="1"/>
+          <p:nvPr/>
+        </p:nvSpPr>
+        <p:spPr>
+          <a:xfrm>
+            <a:off x="457200" y="3749040"/>
+            <a:ext cx="11277295" cy="731520"/>
+          </a:xfrm>
+          <a:prstGeom prst="rect">
+            <a:avLst/>
+          </a:prstGeom>
+          <a:noFill/>
+          <a:ln/>
+        </p:spPr>
+        <p:txBody>
+          <a:bodyPr wrap="square" lIns="0" tIns="0" rIns="0" bIns="0" rtlCol="0" anchor="ctr"/>
+          <a:lstStyle/>
+          <a:p>
+            <a:pPr algn="ctr" indent="0" marL="0">
+              <a:buNone/>
+            </a:pPr>
+            <a:r>
+              <a:rPr lang="en-US" sz="4400" b="1" dirty="0">
                 <a:solidFill>
                   <a:srgbClr val="F5F5F7"/>
                 </a:solidFill>
@@ -4541,13 +4387,105 @@
                 <a:ea typeface="Arial" pitchFamily="34" charset="-122"/>
                 <a:cs typeface="Arial" pitchFamily="34" charset="-120"/>
               </a:rPr>
-              <a:t>5 cards a round</a:t>
-            </a:r>
-            <a:pPr indent="0" marL="0">
-              <a:buNone/>
-            </a:pPr>
-            <a:r>
-              <a:rPr lang="en-US" sz="2100" dirty="0">
+              <a:t>Sahayak</a:t>
+            </a:r>
+            <a:pPr algn="ctr" indent="0" marL="0">
+              <a:buNone/>
+            </a:pPr>
+            <a:r>
+              <a:rPr lang="en-US" sz="3000" b="1" dirty="0">
+                <a:solidFill>
+                  <a:srgbClr val="6FA8FF"/>
+                </a:solidFill>
+                <a:latin typeface="Nirmala UI" pitchFamily="34" charset="0"/>
+                <a:ea typeface="Nirmala UI" pitchFamily="34" charset="-122"/>
+                <a:cs typeface="Nirmala UI" pitchFamily="34" charset="-120"/>
+              </a:rPr>
+              <a:t>  सहायक</a:t>
+            </a:r>
+            <a:endParaRPr lang="en-US" sz="4400" dirty="0"/>
+          </a:p>
+        </p:txBody>
+      </p:sp>
+      <p:sp>
+        <p:nvSpPr>
+          <p:cNvPr id="6" name="promise"/>
+          <p:cNvSpPr txBox="1"/>
+          <p:nvPr/>
+        </p:nvSpPr>
+        <p:spPr>
+          <a:xfrm>
+            <a:off x="457200" y="4572000"/>
+            <a:ext cx="11277295" cy="457200"/>
+          </a:xfrm>
+          <a:prstGeom prst="rect">
+            <a:avLst/>
+          </a:prstGeom>
+          <a:noFill/>
+          <a:ln/>
+        </p:spPr>
+        <p:txBody>
+          <a:bodyPr wrap="square" lIns="0" tIns="0" rIns="0" bIns="0" rtlCol="0" anchor="t"/>
+          <a:lstStyle/>
+          <a:p>
+            <a:pPr algn="ctr" indent="0" marL="0">
+              <a:buNone/>
+            </a:pPr>
+            <a:r>
+              <a:rPr lang="en-US" sz="2200" dirty="0">
+                <a:solidFill>
+                  <a:srgbClr val="F5F5F7"/>
+                </a:solidFill>
+                <a:latin typeface="Arial" pitchFamily="34" charset="0"/>
+                <a:ea typeface="Arial" pitchFamily="34" charset="-122"/>
+                <a:cs typeface="Arial" pitchFamily="34" charset="-120"/>
+              </a:rPr>
+              <a:t>Spot the scam before the money moves.  </a:t>
+            </a:r>
+            <a:pPr algn="ctr" indent="0" marL="0">
+              <a:buNone/>
+            </a:pPr>
+            <a:r>
+              <a:rPr lang="en-US" sz="2200" dirty="0">
+                <a:solidFill>
+                  <a:srgbClr val="6FA8FF"/>
+                </a:solidFill>
+                <a:latin typeface="Arial" pitchFamily="34" charset="0"/>
+                <a:ea typeface="Arial" pitchFamily="34" charset="-122"/>
+                <a:cs typeface="Arial" pitchFamily="34" charset="-120"/>
+              </a:rPr>
+              <a:t>Claim what you’re owed.</a:t>
+            </a:r>
+            <a:endParaRPr lang="en-US" sz="2200" dirty="0"/>
+          </a:p>
+        </p:txBody>
+      </p:sp>
+      <p:sp>
+        <p:nvSpPr>
+          <p:cNvPr id="7" name="team"/>
+          <p:cNvSpPr txBox="1"/>
+          <p:nvPr/>
+        </p:nvSpPr>
+        <p:spPr>
+          <a:xfrm>
+            <a:off x="457200" y="5715000"/>
+            <a:ext cx="11277295" cy="365760"/>
+          </a:xfrm>
+          <a:prstGeom prst="rect">
+            <a:avLst/>
+          </a:prstGeom>
+          <a:noFill/>
+          <a:ln/>
+        </p:spPr>
+        <p:txBody>
+          <a:bodyPr wrap="square" lIns="0" tIns="0" rIns="0" bIns="0" rtlCol="0" anchor="t"/>
+          <a:lstStyle/>
+          <a:p>
+            <a:pPr algn="ctr" indent="0" marL="0">
+              <a:buNone/>
+            </a:pPr>
+            <a:r>
+              <a:rPr lang="en-US" sz="1700" dirty="0">
                 <a:solidFill>
                   <a:srgbClr val="A1A1A6"/>
                 </a:solidFill>
@@ -4555,238 +4493,38 @@
                 <a:ea typeface="Arial" pitchFamily="34" charset="-122"/>
                 <a:cs typeface="Arial" pitchFamily="34" charset="-120"/>
               </a:rPr>
-              <a:t> · scam or real?</a:t>
-            </a:r>
-            <a:endParaRPr lang="en-US" sz="2100" dirty="0"/>
-          </a:p>
-        </p:txBody>
-      </p:sp>
-      <p:sp>
-        <p:nvSpPr>
-          <p:cNvPr id="7" name="point 2 rule"/>
-          <p:cNvSpPr/>
-          <p:nvPr/>
-        </p:nvSpPr>
-        <p:spPr>
-          <a:xfrm>
-            <a:off x="822960" y="3913632"/>
-            <a:ext cx="5120640" cy="0"/>
-          </a:xfrm>
-          <a:prstGeom prst="line">
-            <a:avLst/>
-          </a:prstGeom>
-          <a:noFill/>
-          <a:ln w="9525">
-            <a:solidFill>
-              <a:srgbClr val="3A3A3E"/>
-            </a:solidFill>
-            <a:prstDash val="solid"/>
-          </a:ln>
-        </p:spPr>
-      </p:sp>
-      <p:sp>
-        <p:nvSpPr>
-          <p:cNvPr id="8" name="point 2"/>
-          <p:cNvSpPr txBox="1"/>
-          <p:nvPr/>
-        </p:nvSpPr>
-        <p:spPr>
-          <a:xfrm>
-            <a:off x="822960" y="4014216"/>
-            <a:ext cx="5120640" cy="493776"/>
-          </a:xfrm>
-          <a:prstGeom prst="rect">
-            <a:avLst/>
-          </a:prstGeom>
-          <a:noFill/>
-          <a:ln/>
-        </p:spPr>
-        <p:txBody>
-          <a:bodyPr wrap="square" lIns="0" tIns="0" rIns="0" bIns="0" rtlCol="0" anchor="t"/>
-          <a:lstStyle/>
-          <a:p>
-            <a:pPr indent="0" marL="0">
-              <a:buNone/>
-            </a:pPr>
-            <a:r>
-              <a:rPr lang="en-US" sz="2100" b="1" dirty="0">
-                <a:solidFill>
-                  <a:srgbClr val="6FA8FF"/>
-                </a:solidFill>
-                <a:latin typeface="Arial" pitchFamily="34" charset="0"/>
-                <a:ea typeface="Arial" pitchFamily="34" charset="-122"/>
-                <a:cs typeface="Arial" pitchFamily="34" charset="-120"/>
-              </a:rPr>
-              <a:t>Sahayak’s own clues</a:t>
-            </a:r>
-            <a:pPr indent="0" marL="0">
-              <a:buNone/>
-            </a:pPr>
-            <a:r>
-              <a:rPr lang="en-US" sz="2100" dirty="0">
-                <a:solidFill>
-                  <a:srgbClr val="A1A1A6"/>
-                </a:solidFill>
-                <a:latin typeface="Arial" pitchFamily="34" charset="0"/>
-                <a:ea typeface="Arial" pitchFamily="34" charset="-122"/>
-                <a:cs typeface="Arial" pitchFamily="34" charset="-120"/>
-              </a:rPr>
-              <a:t> after every answer</a:t>
-            </a:r>
-            <a:endParaRPr lang="en-US" sz="2100" dirty="0"/>
-          </a:p>
-        </p:txBody>
-      </p:sp>
-      <p:sp>
-        <p:nvSpPr>
-          <p:cNvPr id="9" name="point 3 rule"/>
-          <p:cNvSpPr/>
-          <p:nvPr/>
-        </p:nvSpPr>
-        <p:spPr>
-          <a:xfrm>
-            <a:off x="822960" y="4535424"/>
-            <a:ext cx="5120640" cy="0"/>
-          </a:xfrm>
-          <a:prstGeom prst="line">
-            <a:avLst/>
-          </a:prstGeom>
-          <a:noFill/>
-          <a:ln w="9525">
-            <a:solidFill>
-              <a:srgbClr val="3A3A3E"/>
-            </a:solidFill>
-            <a:prstDash val="solid"/>
-          </a:ln>
-        </p:spPr>
-      </p:sp>
-      <p:sp>
-        <p:nvSpPr>
-          <p:cNvPr id="10" name="point 3"/>
-          <p:cNvSpPr txBox="1"/>
-          <p:nvPr/>
-        </p:nvSpPr>
-        <p:spPr>
-          <a:xfrm>
-            <a:off x="822960" y="4636008"/>
-            <a:ext cx="5120640" cy="493776"/>
-          </a:xfrm>
-          <a:prstGeom prst="rect">
-            <a:avLst/>
-          </a:prstGeom>
-          <a:noFill/>
-          <a:ln/>
-        </p:spPr>
-        <p:txBody>
-          <a:bodyPr wrap="square" lIns="0" tIns="0" rIns="0" bIns="0" rtlCol="0" anchor="t"/>
-          <a:lstStyle/>
-          <a:p>
-            <a:pPr indent="0" marL="0">
-              <a:buNone/>
-            </a:pPr>
-            <a:r>
-              <a:rPr lang="en-US" sz="2100" b="1" dirty="0">
-                <a:solidFill>
-                  <a:srgbClr val="F5F5F7"/>
-                </a:solidFill>
-                <a:latin typeface="Arial" pitchFamily="34" charset="0"/>
-                <a:ea typeface="Arial" pitchFamily="34" charset="-122"/>
-                <a:cs typeface="Arial" pitchFamily="34" charset="-120"/>
-              </a:rPr>
-              <a:t>Levels, badges</a:t>
-            </a:r>
-            <a:pPr indent="0" marL="0">
-              <a:buNone/>
-            </a:pPr>
-            <a:r>
-              <a:rPr lang="en-US" sz="2100" dirty="0">
-                <a:solidFill>
-                  <a:srgbClr val="A1A1A6"/>
-                </a:solidFill>
-                <a:latin typeface="Arial" pitchFamily="34" charset="0"/>
-                <a:ea typeface="Arial" pitchFamily="34" charset="-122"/>
-                <a:cs typeface="Arial" pitchFamily="34" charset="-120"/>
-              </a:rPr>
-              <a:t> · a new message daily</a:t>
-            </a:r>
-            <a:endParaRPr lang="en-US" sz="2100" dirty="0"/>
-          </a:p>
-        </p:txBody>
-      </p:sp>
-      <p:pic>
-        <p:nvPicPr>
-          <p:cNvPr id="11" name="Spot the scam: a card" descr="Screenshot: Spot the scam: a card">    </p:cNvPr>
-          <p:cNvPicPr>
-            <a:picLocks noChangeAspect="1"/>
-          </p:cNvPicPr>
-          <p:nvPr/>
-        </p:nvPicPr>
-        <p:blipFill>
-          <a:blip r:embed="rId1"/>
-          <a:stretch>
-            <a:fillRect/>
-          </a:stretch>
-        </p:blipFill>
-        <p:spPr>
-          <a:xfrm>
-            <a:off x="6355080" y="685800"/>
-            <a:ext cx="2518637" cy="5257800"/>
-          </a:xfrm>
-          <a:prstGeom prst="rect">
-            <a:avLst/>
-          </a:prstGeom>
-        </p:spPr>
-      </p:pic>
-      <p:pic>
-        <p:nvPicPr>
-          <p:cNvPr id="12" name="Spot the scam: Sahayak's clues after the answer" descr="Screenshot: Spot the scam: Sahayak's clues after the answer">    </p:cNvPr>
-          <p:cNvPicPr>
-            <a:picLocks noChangeAspect="1"/>
-          </p:cNvPicPr>
-          <p:nvPr/>
-        </p:nvPicPr>
-        <p:blipFill>
-          <a:blip r:embed="rId2"/>
-          <a:stretch>
-            <a:fillRect/>
-          </a:stretch>
-        </p:blipFill>
-        <p:spPr>
-          <a:xfrm>
-            <a:off x="8961120" y="685800"/>
-            <a:ext cx="2518637" cy="5257800"/>
-          </a:xfrm>
-          <a:prstGeom prst="rect">
-            <a:avLst/>
-          </a:prstGeom>
-        </p:spPr>
-      </p:pic>
-      <p:sp>
-        <p:nvSpPr>
-          <p:cNvPr id="13" name="source"/>
-          <p:cNvSpPr txBox="1"/>
-          <p:nvPr/>
-        </p:nvSpPr>
-        <p:spPr>
-          <a:xfrm>
-            <a:off x="822960" y="6400800"/>
-            <a:ext cx="10545775" cy="256032"/>
-          </a:xfrm>
-          <a:prstGeom prst="rect">
-            <a:avLst/>
-          </a:prstGeom>
-          <a:noFill/>
-          <a:ln/>
-        </p:spPr>
-        <p:txBody>
-          <a:bodyPr wrap="square" lIns="0" tIns="0" rIns="0" bIns="0" rtlCol="0" anchor="t"/>
-          <a:lstStyle/>
-          <a:p>
-            <a:pPr indent="0" marL="0">
-              <a:buNone/>
-            </a:pPr>
-            <a:r>
-              <a:rPr lang="en-US" sz="1050" dirty="0">
+              <a:t>Ishmiit Singh  ·  Roshan Raj</a:t>
+            </a:r>
+            <a:endParaRPr lang="en-US" sz="1700" dirty="0"/>
+          </a:p>
+        </p:txBody>
+      </p:sp>
+      <p:sp>
+        <p:nvSpPr>
+          <p:cNvPr id="8" name="repo"/>
+          <p:cNvSpPr txBox="1"/>
+          <p:nvPr/>
+        </p:nvSpPr>
+        <p:spPr>
+          <a:xfrm>
+            <a:off x="457200" y="6172200"/>
+            <a:ext cx="11277295" cy="274320"/>
+          </a:xfrm>
+          <a:prstGeom prst="rect">
+            <a:avLst/>
+          </a:prstGeom>
+          <a:noFill/>
+          <a:ln/>
+        </p:spPr>
+        <p:txBody>
+          <a:bodyPr wrap="square" lIns="0" tIns="0" rIns="0" bIns="0" rtlCol="0" anchor="t"/>
+          <a:lstStyle/>
+          <a:p>
+            <a:pPr algn="ctr" indent="0" marL="0">
+              <a:buNone/>
+            </a:pPr>
+            <a:r>
+              <a:rPr lang="en-US" sz="1200" dirty="0">
                 <a:solidFill>
                   <a:srgbClr val="6E6E73"/>
                 </a:solidFill>
@@ -4794,9 +4532,9 @@
                 <a:ea typeface="Arial" pitchFamily="34" charset="-122"/>
                 <a:cs typeface="Arial" pitchFamily="34" charset="-120"/>
               </a:rPr>
-              <a:t>The Learn tab of the same app · every card agrees with Sahayak’s own check (tests/test_game.py) · nothing leaves the phone</a:t>
-            </a:r>
-            <a:endParaRPr lang="en-US" sz="1050" dirty="0"/>
+              <a:t>Open source: github.com/ishmiit/Sahayak</a:t>
+            </a:r>
+            <a:endParaRPr lang="en-US" sz="1200" dirty="0"/>
           </a:p>
         </p:txBody>
       </p:sp>
@@ -4827,14 +4565,60 @@
       </p:grpSpPr>
       <p:sp>
         <p:nvSpPr>
-          <p:cNvPr id="2" name="then"/>
-          <p:cNvSpPr txBox="1"/>
-          <p:nvPr/>
-        </p:nvSpPr>
-        <p:spPr>
-          <a:xfrm>
-            <a:off x="457200" y="1143000"/>
-            <a:ext cx="11277295" cy="548640"/>
+          <p:cNvPr id="2" name="QR card"/>
+          <p:cNvSpPr/>
+          <p:nvPr/>
+        </p:nvSpPr>
+        <p:spPr>
+          <a:xfrm>
+            <a:off x="914400" y="1143000"/>
+            <a:ext cx="4343400" cy="4343400"/>
+          </a:xfrm>
+          <a:prstGeom prst="roundRect">
+            <a:avLst>
+              <a:gd name="adj" fmla="val 5263"/>
+            </a:avLst>
+          </a:prstGeom>
+          <a:solidFill>
+            <a:srgbClr val="FFFFFF"/>
+          </a:solidFill>
+          <a:ln/>
+        </p:spPr>
+      </p:sp>
+      <p:pic>
+        <p:nvPicPr>
+          <p:cNvPr id="3" name="QR code" descr="QR code for https://ishmiit.github.io/Sahayak/">    </p:cNvPr>
+          <p:cNvPicPr>
+            <a:picLocks noChangeAspect="1"/>
+          </p:cNvPicPr>
+          <p:nvPr/>
+        </p:nvPicPr>
+        <p:blipFill>
+          <a:blip r:embed="rId1"/>
+          <a:stretch>
+            <a:fillRect/>
+          </a:stretch>
+        </p:blipFill>
+        <p:spPr>
+          <a:xfrm>
+            <a:off x="1097280" y="1325880"/>
+            <a:ext cx="3977640" cy="3977640"/>
+          </a:xfrm>
+          <a:prstGeom prst="rect">
+            <a:avLst/>
+          </a:prstGeom>
+        </p:spPr>
+      </p:pic>
+      <p:sp>
+        <p:nvSpPr>
+          <p:cNvPr id="4" name="address"/>
+          <p:cNvSpPr txBox="1"/>
+          <p:nvPr/>
+        </p:nvSpPr>
+        <p:spPr>
+          <a:xfrm>
+            <a:off x="640080" y="5715000"/>
+            <a:ext cx="4892040" cy="365760"/>
           </a:xfrm>
           <a:prstGeom prst="rect">
             <a:avLst/>
@@ -4850,7 +4634,672 @@
               <a:buNone/>
             </a:pPr>
             <a:r>
-              <a:rPr lang="en-US" sz="3000" dirty="0">
+              <a:rPr lang="en-US" sz="1700" b="1" dirty="0">
+                <a:solidFill>
+                  <a:srgbClr val="6FA8FF"/>
+                </a:solidFill>
+                <a:latin typeface="Arial" pitchFamily="34" charset="0"/>
+                <a:ea typeface="Arial" pitchFamily="34" charset="-122"/>
+                <a:cs typeface="Arial" pitchFamily="34" charset="-120"/>
+              </a:rPr>
+              <a:t>ishmiit.github.io/Sahayak</a:t>
+            </a:r>
+            <a:endParaRPr lang="en-US" sz="1700" dirty="0"/>
+          </a:p>
+        </p:txBody>
+      </p:sp>
+      <p:sp>
+        <p:nvSpPr>
+          <p:cNvPr id="5" name="title"/>
+          <p:cNvSpPr txBox="1"/>
+          <p:nvPr/>
+        </p:nvSpPr>
+        <p:spPr>
+          <a:xfrm>
+            <a:off x="6035040" y="868680"/>
+            <a:ext cx="5669280" cy="822960"/>
+          </a:xfrm>
+          <a:prstGeom prst="rect">
+            <a:avLst/>
+          </a:prstGeom>
+          <a:noFill/>
+          <a:ln/>
+        </p:spPr>
+        <p:txBody>
+          <a:bodyPr wrap="square" lIns="0" tIns="0" rIns="0" bIns="0" rtlCol="0" anchor="t"/>
+          <a:lstStyle/>
+          <a:p>
+            <a:pPr indent="0" marL="0">
+              <a:buNone/>
+            </a:pPr>
+            <a:r>
+              <a:rPr lang="en-US" sz="4800" b="1" dirty="0">
+                <a:solidFill>
+                  <a:srgbClr val="F5F5F7"/>
+                </a:solidFill>
+                <a:latin typeface="Arial" pitchFamily="34" charset="0"/>
+                <a:ea typeface="Arial" pitchFamily="34" charset="-122"/>
+                <a:cs typeface="Arial" pitchFamily="34" charset="-120"/>
+              </a:rPr>
+              <a:t>Try it yourself.</a:t>
+            </a:r>
+            <a:endParaRPr lang="en-US" sz="4800" dirty="0"/>
+          </a:p>
+        </p:txBody>
+      </p:sp>
+      <p:sp>
+        <p:nvSpPr>
+          <p:cNvPr id="6" name="subtitle"/>
+          <p:cNvSpPr txBox="1"/>
+          <p:nvPr/>
+        </p:nvSpPr>
+        <p:spPr>
+          <a:xfrm>
+            <a:off x="6035040" y="1691640"/>
+            <a:ext cx="5669280" cy="457200"/>
+          </a:xfrm>
+          <a:prstGeom prst="rect">
+            <a:avLst/>
+          </a:prstGeom>
+          <a:noFill/>
+          <a:ln/>
+        </p:spPr>
+        <p:txBody>
+          <a:bodyPr wrap="square" lIns="0" tIns="0" rIns="0" bIns="0" rtlCol="0" anchor="t"/>
+          <a:lstStyle/>
+          <a:p>
+            <a:pPr indent="0" marL="0">
+              <a:buNone/>
+            </a:pPr>
+            <a:r>
+              <a:rPr lang="en-US" sz="2000" dirty="0">
+                <a:solidFill>
+                  <a:srgbClr val="A1A1A6"/>
+                </a:solidFill>
+                <a:latin typeface="Arial" pitchFamily="34" charset="0"/>
+                <a:ea typeface="Arial" pitchFamily="34" charset="-122"/>
+                <a:cs typeface="Arial" pitchFamily="34" charset="-120"/>
+              </a:rPr>
+              <a:t>Scan it on your phone, or watch it on our laptop.</a:t>
+            </a:r>
+            <a:endParaRPr lang="en-US" sz="2000" dirty="0"/>
+          </a:p>
+        </p:txBody>
+      </p:sp>
+      <p:sp>
+        <p:nvSpPr>
+          <p:cNvPr id="7" name="number 1"/>
+          <p:cNvSpPr/>
+          <p:nvPr/>
+        </p:nvSpPr>
+        <p:spPr>
+          <a:xfrm>
+            <a:off x="6035040" y="2496312"/>
+            <a:ext cx="457200" cy="457200"/>
+          </a:xfrm>
+          <a:prstGeom prst="ellipse">
+            <a:avLst/>
+          </a:prstGeom>
+          <a:solidFill>
+            <a:srgbClr val="6FA8FF"/>
+          </a:solidFill>
+          <a:ln/>
+        </p:spPr>
+      </p:sp>
+      <p:sp>
+        <p:nvSpPr>
+          <p:cNvPr id="8" name="number 1 label"/>
+          <p:cNvSpPr txBox="1"/>
+          <p:nvPr/>
+        </p:nvSpPr>
+        <p:spPr>
+          <a:xfrm>
+            <a:off x="6035040" y="2496312"/>
+            <a:ext cx="457200" cy="457200"/>
+          </a:xfrm>
+          <a:prstGeom prst="rect">
+            <a:avLst/>
+          </a:prstGeom>
+          <a:noFill/>
+          <a:ln/>
+        </p:spPr>
+        <p:txBody>
+          <a:bodyPr wrap="square" lIns="0" tIns="0" rIns="0" bIns="0" rtlCol="0" anchor="ctr"/>
+          <a:lstStyle/>
+          <a:p>
+            <a:pPr algn="ctr" indent="0" marL="0">
+              <a:buNone/>
+            </a:pPr>
+            <a:r>
+              <a:rPr lang="en-US" sz="1800" b="1" dirty="0">
+                <a:solidFill>
+                  <a:srgbClr val="000000"/>
+                </a:solidFill>
+                <a:latin typeface="Arial" pitchFamily="34" charset="0"/>
+                <a:ea typeface="Arial" pitchFamily="34" charset="-122"/>
+                <a:cs typeface="Arial" pitchFamily="34" charset="-120"/>
+              </a:rPr>
+              <a:t>1</a:t>
+            </a:r>
+            <a:endParaRPr lang="en-US" sz="1800" dirty="0"/>
+          </a:p>
+        </p:txBody>
+      </p:sp>
+      <p:sp>
+        <p:nvSpPr>
+          <p:cNvPr id="9" name="step 1"/>
+          <p:cNvSpPr txBox="1"/>
+          <p:nvPr/>
+        </p:nvSpPr>
+        <p:spPr>
+          <a:xfrm>
+            <a:off x="6720840" y="2468880"/>
+            <a:ext cx="4937760" cy="384048"/>
+          </a:xfrm>
+          <a:prstGeom prst="rect">
+            <a:avLst/>
+          </a:prstGeom>
+          <a:noFill/>
+          <a:ln/>
+        </p:spPr>
+        <p:txBody>
+          <a:bodyPr wrap="square" lIns="0" tIns="0" rIns="0" bIns="0" rtlCol="0" anchor="t"/>
+          <a:lstStyle/>
+          <a:p>
+            <a:pPr indent="0" marL="0">
+              <a:buNone/>
+            </a:pPr>
+            <a:r>
+              <a:rPr lang="en-US" sz="2000" b="1" dirty="0">
+                <a:solidFill>
+                  <a:srgbClr val="F5F5F7"/>
+                </a:solidFill>
+                <a:latin typeface="Arial" pitchFamily="34" charset="0"/>
+                <a:ea typeface="Arial" pitchFamily="34" charset="-122"/>
+                <a:cs typeface="Arial" pitchFamily="34" charset="-120"/>
+              </a:rPr>
+              <a:t>Check a scam</a:t>
+            </a:r>
+            <a:endParaRPr lang="en-US" sz="2000" dirty="0"/>
+          </a:p>
+        </p:txBody>
+      </p:sp>
+      <p:sp>
+        <p:nvSpPr>
+          <p:cNvPr id="10" name="step 1 detail"/>
+          <p:cNvSpPr txBox="1"/>
+          <p:nvPr/>
+        </p:nvSpPr>
+        <p:spPr>
+          <a:xfrm>
+            <a:off x="6720840" y="2852928"/>
+            <a:ext cx="4937760" cy="365760"/>
+          </a:xfrm>
+          <a:prstGeom prst="rect">
+            <a:avLst/>
+          </a:prstGeom>
+          <a:noFill/>
+          <a:ln/>
+        </p:spPr>
+        <p:txBody>
+          <a:bodyPr wrap="square" lIns="0" tIns="0" rIns="0" bIns="0" rtlCol="0" anchor="t"/>
+          <a:lstStyle/>
+          <a:p>
+            <a:pPr indent="0" marL="0">
+              <a:buNone/>
+            </a:pPr>
+            <a:r>
+              <a:rPr lang="en-US" sz="1700" dirty="0">
+                <a:solidFill>
+                  <a:srgbClr val="A1A1A6"/>
+                </a:solidFill>
+                <a:latin typeface="Arial" pitchFamily="34" charset="0"/>
+                <a:ea typeface="Arial" pitchFamily="34" charset="-122"/>
+                <a:cs typeface="Arial" pitchFamily="34" charset="-120"/>
+              </a:rPr>
+              <a:t>Try “Pay ₹500 for your Ayushman card”.</a:t>
+            </a:r>
+            <a:endParaRPr lang="en-US" sz="1700" dirty="0"/>
+          </a:p>
+        </p:txBody>
+      </p:sp>
+      <p:sp>
+        <p:nvSpPr>
+          <p:cNvPr id="11" name="number 2"/>
+          <p:cNvSpPr/>
+          <p:nvPr/>
+        </p:nvSpPr>
+        <p:spPr>
+          <a:xfrm>
+            <a:off x="6035040" y="3337560"/>
+            <a:ext cx="457200" cy="457200"/>
+          </a:xfrm>
+          <a:prstGeom prst="ellipse">
+            <a:avLst/>
+          </a:prstGeom>
+          <a:solidFill>
+            <a:srgbClr val="6FA8FF"/>
+          </a:solidFill>
+          <a:ln/>
+        </p:spPr>
+      </p:sp>
+      <p:sp>
+        <p:nvSpPr>
+          <p:cNvPr id="12" name="number 2 label"/>
+          <p:cNvSpPr txBox="1"/>
+          <p:nvPr/>
+        </p:nvSpPr>
+        <p:spPr>
+          <a:xfrm>
+            <a:off x="6035040" y="3337560"/>
+            <a:ext cx="457200" cy="457200"/>
+          </a:xfrm>
+          <a:prstGeom prst="rect">
+            <a:avLst/>
+          </a:prstGeom>
+          <a:noFill/>
+          <a:ln/>
+        </p:spPr>
+        <p:txBody>
+          <a:bodyPr wrap="square" lIns="0" tIns="0" rIns="0" bIns="0" rtlCol="0" anchor="ctr"/>
+          <a:lstStyle/>
+          <a:p>
+            <a:pPr algn="ctr" indent="0" marL="0">
+              <a:buNone/>
+            </a:pPr>
+            <a:r>
+              <a:rPr lang="en-US" sz="1800" b="1" dirty="0">
+                <a:solidFill>
+                  <a:srgbClr val="000000"/>
+                </a:solidFill>
+                <a:latin typeface="Arial" pitchFamily="34" charset="0"/>
+                <a:ea typeface="Arial" pitchFamily="34" charset="-122"/>
+                <a:cs typeface="Arial" pitchFamily="34" charset="-120"/>
+              </a:rPr>
+              <a:t>2</a:t>
+            </a:r>
+            <a:endParaRPr lang="en-US" sz="1800" dirty="0"/>
+          </a:p>
+        </p:txBody>
+      </p:sp>
+      <p:sp>
+        <p:nvSpPr>
+          <p:cNvPr id="13" name="step 2"/>
+          <p:cNvSpPr txBox="1"/>
+          <p:nvPr/>
+        </p:nvSpPr>
+        <p:spPr>
+          <a:xfrm>
+            <a:off x="6720840" y="3310128"/>
+            <a:ext cx="4937760" cy="384048"/>
+          </a:xfrm>
+          <a:prstGeom prst="rect">
+            <a:avLst/>
+          </a:prstGeom>
+          <a:noFill/>
+          <a:ln/>
+        </p:spPr>
+        <p:txBody>
+          <a:bodyPr wrap="square" lIns="0" tIns="0" rIns="0" bIns="0" rtlCol="0" anchor="t"/>
+          <a:lstStyle/>
+          <a:p>
+            <a:pPr indent="0" marL="0">
+              <a:buNone/>
+            </a:pPr>
+            <a:r>
+              <a:rPr lang="en-US" sz="2000" b="1" dirty="0">
+                <a:solidFill>
+                  <a:srgbClr val="F5F5F7"/>
+                </a:solidFill>
+                <a:latin typeface="Arial" pitchFamily="34" charset="0"/>
+                <a:ea typeface="Arial" pitchFamily="34" charset="-122"/>
+                <a:cs typeface="Arial" pitchFamily="34" charset="-120"/>
+              </a:rPr>
+              <a:t>What is she owed?</a:t>
+            </a:r>
+            <a:endParaRPr lang="en-US" sz="2000" dirty="0"/>
+          </a:p>
+        </p:txBody>
+      </p:sp>
+      <p:sp>
+        <p:nvSpPr>
+          <p:cNvPr id="14" name="step 2 detail"/>
+          <p:cNvSpPr txBox="1"/>
+          <p:nvPr/>
+        </p:nvSpPr>
+        <p:spPr>
+          <a:xfrm>
+            <a:off x="6720840" y="3694176"/>
+            <a:ext cx="4937760" cy="365760"/>
+          </a:xfrm>
+          <a:prstGeom prst="rect">
+            <a:avLst/>
+          </a:prstGeom>
+          <a:noFill/>
+          <a:ln/>
+        </p:spPr>
+        <p:txBody>
+          <a:bodyPr wrap="square" lIns="0" tIns="0" rIns="0" bIns="0" rtlCol="0" anchor="t"/>
+          <a:lstStyle/>
+          <a:p>
+            <a:pPr indent="0" marL="0">
+              <a:buNone/>
+            </a:pPr>
+            <a:r>
+              <a:rPr lang="en-US" sz="1700" dirty="0">
+                <a:solidFill>
+                  <a:srgbClr val="A1A1A6"/>
+                </a:solidFill>
+                <a:latin typeface="Arial" pitchFamily="34" charset="0"/>
+                <a:ea typeface="Arial" pitchFamily="34" charset="-122"/>
+                <a:cs typeface="Arial" pitchFamily="34" charset="-120"/>
+              </a:rPr>
+              <a:t>Answer as a 74-year-old.</a:t>
+            </a:r>
+            <a:endParaRPr lang="en-US" sz="1700" dirty="0"/>
+          </a:p>
+        </p:txBody>
+      </p:sp>
+      <p:sp>
+        <p:nvSpPr>
+          <p:cNvPr id="15" name="number 3"/>
+          <p:cNvSpPr/>
+          <p:nvPr/>
+        </p:nvSpPr>
+        <p:spPr>
+          <a:xfrm>
+            <a:off x="6035040" y="4178808"/>
+            <a:ext cx="457200" cy="457200"/>
+          </a:xfrm>
+          <a:prstGeom prst="ellipse">
+            <a:avLst/>
+          </a:prstGeom>
+          <a:solidFill>
+            <a:srgbClr val="6FA8FF"/>
+          </a:solidFill>
+          <a:ln/>
+        </p:spPr>
+      </p:sp>
+      <p:sp>
+        <p:nvSpPr>
+          <p:cNvPr id="16" name="number 3 label"/>
+          <p:cNvSpPr txBox="1"/>
+          <p:nvPr/>
+        </p:nvSpPr>
+        <p:spPr>
+          <a:xfrm>
+            <a:off x="6035040" y="4178808"/>
+            <a:ext cx="457200" cy="457200"/>
+          </a:xfrm>
+          <a:prstGeom prst="rect">
+            <a:avLst/>
+          </a:prstGeom>
+          <a:noFill/>
+          <a:ln/>
+        </p:spPr>
+        <p:txBody>
+          <a:bodyPr wrap="square" lIns="0" tIns="0" rIns="0" bIns="0" rtlCol="0" anchor="ctr"/>
+          <a:lstStyle/>
+          <a:p>
+            <a:pPr algn="ctr" indent="0" marL="0">
+              <a:buNone/>
+            </a:pPr>
+            <a:r>
+              <a:rPr lang="en-US" sz="1800" b="1" dirty="0">
+                <a:solidFill>
+                  <a:srgbClr val="000000"/>
+                </a:solidFill>
+                <a:latin typeface="Arial" pitchFamily="34" charset="0"/>
+                <a:ea typeface="Arial" pitchFamily="34" charset="-122"/>
+                <a:cs typeface="Arial" pitchFamily="34" charset="-120"/>
+              </a:rPr>
+              <a:t>3</a:t>
+            </a:r>
+            <a:endParaRPr lang="en-US" sz="1800" dirty="0"/>
+          </a:p>
+        </p:txBody>
+      </p:sp>
+      <p:sp>
+        <p:nvSpPr>
+          <p:cNvPr id="17" name="step 3"/>
+          <p:cNvSpPr txBox="1"/>
+          <p:nvPr/>
+        </p:nvSpPr>
+        <p:spPr>
+          <a:xfrm>
+            <a:off x="6720840" y="4151376"/>
+            <a:ext cx="4937760" cy="384048"/>
+          </a:xfrm>
+          <a:prstGeom prst="rect">
+            <a:avLst/>
+          </a:prstGeom>
+          <a:noFill/>
+          <a:ln/>
+        </p:spPr>
+        <p:txBody>
+          <a:bodyPr wrap="square" lIns="0" tIns="0" rIns="0" bIns="0" rtlCol="0" anchor="t"/>
+          <a:lstStyle/>
+          <a:p>
+            <a:pPr indent="0" marL="0">
+              <a:buNone/>
+            </a:pPr>
+            <a:r>
+              <a:rPr lang="en-US" sz="2000" b="1" dirty="0">
+                <a:solidFill>
+                  <a:srgbClr val="F5F5F7"/>
+                </a:solidFill>
+                <a:latin typeface="Arial" pitchFamily="34" charset="0"/>
+                <a:ea typeface="Arial" pitchFamily="34" charset="-122"/>
+                <a:cs typeface="Arial" pitchFamily="34" charset="-120"/>
+              </a:rPr>
+              <a:t>Your language</a:t>
+            </a:r>
+            <a:endParaRPr lang="en-US" sz="2000" dirty="0"/>
+          </a:p>
+        </p:txBody>
+      </p:sp>
+      <p:sp>
+        <p:nvSpPr>
+          <p:cNvPr id="18" name="step 3 detail"/>
+          <p:cNvSpPr txBox="1"/>
+          <p:nvPr/>
+        </p:nvSpPr>
+        <p:spPr>
+          <a:xfrm>
+            <a:off x="6720840" y="4535424"/>
+            <a:ext cx="4937760" cy="365760"/>
+          </a:xfrm>
+          <a:prstGeom prst="rect">
+            <a:avLst/>
+          </a:prstGeom>
+          <a:noFill/>
+          <a:ln/>
+        </p:spPr>
+        <p:txBody>
+          <a:bodyPr wrap="square" lIns="0" tIns="0" rIns="0" bIns="0" rtlCol="0" anchor="t"/>
+          <a:lstStyle/>
+          <a:p>
+            <a:pPr indent="0" marL="0">
+              <a:buNone/>
+            </a:pPr>
+            <a:r>
+              <a:rPr lang="en-US" sz="1700" dirty="0">
+                <a:solidFill>
+                  <a:srgbClr val="A1A1A6"/>
+                </a:solidFill>
+                <a:latin typeface="Arial" pitchFamily="34" charset="0"/>
+                <a:ea typeface="Arial" pitchFamily="34" charset="-122"/>
+                <a:cs typeface="Arial" pitchFamily="34" charset="-120"/>
+              </a:rPr>
+              <a:t>Tap EN and pick any of 22.</a:t>
+            </a:r>
+            <a:endParaRPr lang="en-US" sz="1700" dirty="0"/>
+          </a:p>
+        </p:txBody>
+      </p:sp>
+      <p:sp>
+        <p:nvSpPr>
+          <p:cNvPr id="19" name="number 4"/>
+          <p:cNvSpPr/>
+          <p:nvPr/>
+        </p:nvSpPr>
+        <p:spPr>
+          <a:xfrm>
+            <a:off x="6035040" y="5020056"/>
+            <a:ext cx="457200" cy="457200"/>
+          </a:xfrm>
+          <a:prstGeom prst="ellipse">
+            <a:avLst/>
+          </a:prstGeom>
+          <a:solidFill>
+            <a:srgbClr val="6FA8FF"/>
+          </a:solidFill>
+          <a:ln/>
+        </p:spPr>
+      </p:sp>
+      <p:sp>
+        <p:nvSpPr>
+          <p:cNvPr id="20" name="number 4 label"/>
+          <p:cNvSpPr txBox="1"/>
+          <p:nvPr/>
+        </p:nvSpPr>
+        <p:spPr>
+          <a:xfrm>
+            <a:off x="6035040" y="5020056"/>
+            <a:ext cx="457200" cy="457200"/>
+          </a:xfrm>
+          <a:prstGeom prst="rect">
+            <a:avLst/>
+          </a:prstGeom>
+          <a:noFill/>
+          <a:ln/>
+        </p:spPr>
+        <p:txBody>
+          <a:bodyPr wrap="square" lIns="0" tIns="0" rIns="0" bIns="0" rtlCol="0" anchor="ctr"/>
+          <a:lstStyle/>
+          <a:p>
+            <a:pPr algn="ctr" indent="0" marL="0">
+              <a:buNone/>
+            </a:pPr>
+            <a:r>
+              <a:rPr lang="en-US" sz="1800" b="1" dirty="0">
+                <a:solidFill>
+                  <a:srgbClr val="000000"/>
+                </a:solidFill>
+                <a:latin typeface="Arial" pitchFamily="34" charset="0"/>
+                <a:ea typeface="Arial" pitchFamily="34" charset="-122"/>
+                <a:cs typeface="Arial" pitchFamily="34" charset="-120"/>
+              </a:rPr>
+              <a:t>4</a:t>
+            </a:r>
+            <a:endParaRPr lang="en-US" sz="1800" dirty="0"/>
+          </a:p>
+        </p:txBody>
+      </p:sp>
+      <p:sp>
+        <p:nvSpPr>
+          <p:cNvPr id="21" name="step 4"/>
+          <p:cNvSpPr txBox="1"/>
+          <p:nvPr/>
+        </p:nvSpPr>
+        <p:spPr>
+          <a:xfrm>
+            <a:off x="6720840" y="4992624"/>
+            <a:ext cx="4937760" cy="384048"/>
+          </a:xfrm>
+          <a:prstGeom prst="rect">
+            <a:avLst/>
+          </a:prstGeom>
+          <a:noFill/>
+          <a:ln/>
+        </p:spPr>
+        <p:txBody>
+          <a:bodyPr wrap="square" lIns="0" tIns="0" rIns="0" bIns="0" rtlCol="0" anchor="t"/>
+          <a:lstStyle/>
+          <a:p>
+            <a:pPr indent="0" marL="0">
+              <a:buNone/>
+            </a:pPr>
+            <a:r>
+              <a:rPr lang="en-US" sz="2000" b="1" dirty="0">
+                <a:solidFill>
+                  <a:srgbClr val="F5F5F7"/>
+                </a:solidFill>
+                <a:latin typeface="Arial" pitchFamily="34" charset="0"/>
+                <a:ea typeface="Arial" pitchFamily="34" charset="-122"/>
+                <a:cs typeface="Arial" pitchFamily="34" charset="-120"/>
+              </a:rPr>
+              <a:t>Airplane mode</a:t>
+            </a:r>
+            <a:endParaRPr lang="en-US" sz="2000" dirty="0"/>
+          </a:p>
+        </p:txBody>
+      </p:sp>
+      <p:sp>
+        <p:nvSpPr>
+          <p:cNvPr id="22" name="step 4 detail"/>
+          <p:cNvSpPr txBox="1"/>
+          <p:nvPr/>
+        </p:nvSpPr>
+        <p:spPr>
+          <a:xfrm>
+            <a:off x="6720840" y="5376672"/>
+            <a:ext cx="4937760" cy="365760"/>
+          </a:xfrm>
+          <a:prstGeom prst="rect">
+            <a:avLst/>
+          </a:prstGeom>
+          <a:noFill/>
+          <a:ln/>
+        </p:spPr>
+        <p:txBody>
+          <a:bodyPr wrap="square" lIns="0" tIns="0" rIns="0" bIns="0" rtlCol="0" anchor="t"/>
+          <a:lstStyle/>
+          <a:p>
+            <a:pPr indent="0" marL="0">
+              <a:buNone/>
+            </a:pPr>
+            <a:r>
+              <a:rPr lang="en-US" sz="1700" dirty="0">
+                <a:solidFill>
+                  <a:srgbClr val="A1A1A6"/>
+                </a:solidFill>
+                <a:latin typeface="Arial" pitchFamily="34" charset="0"/>
+                <a:ea typeface="Arial" pitchFamily="34" charset="-122"/>
+                <a:cs typeface="Arial" pitchFamily="34" charset="-120"/>
+              </a:rPr>
+              <a:t>Turn it on. It still works.</a:t>
+            </a:r>
+            <a:endParaRPr lang="en-US" sz="1700" dirty="0"/>
+          </a:p>
+        </p:txBody>
+      </p:sp>
+      <p:sp>
+        <p:nvSpPr>
+          <p:cNvPr id="23" name="footer"/>
+          <p:cNvSpPr txBox="1"/>
+          <p:nvPr/>
+        </p:nvSpPr>
+        <p:spPr>
+          <a:xfrm>
+            <a:off x="6035040" y="5760720"/>
+            <a:ext cx="5669280" cy="365760"/>
+          </a:xfrm>
+          <a:prstGeom prst="rect">
+            <a:avLst/>
+          </a:prstGeom>
+          <a:noFill/>
+          <a:ln/>
+        </p:spPr>
+        <p:txBody>
+          <a:bodyPr wrap="square" lIns="0" tIns="0" rIns="0" bIns="0" rtlCol="0" anchor="t"/>
+          <a:lstStyle/>
+          <a:p>
+            <a:pPr indent="0" marL="0">
+              <a:buNone/>
+            </a:pPr>
+            <a:r>
+              <a:rPr lang="en-US" sz="1600" dirty="0">
                 <a:solidFill>
                   <a:srgbClr val="6E6E73"/>
                 </a:solidFill>
@@ -4858,255 +5307,9 @@
                 <a:ea typeface="Arial" pitchFamily="34" charset="-122"/>
                 <a:cs typeface="Arial" pitchFamily="34" charset="-120"/>
               </a:rPr>
-              <a:t>Nine at night. The bank is closed.</a:t>
-            </a:r>
-            <a:endParaRPr lang="en-US" sz="3000" dirty="0"/>
-          </a:p>
-        </p:txBody>
-      </p:sp>
-      <p:sp>
-        <p:nvSpPr>
-          <p:cNvPr id="3" name="now"/>
-          <p:cNvSpPr txBox="1"/>
-          <p:nvPr/>
-        </p:nvSpPr>
-        <p:spPr>
-          <a:xfrm>
-            <a:off x="457200" y="1783080"/>
-            <a:ext cx="11277295" cy="1097280"/>
-          </a:xfrm>
-          <a:prstGeom prst="rect">
-            <a:avLst/>
-          </a:prstGeom>
-          <a:noFill/>
-          <a:ln/>
-        </p:spPr>
-        <p:txBody>
-          <a:bodyPr wrap="square" lIns="0" tIns="0" rIns="0" bIns="0" rtlCol="0" anchor="ctr"/>
-          <a:lstStyle/>
-          <a:p>
-            <a:pPr algn="ctr" indent="0" marL="0">
-              <a:buNone/>
-            </a:pPr>
-            <a:r>
-              <a:rPr lang="en-US" sz="6000" b="1" dirty="0">
-                <a:solidFill>
-                  <a:srgbClr val="F5F5F7"/>
-                </a:solidFill>
-                <a:latin typeface="Arial" pitchFamily="34" charset="0"/>
-                <a:ea typeface="Arial" pitchFamily="34" charset="-122"/>
-                <a:cs typeface="Arial" pitchFamily="34" charset="-120"/>
-              </a:rPr>
-              <a:t>Now she has someone to ask.</a:t>
-            </a:r>
-            <a:endParaRPr lang="en-US" sz="6000" dirty="0"/>
-          </a:p>
-        </p:txBody>
-      </p:sp>
-      <p:sp>
-        <p:nvSpPr>
-          <p:cNvPr id="4" name="divider"/>
-          <p:cNvSpPr/>
-          <p:nvPr/>
-        </p:nvSpPr>
-        <p:spPr>
-          <a:xfrm>
-            <a:off x="5547208" y="3429000"/>
-            <a:ext cx="1097280" cy="0"/>
-          </a:xfrm>
-          <a:prstGeom prst="line">
-            <a:avLst/>
-          </a:prstGeom>
-          <a:noFill/>
-          <a:ln w="9525">
-            <a:solidFill>
-              <a:srgbClr val="3A3A3E"/>
-            </a:solidFill>
-            <a:prstDash val="solid"/>
-          </a:ln>
-        </p:spPr>
-      </p:sp>
-      <p:sp>
-        <p:nvSpPr>
-          <p:cNvPr id="5" name="name"/>
-          <p:cNvSpPr txBox="1"/>
-          <p:nvPr/>
-        </p:nvSpPr>
-        <p:spPr>
-          <a:xfrm>
-            <a:off x="457200" y="3749040"/>
-            <a:ext cx="11277295" cy="731520"/>
-          </a:xfrm>
-          <a:prstGeom prst="rect">
-            <a:avLst/>
-          </a:prstGeom>
-          <a:noFill/>
-          <a:ln/>
-        </p:spPr>
-        <p:txBody>
-          <a:bodyPr wrap="square" lIns="0" tIns="0" rIns="0" bIns="0" rtlCol="0" anchor="ctr"/>
-          <a:lstStyle/>
-          <a:p>
-            <a:pPr algn="ctr" indent="0" marL="0">
-              <a:buNone/>
-            </a:pPr>
-            <a:r>
-              <a:rPr lang="en-US" sz="4400" b="1" dirty="0">
-                <a:solidFill>
-                  <a:srgbClr val="F5F5F7"/>
-                </a:solidFill>
-                <a:latin typeface="Arial" pitchFamily="34" charset="0"/>
-                <a:ea typeface="Arial" pitchFamily="34" charset="-122"/>
-                <a:cs typeface="Arial" pitchFamily="34" charset="-120"/>
-              </a:rPr>
-              <a:t>Sahayak</a:t>
-            </a:r>
-            <a:pPr algn="ctr" indent="0" marL="0">
-              <a:buNone/>
-            </a:pPr>
-            <a:r>
-              <a:rPr lang="en-US" sz="3000" b="1" dirty="0">
-                <a:solidFill>
-                  <a:srgbClr val="6FA8FF"/>
-                </a:solidFill>
-                <a:latin typeface="Nirmala UI" pitchFamily="34" charset="0"/>
-                <a:ea typeface="Nirmala UI" pitchFamily="34" charset="-122"/>
-                <a:cs typeface="Nirmala UI" pitchFamily="34" charset="-120"/>
-              </a:rPr>
-              <a:t>  सहायक</a:t>
-            </a:r>
-            <a:endParaRPr lang="en-US" sz="4400" dirty="0"/>
-          </a:p>
-        </p:txBody>
-      </p:sp>
-      <p:sp>
-        <p:nvSpPr>
-          <p:cNvPr id="6" name="promise"/>
-          <p:cNvSpPr txBox="1"/>
-          <p:nvPr/>
-        </p:nvSpPr>
-        <p:spPr>
-          <a:xfrm>
-            <a:off x="457200" y="4572000"/>
-            <a:ext cx="11277295" cy="457200"/>
-          </a:xfrm>
-          <a:prstGeom prst="rect">
-            <a:avLst/>
-          </a:prstGeom>
-          <a:noFill/>
-          <a:ln/>
-        </p:spPr>
-        <p:txBody>
-          <a:bodyPr wrap="square" lIns="0" tIns="0" rIns="0" bIns="0" rtlCol="0" anchor="t"/>
-          <a:lstStyle/>
-          <a:p>
-            <a:pPr algn="ctr" indent="0" marL="0">
-              <a:buNone/>
-            </a:pPr>
-            <a:r>
-              <a:rPr lang="en-US" sz="2200" dirty="0">
-                <a:solidFill>
-                  <a:srgbClr val="F5F5F7"/>
-                </a:solidFill>
-                <a:latin typeface="Arial" pitchFamily="34" charset="0"/>
-                <a:ea typeface="Arial" pitchFamily="34" charset="-122"/>
-                <a:cs typeface="Arial" pitchFamily="34" charset="-120"/>
-              </a:rPr>
-              <a:t>Spot the scam before the money moves.  </a:t>
-            </a:r>
-            <a:pPr algn="ctr" indent="0" marL="0">
-              <a:buNone/>
-            </a:pPr>
-            <a:r>
-              <a:rPr lang="en-US" sz="2200" dirty="0">
-                <a:solidFill>
-                  <a:srgbClr val="6FA8FF"/>
-                </a:solidFill>
-                <a:latin typeface="Arial" pitchFamily="34" charset="0"/>
-                <a:ea typeface="Arial" pitchFamily="34" charset="-122"/>
-                <a:cs typeface="Arial" pitchFamily="34" charset="-120"/>
-              </a:rPr>
-              <a:t>Claim what you’re owed.</a:t>
-            </a:r>
-            <a:endParaRPr lang="en-US" sz="2200" dirty="0"/>
-          </a:p>
-        </p:txBody>
-      </p:sp>
-      <p:sp>
-        <p:nvSpPr>
-          <p:cNvPr id="7" name="team"/>
-          <p:cNvSpPr txBox="1"/>
-          <p:nvPr/>
-        </p:nvSpPr>
-        <p:spPr>
-          <a:xfrm>
-            <a:off x="457200" y="5715000"/>
-            <a:ext cx="11277295" cy="365760"/>
-          </a:xfrm>
-          <a:prstGeom prst="rect">
-            <a:avLst/>
-          </a:prstGeom>
-          <a:noFill/>
-          <a:ln/>
-        </p:spPr>
-        <p:txBody>
-          <a:bodyPr wrap="square" lIns="0" tIns="0" rIns="0" bIns="0" rtlCol="0" anchor="t"/>
-          <a:lstStyle/>
-          <a:p>
-            <a:pPr algn="ctr" indent="0" marL="0">
-              <a:buNone/>
-            </a:pPr>
-            <a:r>
-              <a:rPr lang="en-US" sz="1700" dirty="0">
-                <a:solidFill>
-                  <a:srgbClr val="A1A1A6"/>
-                </a:solidFill>
-                <a:latin typeface="Arial" pitchFamily="34" charset="0"/>
-                <a:ea typeface="Arial" pitchFamily="34" charset="-122"/>
-                <a:cs typeface="Arial" pitchFamily="34" charset="-120"/>
-              </a:rPr>
-              <a:t>Ishmiit Singh  ·  Roshan Raj</a:t>
-            </a:r>
-            <a:endParaRPr lang="en-US" sz="1700" dirty="0"/>
-          </a:p>
-        </p:txBody>
-      </p:sp>
-      <p:sp>
-        <p:nvSpPr>
-          <p:cNvPr id="8" name="repo"/>
-          <p:cNvSpPr txBox="1"/>
-          <p:nvPr/>
-        </p:nvSpPr>
-        <p:spPr>
-          <a:xfrm>
-            <a:off x="457200" y="6172200"/>
-            <a:ext cx="11277295" cy="274320"/>
-          </a:xfrm>
-          <a:prstGeom prst="rect">
-            <a:avLst/>
-          </a:prstGeom>
-          <a:noFill/>
-          <a:ln/>
-        </p:spPr>
-        <p:txBody>
-          <a:bodyPr wrap="square" lIns="0" tIns="0" rIns="0" bIns="0" rtlCol="0" anchor="t"/>
-          <a:lstStyle/>
-          <a:p>
-            <a:pPr algn="ctr" indent="0" marL="0">
-              <a:buNone/>
-            </a:pPr>
-            <a:r>
-              <a:rPr lang="en-US" sz="1200" dirty="0">
-                <a:solidFill>
-                  <a:srgbClr val="6E6E73"/>
-                </a:solidFill>
-                <a:latin typeface="Arial" pitchFamily="34" charset="0"/>
-                <a:ea typeface="Arial" pitchFamily="34" charset="-122"/>
-                <a:cs typeface="Arial" pitchFamily="34" charset="-120"/>
-              </a:rPr>
-              <a:t>Open source: github.com/ishmiit/Sahayak</a:t>
-            </a:r>
-            <a:endParaRPr lang="en-US" sz="1200" dirty="0"/>
+              <a:t>Nothing to install. No account. Then, your questions.</a:t>
+            </a:r>
+            <a:endParaRPr lang="en-US" sz="1600" dirty="0"/>
           </a:p>
         </p:txBody>
       </p:sp>
@@ -7383,176 +7586,79 @@
       </p:grpSpPr>
       <p:sp>
         <p:nvSpPr>
-          <p:cNvPr id="2" name="QR card"/>
+          <p:cNvPr id="2" name="title"/>
+          <p:cNvSpPr txBox="1"/>
+          <p:nvPr/>
+        </p:nvSpPr>
+        <p:spPr>
+          <a:xfrm>
+            <a:off x="822960" y="731520"/>
+            <a:ext cx="9144000" cy="777240"/>
+          </a:xfrm>
+          <a:prstGeom prst="rect">
+            <a:avLst/>
+          </a:prstGeom>
+          <a:noFill/>
+          <a:ln/>
+        </p:spPr>
+        <p:txBody>
+          <a:bodyPr wrap="square" lIns="0" tIns="0" rIns="0" bIns="0" rtlCol="0" anchor="t"/>
+          <a:lstStyle/>
+          <a:p>
+            <a:pPr indent="0" marL="0">
+              <a:buNone/>
+            </a:pPr>
+            <a:r>
+              <a:rPr lang="en-US" sz="4400" b="1" dirty="0">
+                <a:solidFill>
+                  <a:srgbClr val="F5F5F7"/>
+                </a:solidFill>
+                <a:latin typeface="Arial" pitchFamily="34" charset="0"/>
+                <a:ea typeface="Arial" pitchFamily="34" charset="-122"/>
+                <a:cs typeface="Arial" pitchFamily="34" charset="-120"/>
+              </a:rPr>
+              <a:t>How it works</a:t>
+            </a:r>
+            <a:endParaRPr lang="en-US" sz="4400" dirty="0"/>
+          </a:p>
+        </p:txBody>
+      </p:sp>
+      <p:sp>
+        <p:nvSpPr>
+          <p:cNvPr id="3" name="card 1"/>
           <p:cNvSpPr/>
           <p:nvPr/>
         </p:nvSpPr>
         <p:spPr>
           <a:xfrm>
-            <a:off x="914400" y="1143000"/>
-            <a:ext cx="4343400" cy="4343400"/>
+            <a:off x="822960" y="1965960"/>
+            <a:ext cx="3337560" cy="2834640"/>
           </a:xfrm>
           <a:prstGeom prst="roundRect">
             <a:avLst>
-              <a:gd name="adj" fmla="val 5263"/>
+              <a:gd name="adj" fmla="val 5806"/>
             </a:avLst>
           </a:prstGeom>
           <a:solidFill>
-            <a:srgbClr val="FFFFFF"/>
+            <a:srgbClr val="161618"/>
           </a:solidFill>
-          <a:ln/>
-        </p:spPr>
-      </p:sp>
-      <p:pic>
-        <p:nvPicPr>
-          <p:cNvPr id="3" name="QR code" descr="QR code for https://ishmiit.github.io/Sahayak/">    </p:cNvPr>
-          <p:cNvPicPr>
-            <a:picLocks noChangeAspect="1"/>
-          </p:cNvPicPr>
-          <p:nvPr/>
-        </p:nvPicPr>
-        <p:blipFill>
-          <a:blip r:embed="rId1"/>
-          <a:stretch>
-            <a:fillRect/>
-          </a:stretch>
-        </p:blipFill>
-        <p:spPr>
-          <a:xfrm>
-            <a:off x="1097280" y="1325880"/>
-            <a:ext cx="3977640" cy="3977640"/>
-          </a:xfrm>
-          <a:prstGeom prst="rect">
-            <a:avLst/>
-          </a:prstGeom>
-        </p:spPr>
-      </p:pic>
-      <p:sp>
-        <p:nvSpPr>
-          <p:cNvPr id="4" name="address"/>
-          <p:cNvSpPr txBox="1"/>
-          <p:nvPr/>
-        </p:nvSpPr>
-        <p:spPr>
-          <a:xfrm>
-            <a:off x="640080" y="5715000"/>
-            <a:ext cx="4892040" cy="365760"/>
-          </a:xfrm>
-          <a:prstGeom prst="rect">
-            <a:avLst/>
-          </a:prstGeom>
-          <a:noFill/>
-          <a:ln/>
-        </p:spPr>
-        <p:txBody>
-          <a:bodyPr wrap="square" lIns="0" tIns="0" rIns="0" bIns="0" rtlCol="0" anchor="t"/>
-          <a:lstStyle/>
-          <a:p>
-            <a:pPr algn="ctr" indent="0" marL="0">
-              <a:buNone/>
-            </a:pPr>
-            <a:r>
-              <a:rPr lang="en-US" sz="1700" b="1" dirty="0">
-                <a:solidFill>
-                  <a:srgbClr val="6FA8FF"/>
-                </a:solidFill>
-                <a:latin typeface="Arial" pitchFamily="34" charset="0"/>
-                <a:ea typeface="Arial" pitchFamily="34" charset="-122"/>
-                <a:cs typeface="Arial" pitchFamily="34" charset="-120"/>
-              </a:rPr>
-              <a:t>ishmiit.github.io/Sahayak</a:t>
-            </a:r>
-            <a:endParaRPr lang="en-US" sz="1700" dirty="0"/>
-          </a:p>
-        </p:txBody>
-      </p:sp>
-      <p:sp>
-        <p:nvSpPr>
-          <p:cNvPr id="5" name="title"/>
-          <p:cNvSpPr txBox="1"/>
-          <p:nvPr/>
-        </p:nvSpPr>
-        <p:spPr>
-          <a:xfrm>
-            <a:off x="6035040" y="1097280"/>
-            <a:ext cx="5486400" cy="822960"/>
-          </a:xfrm>
-          <a:prstGeom prst="rect">
-            <a:avLst/>
-          </a:prstGeom>
-          <a:noFill/>
-          <a:ln/>
-        </p:spPr>
-        <p:txBody>
-          <a:bodyPr wrap="square" lIns="0" tIns="0" rIns="0" bIns="0" rtlCol="0" anchor="t"/>
-          <a:lstStyle/>
-          <a:p>
-            <a:pPr indent="0" marL="0">
-              <a:buNone/>
-            </a:pPr>
-            <a:r>
-              <a:rPr lang="en-US" sz="5600" b="1" dirty="0">
-                <a:solidFill>
-                  <a:srgbClr val="F5F5F7"/>
-                </a:solidFill>
-                <a:latin typeface="Arial" pitchFamily="34" charset="0"/>
-                <a:ea typeface="Arial" pitchFamily="34" charset="-122"/>
-                <a:cs typeface="Arial" pitchFamily="34" charset="-120"/>
-              </a:rPr>
-              <a:t>Try it.</a:t>
-            </a:r>
-            <a:endParaRPr lang="en-US" sz="5600" dirty="0"/>
-          </a:p>
-        </p:txBody>
-      </p:sp>
-      <p:sp>
-        <p:nvSpPr>
-          <p:cNvPr id="6" name="subtitle"/>
-          <p:cNvSpPr txBox="1"/>
-          <p:nvPr/>
-        </p:nvSpPr>
-        <p:spPr>
-          <a:xfrm>
-            <a:off x="6035040" y="1965960"/>
-            <a:ext cx="5486400" cy="457200"/>
-          </a:xfrm>
-          <a:prstGeom prst="rect">
-            <a:avLst/>
-          </a:prstGeom>
-          <a:noFill/>
-          <a:ln/>
-        </p:spPr>
-        <p:txBody>
-          <a:bodyPr wrap="square" lIns="0" tIns="0" rIns="0" bIns="0" rtlCol="0" anchor="t"/>
-          <a:lstStyle/>
-          <a:p>
-            <a:pPr indent="0" marL="0">
-              <a:buNone/>
-            </a:pPr>
-            <a:r>
-              <a:rPr lang="en-US" sz="2400" dirty="0">
-                <a:solidFill>
-                  <a:srgbClr val="A1A1A6"/>
-                </a:solidFill>
-                <a:latin typeface="Arial" pitchFamily="34" charset="0"/>
-                <a:ea typeface="Arial" pitchFamily="34" charset="-122"/>
-                <a:cs typeface="Arial" pitchFamily="34" charset="-120"/>
-              </a:rPr>
-              <a:t>Right now, on your phone.</a:t>
-            </a:r>
-            <a:endParaRPr lang="en-US" sz="2400" dirty="0"/>
-          </a:p>
-        </p:txBody>
-      </p:sp>
-      <p:sp>
-        <p:nvSpPr>
-          <p:cNvPr id="7" name="number 1"/>
+          <a:ln w="12700">
+            <a:solidFill>
+              <a:srgbClr val="2C2C30"/>
+            </a:solidFill>
+            <a:prstDash val="solid"/>
+          </a:ln>
+        </p:spPr>
+      </p:sp>
+      <p:sp>
+        <p:nvSpPr>
+          <p:cNvPr id="4" name="number 1"/>
           <p:cNvSpPr/>
           <p:nvPr/>
         </p:nvSpPr>
         <p:spPr>
           <a:xfrm>
-            <a:off x="6035040" y="2862072"/>
+            <a:off x="1143000" y="2286000"/>
             <a:ext cx="457200" cy="457200"/>
           </a:xfrm>
           <a:prstGeom prst="ellipse">
@@ -7566,13 +7672,13 @@
       </p:sp>
       <p:sp>
         <p:nvSpPr>
-          <p:cNvPr id="8" name="number 1 label"/>
-          <p:cNvSpPr txBox="1"/>
-          <p:nvPr/>
-        </p:nvSpPr>
-        <p:spPr>
-          <a:xfrm>
-            <a:off x="6035040" y="2862072"/>
+          <p:cNvPr id="5" name="number 1 label"/>
+          <p:cNvSpPr txBox="1"/>
+          <p:nvPr/>
+        </p:nvSpPr>
+        <p:spPr>
+          <a:xfrm>
+            <a:off x="1143000" y="2286000"/>
             <a:ext cx="457200" cy="457200"/>
           </a:xfrm>
           <a:prstGeom prst="rect">
@@ -7605,30 +7711,30 @@
       </p:sp>
       <p:sp>
         <p:nvSpPr>
-          <p:cNvPr id="9" name="step 1"/>
-          <p:cNvSpPr txBox="1"/>
-          <p:nvPr/>
-        </p:nvSpPr>
-        <p:spPr>
-          <a:xfrm>
-            <a:off x="6720840" y="2834640"/>
-            <a:ext cx="4937760" cy="411480"/>
-          </a:xfrm>
-          <a:prstGeom prst="rect">
-            <a:avLst/>
-          </a:prstGeom>
-          <a:noFill/>
-          <a:ln/>
-        </p:spPr>
-        <p:txBody>
-          <a:bodyPr wrap="square" lIns="0" tIns="0" rIns="0" bIns="0" rtlCol="0" anchor="t"/>
-          <a:lstStyle/>
-          <a:p>
-            <a:pPr indent="0" marL="0">
-              <a:buNone/>
-            </a:pPr>
-            <a:r>
-              <a:rPr lang="en-US" sz="2100" b="1" dirty="0">
+          <p:cNvPr id="6" name="card 1 title"/>
+          <p:cNvSpPr txBox="1"/>
+          <p:nvPr/>
+        </p:nvSpPr>
+        <p:spPr>
+          <a:xfrm>
+            <a:off x="1143000" y="2926080"/>
+            <a:ext cx="2834640" cy="548640"/>
+          </a:xfrm>
+          <a:prstGeom prst="rect">
+            <a:avLst/>
+          </a:prstGeom>
+          <a:noFill/>
+          <a:ln/>
+        </p:spPr>
+        <p:txBody>
+          <a:bodyPr wrap="square" lIns="0" tIns="0" rIns="0" bIns="0" rtlCol="0" anchor="t"/>
+          <a:lstStyle/>
+          <a:p>
+            <a:pPr indent="0" marL="0">
+              <a:buNone/>
+            </a:pPr>
+            <a:r>
+              <a:rPr lang="en-US" sz="2800" b="1" dirty="0">
                 <a:solidFill>
                   <a:srgbClr val="F5F5F7"/>
                 </a:solidFill>
@@ -7636,38 +7742,41 @@
                 <a:ea typeface="Arial" pitchFamily="34" charset="-122"/>
                 <a:cs typeface="Arial" pitchFamily="34" charset="-120"/>
               </a:rPr>
-              <a:t>Scan the code.</a:t>
-            </a:r>
-            <a:endParaRPr lang="en-US" sz="2100" dirty="0"/>
-          </a:p>
-        </p:txBody>
-      </p:sp>
-      <p:sp>
-        <p:nvSpPr>
-          <p:cNvPr id="10" name="step 1 detail"/>
-          <p:cNvSpPr txBox="1"/>
-          <p:nvPr/>
-        </p:nvSpPr>
-        <p:spPr>
-          <a:xfrm>
-            <a:off x="6720840" y="3264408"/>
-            <a:ext cx="4937760" cy="384048"/>
-          </a:xfrm>
-          <a:prstGeom prst="rect">
-            <a:avLst/>
-          </a:prstGeom>
-          <a:noFill/>
-          <a:ln/>
-        </p:spPr>
-        <p:txBody>
-          <a:bodyPr wrap="square" lIns="0" tIns="0" rIns="0" bIns="0" rtlCol="0" anchor="t"/>
-          <a:lstStyle/>
-          <a:p>
-            <a:pPr indent="0" marL="0">
-              <a:buNone/>
-            </a:pPr>
-            <a:r>
-              <a:rPr lang="en-US" sz="1800" dirty="0">
+              <a:t>You ask.</a:t>
+            </a:r>
+            <a:endParaRPr lang="en-US" sz="2800" dirty="0"/>
+          </a:p>
+        </p:txBody>
+      </p:sp>
+      <p:sp>
+        <p:nvSpPr>
+          <p:cNvPr id="7" name="card 1 points"/>
+          <p:cNvSpPr txBox="1"/>
+          <p:nvPr/>
+        </p:nvSpPr>
+        <p:spPr>
+          <a:xfrm>
+            <a:off x="1143000" y="3611880"/>
+            <a:ext cx="2834640" cy="1097280"/>
+          </a:xfrm>
+          <a:prstGeom prst="rect">
+            <a:avLst/>
+          </a:prstGeom>
+          <a:noFill/>
+          <a:ln/>
+        </p:spPr>
+        <p:txBody>
+          <a:bodyPr wrap="square" lIns="0" tIns="0" rIns="0" bIns="0" rtlCol="0" anchor="t"/>
+          <a:lstStyle/>
+          <a:p>
+            <a:pPr indent="0" marL="0">
+              <a:spcAft>
+                <a:spcPts val="500"/>
+              </a:spcAft>
+              <a:buNone/>
+            </a:pPr>
+            <a:r>
+              <a:rPr lang="en-US" sz="2200" dirty="0">
                 <a:solidFill>
                   <a:srgbClr val="A1A1A6"/>
                 </a:solidFill>
@@ -7675,7 +7784,113 @@
                 <a:ea typeface="Arial" pitchFamily="34" charset="-122"/>
                 <a:cs typeface="Arial" pitchFamily="34" charset="-120"/>
               </a:rPr>
-              <a:t>Nothing to install. No account.</a:t>
+              <a:t>Type · Speak</a:t>
+            </a:r>
+            <a:endParaRPr lang="en-US" sz="2200" dirty="0"/>
+          </a:p>
+          <a:p>
+            <a:pPr indent="0" marL="0">
+              <a:spcAft>
+                <a:spcPts val="500"/>
+              </a:spcAft>
+              <a:buNone/>
+            </a:pPr>
+            <a:r>
+              <a:rPr lang="en-US" sz="2200" dirty="0">
+                <a:solidFill>
+                  <a:srgbClr val="A1A1A6"/>
+                </a:solidFill>
+                <a:latin typeface="Arial" pitchFamily="34" charset="0"/>
+                <a:ea typeface="Arial" pitchFamily="34" charset="-122"/>
+                <a:cs typeface="Arial" pitchFamily="34" charset="-120"/>
+              </a:rPr>
+              <a:t>A call · A UPI QR</a:t>
+            </a:r>
+            <a:endParaRPr lang="en-US" sz="2200" dirty="0"/>
+          </a:p>
+        </p:txBody>
+      </p:sp>
+      <p:sp>
+        <p:nvSpPr>
+          <p:cNvPr id="8" name="card 2"/>
+          <p:cNvSpPr/>
+          <p:nvPr/>
+        </p:nvSpPr>
+        <p:spPr>
+          <a:xfrm>
+            <a:off x="4434840" y="1965960"/>
+            <a:ext cx="3337560" cy="2834640"/>
+          </a:xfrm>
+          <a:prstGeom prst="roundRect">
+            <a:avLst>
+              <a:gd name="adj" fmla="val 5806"/>
+            </a:avLst>
+          </a:prstGeom>
+          <a:solidFill>
+            <a:srgbClr val="161618"/>
+          </a:solidFill>
+          <a:ln w="12700">
+            <a:solidFill>
+              <a:srgbClr val="2C2C30"/>
+            </a:solidFill>
+            <a:prstDash val="solid"/>
+          </a:ln>
+        </p:spPr>
+      </p:sp>
+      <p:sp>
+        <p:nvSpPr>
+          <p:cNvPr id="9" name="number 2"/>
+          <p:cNvSpPr/>
+          <p:nvPr/>
+        </p:nvSpPr>
+        <p:spPr>
+          <a:xfrm>
+            <a:off x="4754880" y="2286000"/>
+            <a:ext cx="457200" cy="457200"/>
+          </a:xfrm>
+          <a:prstGeom prst="ellipse">
+            <a:avLst/>
+          </a:prstGeom>
+          <a:solidFill>
+            <a:srgbClr val="4FD68A"/>
+          </a:solidFill>
+          <a:ln/>
+        </p:spPr>
+      </p:sp>
+      <p:sp>
+        <p:nvSpPr>
+          <p:cNvPr id="10" name="number 2 label"/>
+          <p:cNvSpPr txBox="1"/>
+          <p:nvPr/>
+        </p:nvSpPr>
+        <p:spPr>
+          <a:xfrm>
+            <a:off x="4754880" y="2286000"/>
+            <a:ext cx="457200" cy="457200"/>
+          </a:xfrm>
+          <a:prstGeom prst="rect">
+            <a:avLst/>
+          </a:prstGeom>
+          <a:noFill/>
+          <a:ln/>
+        </p:spPr>
+        <p:txBody>
+          <a:bodyPr wrap="square" lIns="0" tIns="0" rIns="0" bIns="0" rtlCol="0" anchor="ctr"/>
+          <a:lstStyle/>
+          <a:p>
+            <a:pPr algn="ctr" indent="0" marL="0">
+              <a:buNone/>
+            </a:pPr>
+            <a:r>
+              <a:rPr lang="en-US" sz="1800" b="1" dirty="0">
+                <a:solidFill>
+                  <a:srgbClr val="000000"/>
+                </a:solidFill>
+                <a:latin typeface="Arial" pitchFamily="34" charset="0"/>
+                <a:ea typeface="Arial" pitchFamily="34" charset="-122"/>
+                <a:cs typeface="Arial" pitchFamily="34" charset="-120"/>
+              </a:rPr>
+              <a:t>2</a:t>
             </a:r>
             <a:endParaRPr lang="en-US" sz="1800" dirty="0"/>
           </a:p>
@@ -7683,33 +7898,161 @@
       </p:sp>
       <p:sp>
         <p:nvSpPr>
-          <p:cNvPr id="11" name="number 2"/>
+          <p:cNvPr id="11" name="card 2 title"/>
+          <p:cNvSpPr txBox="1"/>
+          <p:nvPr/>
+        </p:nvSpPr>
+        <p:spPr>
+          <a:xfrm>
+            <a:off x="4754880" y="2926080"/>
+            <a:ext cx="2834640" cy="548640"/>
+          </a:xfrm>
+          <a:prstGeom prst="rect">
+            <a:avLst/>
+          </a:prstGeom>
+          <a:noFill/>
+          <a:ln/>
+        </p:spPr>
+        <p:txBody>
+          <a:bodyPr wrap="square" lIns="0" tIns="0" rIns="0" bIns="0" rtlCol="0" anchor="t"/>
+          <a:lstStyle/>
+          <a:p>
+            <a:pPr indent="0" marL="0">
+              <a:buNone/>
+            </a:pPr>
+            <a:r>
+              <a:rPr lang="en-US" sz="2800" b="1" dirty="0">
+                <a:solidFill>
+                  <a:srgbClr val="F5F5F7"/>
+                </a:solidFill>
+                <a:latin typeface="Arial" pitchFamily="34" charset="0"/>
+                <a:ea typeface="Arial" pitchFamily="34" charset="-122"/>
+                <a:cs typeface="Arial" pitchFamily="34" charset="-120"/>
+              </a:rPr>
+              <a:t>Rules decide.</a:t>
+            </a:r>
+            <a:endParaRPr lang="en-US" sz="2800" dirty="0"/>
+          </a:p>
+        </p:txBody>
+      </p:sp>
+      <p:sp>
+        <p:nvSpPr>
+          <p:cNvPr id="12" name="card 2 points"/>
+          <p:cNvSpPr txBox="1"/>
+          <p:nvPr/>
+        </p:nvSpPr>
+        <p:spPr>
+          <a:xfrm>
+            <a:off x="4754880" y="3611880"/>
+            <a:ext cx="2834640" cy="1097280"/>
+          </a:xfrm>
+          <a:prstGeom prst="rect">
+            <a:avLst/>
+          </a:prstGeom>
+          <a:noFill/>
+          <a:ln/>
+        </p:spPr>
+        <p:txBody>
+          <a:bodyPr wrap="square" lIns="0" tIns="0" rIns="0" bIns="0" rtlCol="0" anchor="t"/>
+          <a:lstStyle/>
+          <a:p>
+            <a:pPr indent="0" marL="0">
+              <a:spcAft>
+                <a:spcPts val="500"/>
+              </a:spcAft>
+              <a:buNone/>
+            </a:pPr>
+            <a:r>
+              <a:rPr lang="en-US" sz="2200" dirty="0">
+                <a:solidFill>
+                  <a:srgbClr val="A1A1A6"/>
+                </a:solidFill>
+                <a:latin typeface="Arial" pitchFamily="34" charset="0"/>
+                <a:ea typeface="Arial" pitchFamily="34" charset="-122"/>
+                <a:cs typeface="Arial" pitchFamily="34" charset="-120"/>
+              </a:rPr>
+              <a:t>64 signals</a:t>
+            </a:r>
+            <a:endParaRPr lang="en-US" sz="2200" dirty="0"/>
+          </a:p>
+          <a:p>
+            <a:pPr indent="0" marL="0">
+              <a:spcAft>
+                <a:spcPts val="500"/>
+              </a:spcAft>
+              <a:buNone/>
+            </a:pPr>
+            <a:r>
+              <a:rPr lang="en-US" sz="2200" dirty="0">
+                <a:solidFill>
+                  <a:srgbClr val="A1A1A6"/>
+                </a:solidFill>
+                <a:latin typeface="Arial" pitchFamily="34" charset="0"/>
+                <a:ea typeface="Arial" pitchFamily="34" charset="-122"/>
+                <a:cs typeface="Arial" pitchFamily="34" charset="-120"/>
+              </a:rPr>
+              <a:t>On the device</a:t>
+            </a:r>
+            <a:endParaRPr lang="en-US" sz="2200" dirty="0"/>
+          </a:p>
+        </p:txBody>
+      </p:sp>
+      <p:sp>
+        <p:nvSpPr>
+          <p:cNvPr id="13" name="card 3"/>
           <p:cNvSpPr/>
           <p:nvPr/>
         </p:nvSpPr>
         <p:spPr>
           <a:xfrm>
-            <a:off x="6035040" y="3849624"/>
+            <a:off x="8046720" y="1965960"/>
+            <a:ext cx="3337560" cy="2834640"/>
+          </a:xfrm>
+          <a:prstGeom prst="roundRect">
+            <a:avLst>
+              <a:gd name="adj" fmla="val 5806"/>
+            </a:avLst>
+          </a:prstGeom>
+          <a:solidFill>
+            <a:srgbClr val="161618"/>
+          </a:solidFill>
+          <a:ln w="12700">
+            <a:solidFill>
+              <a:srgbClr val="2C2C30"/>
+            </a:solidFill>
+            <a:prstDash val="solid"/>
+          </a:ln>
+        </p:spPr>
+      </p:sp>
+      <p:sp>
+        <p:nvSpPr>
+          <p:cNvPr id="14" name="number 3"/>
+          <p:cNvSpPr/>
+          <p:nvPr/>
+        </p:nvSpPr>
+        <p:spPr>
+          <a:xfrm>
+            <a:off x="8366760" y="2286000"/>
             <a:ext cx="457200" cy="457200"/>
           </a:xfrm>
           <a:prstGeom prst="ellipse">
             <a:avLst/>
           </a:prstGeom>
           <a:solidFill>
-            <a:srgbClr val="6FA8FF"/>
+            <a:srgbClr val="E2C28A"/>
           </a:solidFill>
           <a:ln/>
         </p:spPr>
       </p:sp>
       <p:sp>
         <p:nvSpPr>
-          <p:cNvPr id="12" name="number 2 label"/>
-          <p:cNvSpPr txBox="1"/>
-          <p:nvPr/>
-        </p:nvSpPr>
-        <p:spPr>
-          <a:xfrm>
-            <a:off x="6035040" y="3849624"/>
+          <p:cNvPr id="15" name="number 3 label"/>
+          <p:cNvSpPr txBox="1"/>
+          <p:nvPr/>
+        </p:nvSpPr>
+        <p:spPr>
+          <a:xfrm>
+            <a:off x="8366760" y="2286000"/>
             <a:ext cx="457200" cy="457200"/>
           </a:xfrm>
           <a:prstGeom prst="rect">
@@ -7734,7 +8077,7 @@
                 <a:ea typeface="Arial" pitchFamily="34" charset="-122"/>
                 <a:cs typeface="Arial" pitchFamily="34" charset="-120"/>
               </a:rPr>
-              <a:t>2</a:t>
+              <a:t>3</a:t>
             </a:r>
             <a:endParaRPr lang="en-US" sz="1800" dirty="0"/>
           </a:p>
@@ -7742,30 +8085,30 @@
       </p:sp>
       <p:sp>
         <p:nvSpPr>
-          <p:cNvPr id="13" name="step 2"/>
-          <p:cNvSpPr txBox="1"/>
-          <p:nvPr/>
-        </p:nvSpPr>
-        <p:spPr>
-          <a:xfrm>
-            <a:off x="6720840" y="3822192"/>
-            <a:ext cx="4937760" cy="411480"/>
-          </a:xfrm>
-          <a:prstGeom prst="rect">
-            <a:avLst/>
-          </a:prstGeom>
-          <a:noFill/>
-          <a:ln/>
-        </p:spPr>
-        <p:txBody>
-          <a:bodyPr wrap="square" lIns="0" tIns="0" rIns="0" bIns="0" rtlCol="0" anchor="t"/>
-          <a:lstStyle/>
-          <a:p>
-            <a:pPr indent="0" marL="0">
-              <a:buNone/>
-            </a:pPr>
-            <a:r>
-              <a:rPr lang="en-US" sz="2100" b="1" dirty="0">
+          <p:cNvPr id="16" name="card 3 title"/>
+          <p:cNvSpPr txBox="1"/>
+          <p:nvPr/>
+        </p:nvSpPr>
+        <p:spPr>
+          <a:xfrm>
+            <a:off x="8366760" y="2926080"/>
+            <a:ext cx="2834640" cy="548640"/>
+          </a:xfrm>
+          <a:prstGeom prst="rect">
+            <a:avLst/>
+          </a:prstGeom>
+          <a:noFill/>
+          <a:ln/>
+        </p:spPr>
+        <p:txBody>
+          <a:bodyPr wrap="square" lIns="0" tIns="0" rIns="0" bIns="0" rtlCol="0" anchor="t"/>
+          <a:lstStyle/>
+          <a:p>
+            <a:pPr indent="0" marL="0">
+              <a:buNone/>
+            </a:pPr>
+            <a:r>
+              <a:rPr lang="en-US" sz="2800" b="1" dirty="0">
                 <a:solidFill>
                   <a:srgbClr val="F5F5F7"/>
                 </a:solidFill>
@@ -7773,38 +8116,41 @@
                 <a:ea typeface="Arial" pitchFamily="34" charset="-122"/>
                 <a:cs typeface="Arial" pitchFamily="34" charset="-120"/>
               </a:rPr>
-              <a:t>Tap “Check a message”</a:t>
-            </a:r>
-            <a:endParaRPr lang="en-US" sz="2100" dirty="0"/>
-          </a:p>
-        </p:txBody>
-      </p:sp>
-      <p:sp>
-        <p:nvSpPr>
-          <p:cNvPr id="14" name="step 2 detail"/>
-          <p:cNvSpPr txBox="1"/>
-          <p:nvPr/>
-        </p:nvSpPr>
-        <p:spPr>
-          <a:xfrm>
-            <a:off x="6720840" y="4251960"/>
-            <a:ext cx="4937760" cy="384048"/>
-          </a:xfrm>
-          <a:prstGeom prst="rect">
-            <a:avLst/>
-          </a:prstGeom>
-          <a:noFill/>
-          <a:ln/>
-        </p:spPr>
-        <p:txBody>
-          <a:bodyPr wrap="square" lIns="0" tIns="0" rIns="0" bIns="0" rtlCol="0" anchor="t"/>
-          <a:lstStyle/>
-          <a:p>
-            <a:pPr indent="0" marL="0">
-              <a:buNone/>
-            </a:pPr>
-            <a:r>
-              <a:rPr lang="en-US" sz="1800" dirty="0">
+              <a:t>A clear answer.</a:t>
+            </a:r>
+            <a:endParaRPr lang="en-US" sz="2800" dirty="0"/>
+          </a:p>
+        </p:txBody>
+      </p:sp>
+      <p:sp>
+        <p:nvSpPr>
+          <p:cNvPr id="17" name="card 3 points"/>
+          <p:cNvSpPr txBox="1"/>
+          <p:nvPr/>
+        </p:nvSpPr>
+        <p:spPr>
+          <a:xfrm>
+            <a:off x="8366760" y="3611880"/>
+            <a:ext cx="2834640" cy="1097280"/>
+          </a:xfrm>
+          <a:prstGeom prst="rect">
+            <a:avLst/>
+          </a:prstGeom>
+          <a:noFill/>
+          <a:ln/>
+        </p:spPr>
+        <p:txBody>
+          <a:bodyPr wrap="square" lIns="0" tIns="0" rIns="0" bIns="0" rtlCol="0" anchor="t"/>
+          <a:lstStyle/>
+          <a:p>
+            <a:pPr indent="0" marL="0">
+              <a:spcAft>
+                <a:spcPts val="500"/>
+              </a:spcAft>
+              <a:buNone/>
+            </a:pPr>
+            <a:r>
+              <a:rPr lang="en-US" sz="2200" dirty="0">
                 <a:solidFill>
                   <a:srgbClr val="A1A1A6"/>
                 </a:solidFill>
@@ -7812,97 +8158,72 @@
                 <a:ea typeface="Arial" pitchFamily="34" charset="-122"/>
                 <a:cs typeface="Arial" pitchFamily="34" charset="-120"/>
               </a:rPr>
-              <a:t>then “Pay ₹500 for your Ayushman card”.</a:t>
-            </a:r>
-            <a:endParaRPr lang="en-US" sz="1800" dirty="0"/>
-          </a:p>
-        </p:txBody>
-      </p:sp>
-      <p:sp>
-        <p:nvSpPr>
-          <p:cNvPr id="15" name="number 3"/>
-          <p:cNvSpPr/>
-          <p:nvPr/>
-        </p:nvSpPr>
-        <p:spPr>
-          <a:xfrm>
-            <a:off x="6035040" y="4837176"/>
-            <a:ext cx="457200" cy="457200"/>
-          </a:xfrm>
-          <a:prstGeom prst="ellipse">
-            <a:avLst/>
-          </a:prstGeom>
-          <a:solidFill>
-            <a:srgbClr val="6FA8FF"/>
-          </a:solidFill>
-          <a:ln/>
-        </p:spPr>
-      </p:sp>
-      <p:sp>
-        <p:nvSpPr>
-          <p:cNvPr id="16" name="number 3 label"/>
-          <p:cNvSpPr txBox="1"/>
-          <p:nvPr/>
-        </p:nvSpPr>
-        <p:spPr>
-          <a:xfrm>
-            <a:off x="6035040" y="4837176"/>
-            <a:ext cx="457200" cy="457200"/>
-          </a:xfrm>
-          <a:prstGeom prst="rect">
-            <a:avLst/>
-          </a:prstGeom>
-          <a:noFill/>
-          <a:ln/>
-        </p:spPr>
-        <p:txBody>
-          <a:bodyPr wrap="square" lIns="0" tIns="0" rIns="0" bIns="0" rtlCol="0" anchor="ctr"/>
-          <a:lstStyle/>
-          <a:p>
-            <a:pPr algn="ctr" indent="0" marL="0">
-              <a:buNone/>
-            </a:pPr>
-            <a:r>
-              <a:rPr lang="en-US" sz="1800" b="1" dirty="0">
-                <a:solidFill>
-                  <a:srgbClr val="000000"/>
-                </a:solidFill>
-                <a:latin typeface="Arial" pitchFamily="34" charset="0"/>
-                <a:ea typeface="Arial" pitchFamily="34" charset="-122"/>
-                <a:cs typeface="Arial" pitchFamily="34" charset="-120"/>
-              </a:rPr>
-              <a:t>3</a:t>
-            </a:r>
-            <a:endParaRPr lang="en-US" sz="1800" dirty="0"/>
-          </a:p>
-        </p:txBody>
-      </p:sp>
-      <p:sp>
-        <p:nvSpPr>
-          <p:cNvPr id="17" name="step 3"/>
-          <p:cNvSpPr txBox="1"/>
-          <p:nvPr/>
-        </p:nvSpPr>
-        <p:spPr>
-          <a:xfrm>
-            <a:off x="6720840" y="4809744"/>
-            <a:ext cx="4937760" cy="411480"/>
-          </a:xfrm>
-          <a:prstGeom prst="rect">
-            <a:avLst/>
-          </a:prstGeom>
-          <a:noFill/>
-          <a:ln/>
-        </p:spPr>
-        <p:txBody>
-          <a:bodyPr wrap="square" lIns="0" tIns="0" rIns="0" bIns="0" rtlCol="0" anchor="t"/>
-          <a:lstStyle/>
-          <a:p>
-            <a:pPr indent="0" marL="0">
-              <a:buNone/>
-            </a:pPr>
-            <a:r>
-              <a:rPr lang="en-US" sz="2100" b="1" dirty="0">
+              <a:t>4 answers</a:t>
+            </a:r>
+            <a:endParaRPr lang="en-US" sz="2200" dirty="0"/>
+          </a:p>
+          <a:p>
+            <a:pPr indent="0" marL="0">
+              <a:spcAft>
+                <a:spcPts val="500"/>
+              </a:spcAft>
+              <a:buNone/>
+            </a:pPr>
+            <a:r>
+              <a:rPr lang="en-US" sz="2200" b="1" dirty="0">
+                <a:solidFill>
+                  <a:srgbClr val="E2C28A"/>
+                </a:solidFill>
+                <a:latin typeface="Arial" pitchFamily="34" charset="0"/>
+                <a:ea typeface="Arial" pitchFamily="34" charset="-122"/>
+                <a:cs typeface="Arial" pitchFamily="34" charset="-120"/>
+              </a:rPr>
+              <a:t>Never “safe”.</a:t>
+            </a:r>
+            <a:endParaRPr lang="en-US" sz="2200" dirty="0"/>
+          </a:p>
+        </p:txBody>
+      </p:sp>
+      <p:sp>
+        <p:nvSpPr>
+          <p:cNvPr id="18" name="parity"/>
+          <p:cNvSpPr txBox="1"/>
+          <p:nvPr/>
+        </p:nvSpPr>
+        <p:spPr>
+          <a:xfrm>
+            <a:off x="822960" y="5212080"/>
+            <a:ext cx="10545775" cy="411480"/>
+          </a:xfrm>
+          <a:prstGeom prst="rect">
+            <a:avLst/>
+          </a:prstGeom>
+          <a:noFill/>
+          <a:ln/>
+        </p:spPr>
+        <p:txBody>
+          <a:bodyPr wrap="square" lIns="0" tIns="0" rIns="0" bIns="0" rtlCol="0" anchor="t"/>
+          <a:lstStyle/>
+          <a:p>
+            <a:pPr indent="0" marL="0">
+              <a:buNone/>
+            </a:pPr>
+            <a:r>
+              <a:rPr lang="en-US" sz="2200" dirty="0">
+                <a:solidFill>
+                  <a:srgbClr val="A1A1A6"/>
+                </a:solidFill>
+                <a:latin typeface="Arial" pitchFamily="34" charset="0"/>
+                <a:ea typeface="Arial" pitchFamily="34" charset="-122"/>
+                <a:cs typeface="Arial" pitchFamily="34" charset="-120"/>
+              </a:rPr>
+              <a:t>Phone = counter: </a:t>
+            </a:r>
+            <a:pPr indent="0" marL="0">
+              <a:buNone/>
+            </a:pPr>
+            <a:r>
+              <a:rPr lang="en-US" sz="2200" b="1" dirty="0">
                 <a:solidFill>
                   <a:srgbClr val="F5F5F7"/>
                 </a:solidFill>
@@ -7910,87 +8231,9 @@
                 <a:ea typeface="Arial" pitchFamily="34" charset="-122"/>
                 <a:cs typeface="Arial" pitchFamily="34" charset="-120"/>
               </a:rPr>
-              <a:t>Turn on airplane mode.</a:t>
-            </a:r>
-            <a:endParaRPr lang="en-US" sz="2100" dirty="0"/>
-          </a:p>
-        </p:txBody>
-      </p:sp>
-      <p:sp>
-        <p:nvSpPr>
-          <p:cNvPr id="18" name="step 3 detail"/>
-          <p:cNvSpPr txBox="1"/>
-          <p:nvPr/>
-        </p:nvSpPr>
-        <p:spPr>
-          <a:xfrm>
-            <a:off x="6720840" y="5239512"/>
-            <a:ext cx="4937760" cy="384048"/>
-          </a:xfrm>
-          <a:prstGeom prst="rect">
-            <a:avLst/>
-          </a:prstGeom>
-          <a:noFill/>
-          <a:ln/>
-        </p:spPr>
-        <p:txBody>
-          <a:bodyPr wrap="square" lIns="0" tIns="0" rIns="0" bIns="0" rtlCol="0" anchor="t"/>
-          <a:lstStyle/>
-          <a:p>
-            <a:pPr indent="0" marL="0">
-              <a:buNone/>
-            </a:pPr>
-            <a:r>
-              <a:rPr lang="en-US" sz="1800" dirty="0">
-                <a:solidFill>
-                  <a:srgbClr val="A1A1A6"/>
-                </a:solidFill>
-                <a:latin typeface="Arial" pitchFamily="34" charset="0"/>
-                <a:ea typeface="Arial" pitchFamily="34" charset="-122"/>
-                <a:cs typeface="Arial" pitchFamily="34" charset="-120"/>
-              </a:rPr>
-              <a:t>Try another. It still works.</a:t>
-            </a:r>
-            <a:endParaRPr lang="en-US" sz="1800" dirty="0"/>
-          </a:p>
-        </p:txBody>
-      </p:sp>
-      <p:sp>
-        <p:nvSpPr>
-          <p:cNvPr id="19" name="language"/>
-          <p:cNvSpPr txBox="1"/>
-          <p:nvPr/>
-        </p:nvSpPr>
-        <p:spPr>
-          <a:xfrm>
-            <a:off x="6035040" y="5715000"/>
-            <a:ext cx="5486400" cy="365760"/>
-          </a:xfrm>
-          <a:prstGeom prst="rect">
-            <a:avLst/>
-          </a:prstGeom>
-          <a:noFill/>
-          <a:ln/>
-        </p:spPr>
-        <p:txBody>
-          <a:bodyPr wrap="square" lIns="0" tIns="0" rIns="0" bIns="0" rtlCol="0" anchor="t"/>
-          <a:lstStyle/>
-          <a:p>
-            <a:pPr indent="0" marL="0">
-              <a:buNone/>
-            </a:pPr>
-            <a:r>
-              <a:rPr lang="en-US" sz="1600" dirty="0">
-                <a:solidFill>
-                  <a:srgbClr val="6E6E73"/>
-                </a:solidFill>
-                <a:latin typeface="Arial" pitchFamily="34" charset="0"/>
-                <a:ea typeface="Arial" pitchFamily="34" charset="-122"/>
-                <a:cs typeface="Arial" pitchFamily="34" charset="-120"/>
-              </a:rPr>
-              <a:t>Opens in English. Tap EN for any of 22 Indian languages.</a:t>
-            </a:r>
-            <a:endParaRPr lang="en-US" sz="1600" dirty="0"/>
+              <a:t>1,841 of 1,841 checks.</a:t>
+            </a:r>
+            <a:endParaRPr lang="en-US" sz="2200" dirty="0"/>
           </a:p>
         </p:txBody>
       </p:sp>
@@ -8021,14 +8264,53 @@
       </p:grpSpPr>
       <p:sp>
         <p:nvSpPr>
-          <p:cNvPr id="2" name="title"/>
+          <p:cNvPr id="2" name="eyebrow"/>
           <p:cNvSpPr txBox="1"/>
           <p:nvPr/>
         </p:nvSpPr>
         <p:spPr>
           <a:xfrm>
             <a:off x="822960" y="731520"/>
-            <a:ext cx="9144000" cy="777240"/>
+            <a:ext cx="10058400" cy="310896"/>
+          </a:xfrm>
+          <a:prstGeom prst="rect">
+            <a:avLst/>
+          </a:prstGeom>
+          <a:noFill/>
+          <a:ln/>
+        </p:spPr>
+        <p:txBody>
+          <a:bodyPr wrap="square" lIns="0" tIns="0" rIns="0" bIns="0" rtlCol="0" anchor="t"/>
+          <a:lstStyle/>
+          <a:p>
+            <a:pPr indent="0" marL="0">
+              <a:buNone/>
+            </a:pPr>
+            <a:r>
+              <a:rPr lang="en-US" sz="1400" b="1" spc="300" kern="0" dirty="0">
+                <a:solidFill>
+                  <a:srgbClr val="E2C28A"/>
+                </a:solidFill>
+                <a:latin typeface="Arial" pitchFamily="34" charset="0"/>
+                <a:ea typeface="Arial" pitchFamily="34" charset="-122"/>
+                <a:cs typeface="Arial" pitchFamily="34" charset="-120"/>
+              </a:rPr>
+              <a:t>WHY NOT LET AN AI MODEL DECIDE?</a:t>
+            </a:r>
+            <a:endParaRPr lang="en-US" sz="1400" dirty="0"/>
+          </a:p>
+        </p:txBody>
+      </p:sp>
+      <p:sp>
+        <p:nvSpPr>
+          <p:cNvPr id="3" name="title"/>
+          <p:cNvSpPr txBox="1"/>
+          <p:nvPr/>
+        </p:nvSpPr>
+        <p:spPr>
+          <a:xfrm>
+            <a:off x="822960" y="1051560"/>
+            <a:ext cx="10058400" cy="777240"/>
           </a:xfrm>
           <a:prstGeom prst="rect">
             <a:avLst/>
@@ -8052,7 +8334,7 @@
                 <a:ea typeface="Arial" pitchFamily="34" charset="-122"/>
                 <a:cs typeface="Arial" pitchFamily="34" charset="-120"/>
               </a:rPr>
-              <a:t>How it works</a:t>
+              <a:t>So we tested one.</a:t>
             </a:r>
             <a:endParaRPr lang="en-US" sz="4400" dirty="0"/>
           </a:p>
@@ -8060,18 +8342,18 @@
       </p:sp>
       <p:sp>
         <p:nvSpPr>
-          <p:cNvPr id="3" name="card 1"/>
+          <p:cNvPr id="4" name="A 3B language model panel"/>
           <p:cNvSpPr/>
           <p:nvPr/>
         </p:nvSpPr>
         <p:spPr>
           <a:xfrm>
-            <a:off x="822960" y="1965960"/>
-            <a:ext cx="3337560" cy="2834640"/>
+            <a:off x="822960" y="2148840"/>
+            <a:ext cx="5120640" cy="2788920"/>
           </a:xfrm>
           <a:prstGeom prst="roundRect">
             <a:avLst>
-              <a:gd name="adj" fmla="val 5806"/>
+              <a:gd name="adj" fmla="val 5902"/>
             </a:avLst>
           </a:prstGeom>
           <a:solidFill>
@@ -8087,186 +8369,221 @@
       </p:sp>
       <p:sp>
         <p:nvSpPr>
-          <p:cNvPr id="4" name="number 1"/>
+          <p:cNvPr id="5" name="A 3B language model name"/>
+          <p:cNvSpPr txBox="1"/>
+          <p:nvPr/>
+        </p:nvSpPr>
+        <p:spPr>
+          <a:xfrm>
+            <a:off x="1188720" y="2423160"/>
+            <a:ext cx="4389120" cy="457200"/>
+          </a:xfrm>
+          <a:prstGeom prst="rect">
+            <a:avLst/>
+          </a:prstGeom>
+          <a:noFill/>
+          <a:ln/>
+        </p:spPr>
+        <p:txBody>
+          <a:bodyPr wrap="square" lIns="0" tIns="0" rIns="0" bIns="0" rtlCol="0" anchor="t"/>
+          <a:lstStyle/>
+          <a:p>
+            <a:pPr indent="0" marL="0">
+              <a:buNone/>
+            </a:pPr>
+            <a:r>
+              <a:rPr lang="en-US" sz="2400" b="1" dirty="0">
+                <a:solidFill>
+                  <a:srgbClr val="F5F5F7"/>
+                </a:solidFill>
+                <a:latin typeface="Arial" pitchFamily="34" charset="0"/>
+                <a:ea typeface="Arial" pitchFamily="34" charset="-122"/>
+                <a:cs typeface="Arial" pitchFamily="34" charset="-120"/>
+              </a:rPr>
+              <a:t>A 3B language model</a:t>
+            </a:r>
+            <a:endParaRPr lang="en-US" sz="2400" dirty="0"/>
+          </a:p>
+        </p:txBody>
+      </p:sp>
+      <p:sp>
+        <p:nvSpPr>
+          <p:cNvPr id="6" name="A 3B language model Scams caught label"/>
+          <p:cNvSpPr txBox="1"/>
+          <p:nvPr/>
+        </p:nvSpPr>
+        <p:spPr>
+          <a:xfrm>
+            <a:off x="1188720" y="3063240"/>
+            <a:ext cx="4389120" cy="274320"/>
+          </a:xfrm>
+          <a:prstGeom prst="rect">
+            <a:avLst/>
+          </a:prstGeom>
+          <a:noFill/>
+          <a:ln/>
+        </p:spPr>
+        <p:txBody>
+          <a:bodyPr wrap="square" lIns="0" tIns="0" rIns="0" bIns="0" rtlCol="0" anchor="t"/>
+          <a:lstStyle/>
+          <a:p>
+            <a:pPr indent="0" marL="0">
+              <a:buNone/>
+            </a:pPr>
+            <a:r>
+              <a:rPr lang="en-US" sz="1200" b="1" spc="150" kern="0" dirty="0">
+                <a:solidFill>
+                  <a:srgbClr val="6E6E73"/>
+                </a:solidFill>
+                <a:latin typeface="Arial" pitchFamily="34" charset="0"/>
+                <a:ea typeface="Arial" pitchFamily="34" charset="-122"/>
+                <a:cs typeface="Arial" pitchFamily="34" charset="-120"/>
+              </a:rPr>
+              <a:t>SCAMS CAUGHT</a:t>
+            </a:r>
+            <a:endParaRPr lang="en-US" sz="1200" dirty="0"/>
+          </a:p>
+        </p:txBody>
+      </p:sp>
+      <p:sp>
+        <p:nvSpPr>
+          <p:cNvPr id="7" name="A 3B language model Scams caught"/>
+          <p:cNvSpPr txBox="1"/>
+          <p:nvPr/>
+        </p:nvSpPr>
+        <p:spPr>
+          <a:xfrm>
+            <a:off x="1188720" y="3337560"/>
+            <a:ext cx="4389120" cy="548640"/>
+          </a:xfrm>
+          <a:prstGeom prst="rect">
+            <a:avLst/>
+          </a:prstGeom>
+          <a:noFill/>
+          <a:ln/>
+        </p:spPr>
+        <p:txBody>
+          <a:bodyPr wrap="square" lIns="0" tIns="0" rIns="0" bIns="0" rtlCol="0" anchor="t"/>
+          <a:lstStyle/>
+          <a:p>
+            <a:pPr indent="0" marL="0">
+              <a:buNone/>
+            </a:pPr>
+            <a:r>
+              <a:rPr lang="en-US" sz="3600" b="1" dirty="0">
+                <a:solidFill>
+                  <a:srgbClr val="F5F5F7"/>
+                </a:solidFill>
+                <a:latin typeface="Arial" pitchFamily="34" charset="0"/>
+                <a:ea typeface="Arial" pitchFamily="34" charset="-122"/>
+                <a:cs typeface="Arial" pitchFamily="34" charset="-120"/>
+              </a:rPr>
+              <a:t>99 of 103</a:t>
+            </a:r>
+            <a:endParaRPr lang="en-US" sz="3600" dirty="0"/>
+          </a:p>
+        </p:txBody>
+      </p:sp>
+      <p:sp>
+        <p:nvSpPr>
+          <p:cNvPr id="8" name="A 3B language model Genuine messages flagged label"/>
+          <p:cNvSpPr txBox="1"/>
+          <p:nvPr/>
+        </p:nvSpPr>
+        <p:spPr>
+          <a:xfrm>
+            <a:off x="1188720" y="3977640"/>
+            <a:ext cx="4389120" cy="274320"/>
+          </a:xfrm>
+          <a:prstGeom prst="rect">
+            <a:avLst/>
+          </a:prstGeom>
+          <a:noFill/>
+          <a:ln/>
+        </p:spPr>
+        <p:txBody>
+          <a:bodyPr wrap="square" lIns="0" tIns="0" rIns="0" bIns="0" rtlCol="0" anchor="t"/>
+          <a:lstStyle/>
+          <a:p>
+            <a:pPr indent="0" marL="0">
+              <a:buNone/>
+            </a:pPr>
+            <a:r>
+              <a:rPr lang="en-US" sz="1200" b="1" spc="150" kern="0" dirty="0">
+                <a:solidFill>
+                  <a:srgbClr val="6E6E73"/>
+                </a:solidFill>
+                <a:latin typeface="Arial" pitchFamily="34" charset="0"/>
+                <a:ea typeface="Arial" pitchFamily="34" charset="-122"/>
+                <a:cs typeface="Arial" pitchFamily="34" charset="-120"/>
+              </a:rPr>
+              <a:t>GENUINE MESSAGES FLAGGED</a:t>
+            </a:r>
+            <a:endParaRPr lang="en-US" sz="1200" dirty="0"/>
+          </a:p>
+        </p:txBody>
+      </p:sp>
+      <p:sp>
+        <p:nvSpPr>
+          <p:cNvPr id="9" name="A 3B language model Genuine messages flagged"/>
+          <p:cNvSpPr txBox="1"/>
+          <p:nvPr/>
+        </p:nvSpPr>
+        <p:spPr>
+          <a:xfrm>
+            <a:off x="1188720" y="4251960"/>
+            <a:ext cx="4389120" cy="548640"/>
+          </a:xfrm>
+          <a:prstGeom prst="rect">
+            <a:avLst/>
+          </a:prstGeom>
+          <a:noFill/>
+          <a:ln/>
+        </p:spPr>
+        <p:txBody>
+          <a:bodyPr wrap="square" lIns="0" tIns="0" rIns="0" bIns="0" rtlCol="0" anchor="t"/>
+          <a:lstStyle/>
+          <a:p>
+            <a:pPr indent="0" marL="0">
+              <a:buNone/>
+            </a:pPr>
+            <a:r>
+              <a:rPr lang="en-US" sz="3600" b="1" dirty="0">
+                <a:solidFill>
+                  <a:srgbClr val="FF5A52"/>
+                </a:solidFill>
+                <a:latin typeface="Arial" pitchFamily="34" charset="0"/>
+                <a:ea typeface="Arial" pitchFamily="34" charset="-122"/>
+                <a:cs typeface="Arial" pitchFamily="34" charset="-120"/>
+              </a:rPr>
+              <a:t>21 of 34</a:t>
+            </a:r>
+            <a:endParaRPr lang="en-US" sz="3600" dirty="0"/>
+          </a:p>
+        </p:txBody>
+      </p:sp>
+      <p:sp>
+        <p:nvSpPr>
+          <p:cNvPr id="10" name="Sahayak panel"/>
           <p:cNvSpPr/>
           <p:nvPr/>
         </p:nvSpPr>
         <p:spPr>
           <a:xfrm>
-            <a:off x="1143000" y="2286000"/>
-            <a:ext cx="457200" cy="457200"/>
-          </a:xfrm>
-          <a:prstGeom prst="ellipse">
-            <a:avLst/>
-          </a:prstGeom>
-          <a:solidFill>
-            <a:srgbClr val="6FA8FF"/>
-          </a:solidFill>
-          <a:ln/>
-        </p:spPr>
-      </p:sp>
-      <p:sp>
-        <p:nvSpPr>
-          <p:cNvPr id="5" name="number 1 label"/>
-          <p:cNvSpPr txBox="1"/>
-          <p:nvPr/>
-        </p:nvSpPr>
-        <p:spPr>
-          <a:xfrm>
-            <a:off x="1143000" y="2286000"/>
-            <a:ext cx="457200" cy="457200"/>
-          </a:xfrm>
-          <a:prstGeom prst="rect">
-            <a:avLst/>
-          </a:prstGeom>
-          <a:noFill/>
-          <a:ln/>
-        </p:spPr>
-        <p:txBody>
-          <a:bodyPr wrap="square" lIns="0" tIns="0" rIns="0" bIns="0" rtlCol="0" anchor="ctr"/>
-          <a:lstStyle/>
-          <a:p>
-            <a:pPr algn="ctr" indent="0" marL="0">
-              <a:buNone/>
-            </a:pPr>
-            <a:r>
-              <a:rPr lang="en-US" sz="1800" b="1" dirty="0">
-                <a:solidFill>
-                  <a:srgbClr val="000000"/>
-                </a:solidFill>
-                <a:latin typeface="Arial" pitchFamily="34" charset="0"/>
-                <a:ea typeface="Arial" pitchFamily="34" charset="-122"/>
-                <a:cs typeface="Arial" pitchFamily="34" charset="-120"/>
-              </a:rPr>
-              <a:t>1</a:t>
-            </a:r>
-            <a:endParaRPr lang="en-US" sz="1800" dirty="0"/>
-          </a:p>
-        </p:txBody>
-      </p:sp>
-      <p:sp>
-        <p:nvSpPr>
-          <p:cNvPr id="6" name="card 1 title"/>
-          <p:cNvSpPr txBox="1"/>
-          <p:nvPr/>
-        </p:nvSpPr>
-        <p:spPr>
-          <a:xfrm>
-            <a:off x="1143000" y="2926080"/>
-            <a:ext cx="2834640" cy="548640"/>
-          </a:xfrm>
-          <a:prstGeom prst="rect">
-            <a:avLst/>
-          </a:prstGeom>
-          <a:noFill/>
-          <a:ln/>
-        </p:spPr>
-        <p:txBody>
-          <a:bodyPr wrap="square" lIns="0" tIns="0" rIns="0" bIns="0" rtlCol="0" anchor="t"/>
-          <a:lstStyle/>
-          <a:p>
-            <a:pPr indent="0" marL="0">
-              <a:buNone/>
-            </a:pPr>
-            <a:r>
-              <a:rPr lang="en-US" sz="2800" b="1" dirty="0">
-                <a:solidFill>
-                  <a:srgbClr val="F5F5F7"/>
-                </a:solidFill>
-                <a:latin typeface="Arial" pitchFamily="34" charset="0"/>
-                <a:ea typeface="Arial" pitchFamily="34" charset="-122"/>
-                <a:cs typeface="Arial" pitchFamily="34" charset="-120"/>
-              </a:rPr>
-              <a:t>You ask.</a:t>
-            </a:r>
-            <a:endParaRPr lang="en-US" sz="2800" dirty="0"/>
-          </a:p>
-        </p:txBody>
-      </p:sp>
-      <p:sp>
-        <p:nvSpPr>
-          <p:cNvPr id="7" name="card 1 points"/>
-          <p:cNvSpPr txBox="1"/>
-          <p:nvPr/>
-        </p:nvSpPr>
-        <p:spPr>
-          <a:xfrm>
-            <a:off x="1143000" y="3611880"/>
-            <a:ext cx="2834640" cy="1097280"/>
-          </a:xfrm>
-          <a:prstGeom prst="rect">
-            <a:avLst/>
-          </a:prstGeom>
-          <a:noFill/>
-          <a:ln/>
-        </p:spPr>
-        <p:txBody>
-          <a:bodyPr wrap="square" lIns="0" tIns="0" rIns="0" bIns="0" rtlCol="0" anchor="t"/>
-          <a:lstStyle/>
-          <a:p>
-            <a:pPr indent="0" marL="0">
-              <a:spcAft>
-                <a:spcPts val="500"/>
-              </a:spcAft>
-              <a:buNone/>
-            </a:pPr>
-            <a:r>
-              <a:rPr lang="en-US" sz="2200" dirty="0">
-                <a:solidFill>
-                  <a:srgbClr val="A1A1A6"/>
-                </a:solidFill>
-                <a:latin typeface="Arial" pitchFamily="34" charset="0"/>
-                <a:ea typeface="Arial" pitchFamily="34" charset="-122"/>
-                <a:cs typeface="Arial" pitchFamily="34" charset="-120"/>
-              </a:rPr>
-              <a:t>Type · Speak</a:t>
-            </a:r>
-            <a:endParaRPr lang="en-US" sz="2200" dirty="0"/>
-          </a:p>
-          <a:p>
-            <a:pPr indent="0" marL="0">
-              <a:spcAft>
-                <a:spcPts val="500"/>
-              </a:spcAft>
-              <a:buNone/>
-            </a:pPr>
-            <a:r>
-              <a:rPr lang="en-US" sz="2200" dirty="0">
-                <a:solidFill>
-                  <a:srgbClr val="A1A1A6"/>
-                </a:solidFill>
-                <a:latin typeface="Arial" pitchFamily="34" charset="0"/>
-                <a:ea typeface="Arial" pitchFamily="34" charset="-122"/>
-                <a:cs typeface="Arial" pitchFamily="34" charset="-120"/>
-              </a:rPr>
-              <a:t>A call · A UPI QR</a:t>
-            </a:r>
-            <a:endParaRPr lang="en-US" sz="2200" dirty="0"/>
-          </a:p>
-        </p:txBody>
-      </p:sp>
-      <p:sp>
-        <p:nvSpPr>
-          <p:cNvPr id="8" name="card 2"/>
-          <p:cNvSpPr/>
-          <p:nvPr/>
-        </p:nvSpPr>
-        <p:spPr>
-          <a:xfrm>
-            <a:off x="4434840" y="1965960"/>
-            <a:ext cx="3337560" cy="2834640"/>
+            <a:off x="6172200" y="2148840"/>
+            <a:ext cx="5120640" cy="2788920"/>
           </a:xfrm>
           <a:prstGeom prst="roundRect">
             <a:avLst>
-              <a:gd name="adj" fmla="val 5806"/>
+              <a:gd name="adj" fmla="val 5902"/>
             </a:avLst>
           </a:prstGeom>
           <a:solidFill>
-            <a:srgbClr val="161618"/>
+            <a:srgbClr val="111B2B"/>
           </a:solidFill>
           <a:ln w="12700">
             <a:solidFill>
-              <a:srgbClr val="2C2C30"/>
+              <a:srgbClr val="2F4A75"/>
             </a:solidFill>
             <a:prstDash val="solid"/>
           </a:ln>
@@ -8274,89 +8591,108 @@
       </p:sp>
       <p:sp>
         <p:nvSpPr>
-          <p:cNvPr id="9" name="number 2"/>
-          <p:cNvSpPr/>
-          <p:nvPr/>
-        </p:nvSpPr>
-        <p:spPr>
-          <a:xfrm>
-            <a:off x="4754880" y="2286000"/>
-            <a:ext cx="457200" cy="457200"/>
-          </a:xfrm>
-          <a:prstGeom prst="ellipse">
-            <a:avLst/>
-          </a:prstGeom>
-          <a:solidFill>
-            <a:srgbClr val="4FD68A"/>
-          </a:solidFill>
-          <a:ln/>
-        </p:spPr>
-      </p:sp>
-      <p:sp>
-        <p:nvSpPr>
-          <p:cNvPr id="10" name="number 2 label"/>
-          <p:cNvSpPr txBox="1"/>
-          <p:nvPr/>
-        </p:nvSpPr>
-        <p:spPr>
-          <a:xfrm>
-            <a:off x="4754880" y="2286000"/>
-            <a:ext cx="457200" cy="457200"/>
-          </a:xfrm>
-          <a:prstGeom prst="rect">
-            <a:avLst/>
-          </a:prstGeom>
-          <a:noFill/>
-          <a:ln/>
-        </p:spPr>
-        <p:txBody>
-          <a:bodyPr wrap="square" lIns="0" tIns="0" rIns="0" bIns="0" rtlCol="0" anchor="ctr"/>
-          <a:lstStyle/>
-          <a:p>
-            <a:pPr algn="ctr" indent="0" marL="0">
-              <a:buNone/>
-            </a:pPr>
-            <a:r>
-              <a:rPr lang="en-US" sz="1800" b="1" dirty="0">
-                <a:solidFill>
-                  <a:srgbClr val="000000"/>
-                </a:solidFill>
-                <a:latin typeface="Arial" pitchFamily="34" charset="0"/>
-                <a:ea typeface="Arial" pitchFamily="34" charset="-122"/>
-                <a:cs typeface="Arial" pitchFamily="34" charset="-120"/>
-              </a:rPr>
-              <a:t>2</a:t>
-            </a:r>
-            <a:endParaRPr lang="en-US" sz="1800" dirty="0"/>
-          </a:p>
-        </p:txBody>
-      </p:sp>
-      <p:sp>
-        <p:nvSpPr>
-          <p:cNvPr id="11" name="card 2 title"/>
-          <p:cNvSpPr txBox="1"/>
-          <p:nvPr/>
-        </p:nvSpPr>
-        <p:spPr>
-          <a:xfrm>
-            <a:off x="4754880" y="2926080"/>
-            <a:ext cx="2834640" cy="548640"/>
-          </a:xfrm>
-          <a:prstGeom prst="rect">
-            <a:avLst/>
-          </a:prstGeom>
-          <a:noFill/>
-          <a:ln/>
-        </p:spPr>
-        <p:txBody>
-          <a:bodyPr wrap="square" lIns="0" tIns="0" rIns="0" bIns="0" rtlCol="0" anchor="t"/>
-          <a:lstStyle/>
-          <a:p>
-            <a:pPr indent="0" marL="0">
-              <a:buNone/>
-            </a:pPr>
-            <a:r>
-              <a:rPr lang="en-US" sz="2800" b="1" dirty="0">
+          <p:cNvPr id="11" name="Sahayak name"/>
+          <p:cNvSpPr txBox="1"/>
+          <p:nvPr/>
+        </p:nvSpPr>
+        <p:spPr>
+          <a:xfrm>
+            <a:off x="6537960" y="2423160"/>
+            <a:ext cx="4389120" cy="457200"/>
+          </a:xfrm>
+          <a:prstGeom prst="rect">
+            <a:avLst/>
+          </a:prstGeom>
+          <a:noFill/>
+          <a:ln/>
+        </p:spPr>
+        <p:txBody>
+          <a:bodyPr wrap="square" lIns="0" tIns="0" rIns="0" bIns="0" rtlCol="0" anchor="t"/>
+          <a:lstStyle/>
+          <a:p>
+            <a:pPr indent="0" marL="0">
+              <a:buNone/>
+            </a:pPr>
+            <a:r>
+              <a:rPr lang="en-US" sz="2400" b="1" dirty="0">
+                <a:solidFill>
+                  <a:srgbClr val="6FA8FF"/>
+                </a:solidFill>
+                <a:latin typeface="Arial" pitchFamily="34" charset="0"/>
+                <a:ea typeface="Arial" pitchFamily="34" charset="-122"/>
+                <a:cs typeface="Arial" pitchFamily="34" charset="-120"/>
+              </a:rPr>
+              <a:t>Sahayak</a:t>
+            </a:r>
+            <a:endParaRPr lang="en-US" sz="2400" dirty="0"/>
+          </a:p>
+        </p:txBody>
+      </p:sp>
+      <p:sp>
+        <p:nvSpPr>
+          <p:cNvPr id="12" name="Sahayak Scams caught label"/>
+          <p:cNvSpPr txBox="1"/>
+          <p:nvPr/>
+        </p:nvSpPr>
+        <p:spPr>
+          <a:xfrm>
+            <a:off x="6537960" y="3063240"/>
+            <a:ext cx="4389120" cy="274320"/>
+          </a:xfrm>
+          <a:prstGeom prst="rect">
+            <a:avLst/>
+          </a:prstGeom>
+          <a:noFill/>
+          <a:ln/>
+        </p:spPr>
+        <p:txBody>
+          <a:bodyPr wrap="square" lIns="0" tIns="0" rIns="0" bIns="0" rtlCol="0" anchor="t"/>
+          <a:lstStyle/>
+          <a:p>
+            <a:pPr indent="0" marL="0">
+              <a:buNone/>
+            </a:pPr>
+            <a:r>
+              <a:rPr lang="en-US" sz="1200" b="1" spc="150" kern="0" dirty="0">
+                <a:solidFill>
+                  <a:srgbClr val="6E6E73"/>
+                </a:solidFill>
+                <a:latin typeface="Arial" pitchFamily="34" charset="0"/>
+                <a:ea typeface="Arial" pitchFamily="34" charset="-122"/>
+                <a:cs typeface="Arial" pitchFamily="34" charset="-120"/>
+              </a:rPr>
+              <a:t>SCAMS CAUGHT</a:t>
+            </a:r>
+            <a:endParaRPr lang="en-US" sz="1200" dirty="0"/>
+          </a:p>
+        </p:txBody>
+      </p:sp>
+      <p:sp>
+        <p:nvSpPr>
+          <p:cNvPr id="13" name="Sahayak Scams caught"/>
+          <p:cNvSpPr txBox="1"/>
+          <p:nvPr/>
+        </p:nvSpPr>
+        <p:spPr>
+          <a:xfrm>
+            <a:off x="6537960" y="3337560"/>
+            <a:ext cx="4389120" cy="548640"/>
+          </a:xfrm>
+          <a:prstGeom prst="rect">
+            <a:avLst/>
+          </a:prstGeom>
+          <a:noFill/>
+          <a:ln/>
+        </p:spPr>
+        <p:txBody>
+          <a:bodyPr wrap="square" lIns="0" tIns="0" rIns="0" bIns="0" rtlCol="0" anchor="t"/>
+          <a:lstStyle/>
+          <a:p>
+            <a:pPr indent="0" marL="0">
+              <a:buNone/>
+            </a:pPr>
+            <a:r>
+              <a:rPr lang="en-US" sz="3600" b="1" dirty="0">
                 <a:solidFill>
                   <a:srgbClr val="F5F5F7"/>
                 </a:solidFill>
@@ -8364,41 +8700,116 @@
                 <a:ea typeface="Arial" pitchFamily="34" charset="-122"/>
                 <a:cs typeface="Arial" pitchFamily="34" charset="-120"/>
               </a:rPr>
-              <a:t>Rules decide.</a:t>
-            </a:r>
-            <a:endParaRPr lang="en-US" sz="2800" dirty="0"/>
-          </a:p>
-        </p:txBody>
-      </p:sp>
-      <p:sp>
-        <p:nvSpPr>
-          <p:cNvPr id="12" name="card 2 points"/>
-          <p:cNvSpPr txBox="1"/>
-          <p:nvPr/>
-        </p:nvSpPr>
-        <p:spPr>
-          <a:xfrm>
-            <a:off x="4754880" y="3611880"/>
-            <a:ext cx="2834640" cy="1097280"/>
-          </a:xfrm>
-          <a:prstGeom prst="rect">
-            <a:avLst/>
-          </a:prstGeom>
-          <a:noFill/>
-          <a:ln/>
-        </p:spPr>
-        <p:txBody>
-          <a:bodyPr wrap="square" lIns="0" tIns="0" rIns="0" bIns="0" rtlCol="0" anchor="t"/>
-          <a:lstStyle/>
-          <a:p>
-            <a:pPr indent="0" marL="0">
-              <a:spcAft>
-                <a:spcPts val="500"/>
-              </a:spcAft>
-              <a:buNone/>
-            </a:pPr>
-            <a:r>
-              <a:rPr lang="en-US" sz="2200" dirty="0">
+              <a:t>67 of 103</a:t>
+            </a:r>
+            <a:endParaRPr lang="en-US" sz="3600" dirty="0"/>
+          </a:p>
+        </p:txBody>
+      </p:sp>
+      <p:sp>
+        <p:nvSpPr>
+          <p:cNvPr id="14" name="Sahayak Genuine messages flagged label"/>
+          <p:cNvSpPr txBox="1"/>
+          <p:nvPr/>
+        </p:nvSpPr>
+        <p:spPr>
+          <a:xfrm>
+            <a:off x="6537960" y="3977640"/>
+            <a:ext cx="4389120" cy="274320"/>
+          </a:xfrm>
+          <a:prstGeom prst="rect">
+            <a:avLst/>
+          </a:prstGeom>
+          <a:noFill/>
+          <a:ln/>
+        </p:spPr>
+        <p:txBody>
+          <a:bodyPr wrap="square" lIns="0" tIns="0" rIns="0" bIns="0" rtlCol="0" anchor="t"/>
+          <a:lstStyle/>
+          <a:p>
+            <a:pPr indent="0" marL="0">
+              <a:buNone/>
+            </a:pPr>
+            <a:r>
+              <a:rPr lang="en-US" sz="1200" b="1" spc="150" kern="0" dirty="0">
+                <a:solidFill>
+                  <a:srgbClr val="6E6E73"/>
+                </a:solidFill>
+                <a:latin typeface="Arial" pitchFamily="34" charset="0"/>
+                <a:ea typeface="Arial" pitchFamily="34" charset="-122"/>
+                <a:cs typeface="Arial" pitchFamily="34" charset="-120"/>
+              </a:rPr>
+              <a:t>GENUINE MESSAGES FLAGGED</a:t>
+            </a:r>
+            <a:endParaRPr lang="en-US" sz="1200" dirty="0"/>
+          </a:p>
+        </p:txBody>
+      </p:sp>
+      <p:sp>
+        <p:nvSpPr>
+          <p:cNvPr id="15" name="Sahayak Genuine messages flagged"/>
+          <p:cNvSpPr txBox="1"/>
+          <p:nvPr/>
+        </p:nvSpPr>
+        <p:spPr>
+          <a:xfrm>
+            <a:off x="6537960" y="4251960"/>
+            <a:ext cx="4389120" cy="548640"/>
+          </a:xfrm>
+          <a:prstGeom prst="rect">
+            <a:avLst/>
+          </a:prstGeom>
+          <a:noFill/>
+          <a:ln/>
+        </p:spPr>
+        <p:txBody>
+          <a:bodyPr wrap="square" lIns="0" tIns="0" rIns="0" bIns="0" rtlCol="0" anchor="t"/>
+          <a:lstStyle/>
+          <a:p>
+            <a:pPr indent="0" marL="0">
+              <a:buNone/>
+            </a:pPr>
+            <a:r>
+              <a:rPr lang="en-US" sz="3600" b="1" dirty="0">
+                <a:solidFill>
+                  <a:srgbClr val="F5F5F7"/>
+                </a:solidFill>
+                <a:latin typeface="Arial" pitchFamily="34" charset="0"/>
+                <a:ea typeface="Arial" pitchFamily="34" charset="-122"/>
+                <a:cs typeface="Arial" pitchFamily="34" charset="-120"/>
+              </a:rPr>
+              <a:t>11 of 34</a:t>
+            </a:r>
+            <a:endParaRPr lang="en-US" sz="3600" dirty="0"/>
+          </a:p>
+        </p:txBody>
+      </p:sp>
+      <p:sp>
+        <p:nvSpPr>
+          <p:cNvPr id="16" name="conclusion"/>
+          <p:cNvSpPr txBox="1"/>
+          <p:nvPr/>
+        </p:nvSpPr>
+        <p:spPr>
+          <a:xfrm>
+            <a:off x="822960" y="5120640"/>
+            <a:ext cx="10545775" cy="868680"/>
+          </a:xfrm>
+          <a:prstGeom prst="rect">
+            <a:avLst/>
+          </a:prstGeom>
+          <a:noFill/>
+          <a:ln/>
+        </p:spPr>
+        <p:txBody>
+          <a:bodyPr wrap="square" lIns="0" tIns="0" rIns="0" bIns="0" rtlCol="0" anchor="t"/>
+          <a:lstStyle/>
+          <a:p>
+            <a:pPr indent="0" marL="0">
+              <a:buNone/>
+            </a:pPr>
+            <a:r>
+              <a:rPr lang="en-US" sz="2400" b="1" dirty="0">
                 <a:solidFill>
                   <a:srgbClr val="A1A1A6"/>
                 </a:solidFill>
@@ -8406,269 +8817,65 @@
                 <a:ea typeface="Arial" pitchFamily="34" charset="-122"/>
                 <a:cs typeface="Arial" pitchFamily="34" charset="-120"/>
               </a:rPr>
-              <a:t>64 signals</a:t>
-            </a:r>
-            <a:endParaRPr lang="en-US" sz="2200" dirty="0"/>
-          </a:p>
-          <a:p>
-            <a:pPr indent="0" marL="0">
-              <a:spcAft>
-                <a:spcPts val="500"/>
-              </a:spcAft>
-              <a:buNone/>
-            </a:pPr>
-            <a:r>
-              <a:rPr lang="en-US" sz="2200" dirty="0">
-                <a:solidFill>
-                  <a:srgbClr val="A1A1A6"/>
-                </a:solidFill>
-                <a:latin typeface="Arial" pitchFamily="34" charset="0"/>
-                <a:ea typeface="Arial" pitchFamily="34" charset="-122"/>
-                <a:cs typeface="Arial" pitchFamily="34" charset="-120"/>
-              </a:rPr>
-              <a:t>On the device</a:t>
-            </a:r>
-            <a:endParaRPr lang="en-US" sz="2200" dirty="0"/>
-          </a:p>
-        </p:txBody>
-      </p:sp>
-      <p:sp>
-        <p:nvSpPr>
-          <p:cNvPr id="13" name="card 3"/>
-          <p:cNvSpPr/>
-          <p:nvPr/>
-        </p:nvSpPr>
-        <p:spPr>
-          <a:xfrm>
-            <a:off x="8046720" y="1965960"/>
-            <a:ext cx="3337560" cy="2834640"/>
-          </a:xfrm>
-          <a:prstGeom prst="roundRect">
-            <a:avLst>
-              <a:gd name="adj" fmla="val 5806"/>
-            </a:avLst>
-          </a:prstGeom>
-          <a:solidFill>
-            <a:srgbClr val="161618"/>
-          </a:solidFill>
-          <a:ln w="12700">
-            <a:solidFill>
-              <a:srgbClr val="2C2C30"/>
-            </a:solidFill>
-            <a:prstDash val="solid"/>
-          </a:ln>
-        </p:spPr>
-      </p:sp>
-      <p:sp>
-        <p:nvSpPr>
-          <p:cNvPr id="14" name="number 3"/>
-          <p:cNvSpPr/>
-          <p:nvPr/>
-        </p:nvSpPr>
-        <p:spPr>
-          <a:xfrm>
-            <a:off x="8366760" y="2286000"/>
-            <a:ext cx="457200" cy="457200"/>
-          </a:xfrm>
-          <a:prstGeom prst="ellipse">
-            <a:avLst/>
-          </a:prstGeom>
-          <a:solidFill>
-            <a:srgbClr val="E2C28A"/>
-          </a:solidFill>
-          <a:ln/>
-        </p:spPr>
-      </p:sp>
-      <p:sp>
-        <p:nvSpPr>
-          <p:cNvPr id="15" name="number 3 label"/>
-          <p:cNvSpPr txBox="1"/>
-          <p:nvPr/>
-        </p:nvSpPr>
-        <p:spPr>
-          <a:xfrm>
-            <a:off x="8366760" y="2286000"/>
-            <a:ext cx="457200" cy="457200"/>
-          </a:xfrm>
-          <a:prstGeom prst="rect">
-            <a:avLst/>
-          </a:prstGeom>
-          <a:noFill/>
-          <a:ln/>
-        </p:spPr>
-        <p:txBody>
-          <a:bodyPr wrap="square" lIns="0" tIns="0" rIns="0" bIns="0" rtlCol="0" anchor="ctr"/>
-          <a:lstStyle/>
-          <a:p>
-            <a:pPr algn="ctr" indent="0" marL="0">
-              <a:buNone/>
-            </a:pPr>
-            <a:r>
-              <a:rPr lang="en-US" sz="1800" b="1" dirty="0">
-                <a:solidFill>
-                  <a:srgbClr val="000000"/>
-                </a:solidFill>
-                <a:latin typeface="Arial" pitchFamily="34" charset="0"/>
-                <a:ea typeface="Arial" pitchFamily="34" charset="-122"/>
-                <a:cs typeface="Arial" pitchFamily="34" charset="-120"/>
-              </a:rPr>
-              <a:t>3</a:t>
-            </a:r>
-            <a:endParaRPr lang="en-US" sz="1800" dirty="0"/>
-          </a:p>
-        </p:txBody>
-      </p:sp>
-      <p:sp>
-        <p:nvSpPr>
-          <p:cNvPr id="16" name="card 3 title"/>
-          <p:cNvSpPr txBox="1"/>
-          <p:nvPr/>
-        </p:nvSpPr>
-        <p:spPr>
-          <a:xfrm>
-            <a:off x="8366760" y="2926080"/>
-            <a:ext cx="2834640" cy="548640"/>
-          </a:xfrm>
-          <a:prstGeom prst="rect">
-            <a:avLst/>
-          </a:prstGeom>
-          <a:noFill/>
-          <a:ln/>
-        </p:spPr>
-        <p:txBody>
-          <a:bodyPr wrap="square" lIns="0" tIns="0" rIns="0" bIns="0" rtlCol="0" anchor="t"/>
-          <a:lstStyle/>
-          <a:p>
-            <a:pPr indent="0" marL="0">
-              <a:buNone/>
-            </a:pPr>
-            <a:r>
-              <a:rPr lang="en-US" sz="2800" b="1" dirty="0">
-                <a:solidFill>
-                  <a:srgbClr val="F5F5F7"/>
-                </a:solidFill>
-                <a:latin typeface="Arial" pitchFamily="34" charset="0"/>
-                <a:ea typeface="Arial" pitchFamily="34" charset="-122"/>
-                <a:cs typeface="Arial" pitchFamily="34" charset="-120"/>
-              </a:rPr>
-              <a:t>A clear answer.</a:t>
-            </a:r>
-            <a:endParaRPr lang="en-US" sz="2800" dirty="0"/>
-          </a:p>
-        </p:txBody>
-      </p:sp>
-      <p:sp>
-        <p:nvSpPr>
-          <p:cNvPr id="17" name="card 3 points"/>
-          <p:cNvSpPr txBox="1"/>
-          <p:nvPr/>
-        </p:nvSpPr>
-        <p:spPr>
-          <a:xfrm>
-            <a:off x="8366760" y="3611880"/>
-            <a:ext cx="2834640" cy="1097280"/>
-          </a:xfrm>
-          <a:prstGeom prst="rect">
-            <a:avLst/>
-          </a:prstGeom>
-          <a:noFill/>
-          <a:ln/>
-        </p:spPr>
-        <p:txBody>
-          <a:bodyPr wrap="square" lIns="0" tIns="0" rIns="0" bIns="0" rtlCol="0" anchor="t"/>
-          <a:lstStyle/>
-          <a:p>
-            <a:pPr indent="0" marL="0">
-              <a:spcAft>
-                <a:spcPts val="500"/>
-              </a:spcAft>
-              <a:buNone/>
-            </a:pPr>
-            <a:r>
-              <a:rPr lang="en-US" sz="2200" dirty="0">
-                <a:solidFill>
-                  <a:srgbClr val="A1A1A6"/>
-                </a:solidFill>
-                <a:latin typeface="Arial" pitchFamily="34" charset="0"/>
-                <a:ea typeface="Arial" pitchFamily="34" charset="-122"/>
-                <a:cs typeface="Arial" pitchFamily="34" charset="-120"/>
-              </a:rPr>
-              <a:t>4 answers</a:t>
-            </a:r>
-            <a:endParaRPr lang="en-US" sz="2200" dirty="0"/>
-          </a:p>
-          <a:p>
-            <a:pPr indent="0" marL="0">
-              <a:spcAft>
-                <a:spcPts val="500"/>
-              </a:spcAft>
-              <a:buNone/>
-            </a:pPr>
-            <a:r>
-              <a:rPr lang="en-US" sz="2200" b="1" dirty="0">
-                <a:solidFill>
-                  <a:srgbClr val="E2C28A"/>
-                </a:solidFill>
-                <a:latin typeface="Arial" pitchFamily="34" charset="0"/>
-                <a:ea typeface="Arial" pitchFamily="34" charset="-122"/>
-                <a:cs typeface="Arial" pitchFamily="34" charset="-120"/>
-              </a:rPr>
-              <a:t>Never “safe”.</a:t>
-            </a:r>
-            <a:endParaRPr lang="en-US" sz="2200" dirty="0"/>
-          </a:p>
-        </p:txBody>
-      </p:sp>
-      <p:sp>
-        <p:nvSpPr>
-          <p:cNvPr id="18" name="parity"/>
-          <p:cNvSpPr txBox="1"/>
-          <p:nvPr/>
-        </p:nvSpPr>
-        <p:spPr>
-          <a:xfrm>
-            <a:off x="822960" y="5212080"/>
-            <a:ext cx="10545775" cy="411480"/>
-          </a:xfrm>
-          <a:prstGeom prst="rect">
-            <a:avLst/>
-          </a:prstGeom>
-          <a:noFill/>
-          <a:ln/>
-        </p:spPr>
-        <p:txBody>
-          <a:bodyPr wrap="square" lIns="0" tIns="0" rIns="0" bIns="0" rtlCol="0" anchor="t"/>
-          <a:lstStyle/>
-          <a:p>
-            <a:pPr indent="0" marL="0">
-              <a:buNone/>
-            </a:pPr>
-            <a:r>
-              <a:rPr lang="en-US" sz="2200" dirty="0">
-                <a:solidFill>
-                  <a:srgbClr val="A1A1A6"/>
-                </a:solidFill>
-                <a:latin typeface="Arial" pitchFamily="34" charset="0"/>
-                <a:ea typeface="Arial" pitchFamily="34" charset="-122"/>
-                <a:cs typeface="Arial" pitchFamily="34" charset="-120"/>
-              </a:rPr>
-              <a:t>Phone = counter: </a:t>
-            </a:r>
-            <a:pPr indent="0" marL="0">
-              <a:buNone/>
-            </a:pPr>
-            <a:r>
-              <a:rPr lang="en-US" sz="2200" b="1" dirty="0">
-                <a:solidFill>
-                  <a:srgbClr val="F5F5F7"/>
-                </a:solidFill>
-                <a:latin typeface="Arial" pitchFamily="34" charset="0"/>
-                <a:ea typeface="Arial" pitchFamily="34" charset="-122"/>
-                <a:cs typeface="Arial" pitchFamily="34" charset="-120"/>
-              </a:rPr>
-              <a:t>1,841 of 1,841 checks.</a:t>
-            </a:r>
-            <a:endParaRPr lang="en-US" sz="2200" dirty="0"/>
+              <a:t>A warning that cries wolf gets ignored.</a:t>
+            </a:r>
+            <a:endParaRPr lang="en-US" sz="2400" dirty="0"/>
+          </a:p>
+          <a:p>
+            <a:pPr indent="0" marL="0">
+              <a:buNone/>
+            </a:pPr>
+            <a:r>
+              <a:rPr lang="en-US" sz="2400" b="1" dirty="0">
+                <a:solidFill>
+                  <a:srgbClr val="6FA8FF"/>
+                </a:solidFill>
+                <a:latin typeface="Arial" pitchFamily="34" charset="0"/>
+                <a:ea typeface="Arial" pitchFamily="34" charset="-122"/>
+                <a:cs typeface="Arial" pitchFamily="34" charset="-120"/>
+              </a:rPr>
+              <a:t>So rules decide, and every answer says why.</a:t>
+            </a:r>
+            <a:endParaRPr lang="en-US" sz="2400" dirty="0"/>
+          </a:p>
+        </p:txBody>
+      </p:sp>
+      <p:sp>
+        <p:nvSpPr>
+          <p:cNvPr id="17" name="source"/>
+          <p:cNvSpPr txBox="1"/>
+          <p:nvPr/>
+        </p:nvSpPr>
+        <p:spPr>
+          <a:xfrm>
+            <a:off x="822960" y="6400800"/>
+            <a:ext cx="10545775" cy="256032"/>
+          </a:xfrm>
+          <a:prstGeom prst="rect">
+            <a:avLst/>
+          </a:prstGeom>
+          <a:noFill/>
+          <a:ln/>
+        </p:spPr>
+        <p:txBody>
+          <a:bodyPr wrap="square" lIns="0" tIns="0" rIns="0" bIns="0" rtlCol="0" anchor="t"/>
+          <a:lstStyle/>
+          <a:p>
+            <a:pPr indent="0" marL="0">
+              <a:buNone/>
+            </a:pPr>
+            <a:r>
+              <a:rPr lang="en-US" sz="1050" dirty="0">
+                <a:solidFill>
+                  <a:srgbClr val="6E6E73"/>
+                </a:solidFill>
+                <a:latin typeface="Arial" pitchFamily="34" charset="0"/>
+                <a:ea typeface="Arial" pitchFamily="34" charset="-122"/>
+                <a:cs typeface="Arial" pitchFamily="34" charset="-120"/>
+              </a:rPr>
+              <a:t>qwen2.5:3b, zero-shot, on the same 137 real published messages, first runs, 7 Oct 2026. In languages Sahayak can’t read yet, the model caught 14 of 15 scams.</a:t>
+            </a:r>
+            <a:endParaRPr lang="en-US" sz="1050" dirty="0"/>
           </a:p>
         </p:txBody>
       </p:sp>
@@ -8705,8 +8912,8 @@
         </p:nvSpPr>
         <p:spPr>
           <a:xfrm>
-            <a:off x="822960" y="731520"/>
-            <a:ext cx="10058400" cy="310896"/>
+            <a:off x="822960" y="868680"/>
+            <a:ext cx="3657600" cy="310896"/>
           </a:xfrm>
           <a:prstGeom prst="rect">
             <a:avLst/>
@@ -8724,13 +8931,13 @@
             <a:r>
               <a:rPr lang="en-US" sz="1400" b="1" spc="300" kern="0" dirty="0">
                 <a:solidFill>
-                  <a:srgbClr val="E2C28A"/>
-                </a:solidFill>
-                <a:latin typeface="Arial" pitchFamily="34" charset="0"/>
-                <a:ea typeface="Arial" pitchFamily="34" charset="-122"/>
-                <a:cs typeface="Arial" pitchFamily="34" charset="-120"/>
-              </a:rPr>
-              <a:t>ROUND ONE: A LARGE AI MODEL WOULD DECIDE</a:t>
+                  <a:srgbClr val="6E6E73"/>
+                </a:solidFill>
+                <a:latin typeface="Arial" pitchFamily="34" charset="0"/>
+                <a:ea typeface="Arial" pitchFamily="34" charset="-122"/>
+                <a:cs typeface="Arial" pitchFamily="34" charset="-120"/>
+              </a:rPr>
+              <a:t>WE COULD HAVE SHOWN YOU</a:t>
             </a:r>
             <a:endParaRPr lang="en-US" sz="1400" dirty="0"/>
           </a:p>
@@ -8738,65 +8945,22 @@
       </p:sp>
       <p:sp>
         <p:nvSpPr>
-          <p:cNvPr id="3" name="title"/>
-          <p:cNvSpPr txBox="1"/>
-          <p:nvPr/>
-        </p:nvSpPr>
-        <p:spPr>
-          <a:xfrm>
-            <a:off x="822960" y="1051560"/>
-            <a:ext cx="10058400" cy="777240"/>
-          </a:xfrm>
-          <a:prstGeom prst="rect">
-            <a:avLst/>
-          </a:prstGeom>
-          <a:noFill/>
-          <a:ln/>
-        </p:spPr>
-        <p:txBody>
-          <a:bodyPr wrap="square" lIns="0" tIns="0" rIns="0" bIns="0" rtlCol="0" anchor="t"/>
-          <a:lstStyle/>
-          <a:p>
-            <a:pPr indent="0" marL="0">
-              <a:buNone/>
-            </a:pPr>
-            <a:r>
-              <a:rPr lang="en-US" sz="4400" b="1" dirty="0">
-                <a:solidFill>
-                  <a:srgbClr val="F5F5F7"/>
-                </a:solidFill>
-                <a:latin typeface="Arial" pitchFamily="34" charset="0"/>
-                <a:ea typeface="Arial" pitchFamily="34" charset="-122"/>
-                <a:cs typeface="Arial" pitchFamily="34" charset="-120"/>
-              </a:rPr>
-              <a:t>So we tested one.</a:t>
-            </a:r>
-            <a:endParaRPr lang="en-US" sz="4400" dirty="0"/>
-          </a:p>
-        </p:txBody>
-      </p:sp>
-      <p:sp>
-        <p:nvSpPr>
-          <p:cNvPr id="4" name="A 3B language model panel"/>
+          <p:cNvPr id="3" name="bigger number 1 rule"/>
           <p:cNvSpPr/>
           <p:nvPr/>
         </p:nvSpPr>
         <p:spPr>
           <a:xfrm>
-            <a:off x="822960" y="2148840"/>
-            <a:ext cx="5120640" cy="2788920"/>
-          </a:xfrm>
-          <a:prstGeom prst="roundRect">
-            <a:avLst>
-              <a:gd name="adj" fmla="val 5902"/>
-            </a:avLst>
-          </a:prstGeom>
-          <a:solidFill>
-            <a:srgbClr val="161618"/>
-          </a:solidFill>
-          <a:ln w="12700">
+            <a:off x="822960" y="1325880"/>
+            <a:ext cx="3291840" cy="0"/>
+          </a:xfrm>
+          <a:prstGeom prst="line">
+            <a:avLst/>
+          </a:prstGeom>
+          <a:noFill/>
+          <a:ln w="9525">
             <a:solidFill>
-              <a:srgbClr val="2C2C30"/>
+              <a:srgbClr val="3A3A3E"/>
             </a:solidFill>
             <a:prstDash val="solid"/>
           </a:ln>
@@ -8804,69 +8968,30 @@
       </p:sp>
       <p:sp>
         <p:nvSpPr>
-          <p:cNvPr id="5" name="A 3B language model name"/>
-          <p:cNvSpPr txBox="1"/>
-          <p:nvPr/>
-        </p:nvSpPr>
-        <p:spPr>
-          <a:xfrm>
-            <a:off x="1188720" y="2423160"/>
-            <a:ext cx="4389120" cy="457200"/>
-          </a:xfrm>
-          <a:prstGeom prst="rect">
-            <a:avLst/>
-          </a:prstGeom>
-          <a:noFill/>
-          <a:ln/>
-        </p:spPr>
-        <p:txBody>
-          <a:bodyPr wrap="square" lIns="0" tIns="0" rIns="0" bIns="0" rtlCol="0" anchor="t"/>
-          <a:lstStyle/>
-          <a:p>
-            <a:pPr indent="0" marL="0">
-              <a:buNone/>
-            </a:pPr>
-            <a:r>
-              <a:rPr lang="en-US" sz="2400" b="1" dirty="0">
-                <a:solidFill>
-                  <a:srgbClr val="F5F5F7"/>
-                </a:solidFill>
-                <a:latin typeface="Arial" pitchFamily="34" charset="0"/>
-                <a:ea typeface="Arial" pitchFamily="34" charset="-122"/>
-                <a:cs typeface="Arial" pitchFamily="34" charset="-120"/>
-              </a:rPr>
-              <a:t>A 3B language model</a:t>
-            </a:r>
-            <a:endParaRPr lang="en-US" sz="2400" dirty="0"/>
-          </a:p>
-        </p:txBody>
-      </p:sp>
-      <p:sp>
-        <p:nvSpPr>
-          <p:cNvPr id="6" name="A 3B language model Scams caught label"/>
-          <p:cNvSpPr txBox="1"/>
-          <p:nvPr/>
-        </p:nvSpPr>
-        <p:spPr>
-          <a:xfrm>
-            <a:off x="1188720" y="3063240"/>
-            <a:ext cx="4389120" cy="274320"/>
-          </a:xfrm>
-          <a:prstGeom prst="rect">
-            <a:avLst/>
-          </a:prstGeom>
-          <a:noFill/>
-          <a:ln/>
-        </p:spPr>
-        <p:txBody>
-          <a:bodyPr wrap="square" lIns="0" tIns="0" rIns="0" bIns="0" rtlCol="0" anchor="t"/>
-          <a:lstStyle/>
-          <a:p>
-            <a:pPr indent="0" marL="0">
-              <a:buNone/>
-            </a:pPr>
-            <a:r>
-              <a:rPr lang="en-US" sz="1200" b="1" spc="150" kern="0" dirty="0">
+          <p:cNvPr id="4" name="bigger number 1"/>
+          <p:cNvSpPr txBox="1"/>
+          <p:nvPr/>
+        </p:nvSpPr>
+        <p:spPr>
+          <a:xfrm>
+            <a:off x="822960" y="1463040"/>
+            <a:ext cx="3291840" cy="640080"/>
+          </a:xfrm>
+          <a:prstGeom prst="rect">
+            <a:avLst/>
+          </a:prstGeom>
+          <a:noFill/>
+          <a:ln/>
+        </p:spPr>
+        <p:txBody>
+          <a:bodyPr wrap="square" lIns="0" tIns="0" rIns="0" bIns="0" rtlCol="0" anchor="t"/>
+          <a:lstStyle/>
+          <a:p>
+            <a:pPr indent="0" marL="0">
+              <a:buNone/>
+            </a:pPr>
+            <a:r>
+              <a:rPr lang="en-US" sz="4000" b="1" dirty="0">
                 <a:solidFill>
                   <a:srgbClr val="6E6E73"/>
                 </a:solidFill>
@@ -8874,77 +8999,38 @@
                 <a:ea typeface="Arial" pitchFamily="34" charset="-122"/>
                 <a:cs typeface="Arial" pitchFamily="34" charset="-120"/>
               </a:rPr>
-              <a:t>SCAMS CAUGHT</a:t>
-            </a:r>
-            <a:endParaRPr lang="en-US" sz="1200" dirty="0"/>
-          </a:p>
-        </p:txBody>
-      </p:sp>
-      <p:sp>
-        <p:nvSpPr>
-          <p:cNvPr id="7" name="A 3B language model Scams caught"/>
-          <p:cNvSpPr txBox="1"/>
-          <p:nvPr/>
-        </p:nvSpPr>
-        <p:spPr>
-          <a:xfrm>
-            <a:off x="1188720" y="3337560"/>
-            <a:ext cx="4389120" cy="548640"/>
-          </a:xfrm>
-          <a:prstGeom prst="rect">
-            <a:avLst/>
-          </a:prstGeom>
-          <a:noFill/>
-          <a:ln/>
-        </p:spPr>
-        <p:txBody>
-          <a:bodyPr wrap="square" lIns="0" tIns="0" rIns="0" bIns="0" rtlCol="0" anchor="t"/>
-          <a:lstStyle/>
-          <a:p>
-            <a:pPr indent="0" marL="0">
-              <a:buNone/>
-            </a:pPr>
-            <a:r>
-              <a:rPr lang="en-US" sz="3600" b="1" dirty="0">
-                <a:solidFill>
-                  <a:srgbClr val="F5F5F7"/>
-                </a:solidFill>
-                <a:latin typeface="Arial" pitchFamily="34" charset="0"/>
-                <a:ea typeface="Arial" pitchFamily="34" charset="-122"/>
-                <a:cs typeface="Arial" pitchFamily="34" charset="-120"/>
-              </a:rPr>
-              <a:t>99 of 103</a:t>
-            </a:r>
-            <a:endParaRPr lang="en-US" sz="3600" dirty="0"/>
-          </a:p>
-        </p:txBody>
-      </p:sp>
-      <p:sp>
-        <p:nvSpPr>
-          <p:cNvPr id="8" name="A 3B language model Genuine messages flagged label"/>
-          <p:cNvSpPr txBox="1"/>
-          <p:nvPr/>
-        </p:nvSpPr>
-        <p:spPr>
-          <a:xfrm>
-            <a:off x="1188720" y="3977640"/>
-            <a:ext cx="4389120" cy="274320"/>
-          </a:xfrm>
-          <a:prstGeom prst="rect">
-            <a:avLst/>
-          </a:prstGeom>
-          <a:noFill/>
-          <a:ln/>
-        </p:spPr>
-        <p:txBody>
-          <a:bodyPr wrap="square" lIns="0" tIns="0" rIns="0" bIns="0" rtlCol="0" anchor="t"/>
-          <a:lstStyle/>
-          <a:p>
-            <a:pPr indent="0" marL="0">
-              <a:buNone/>
-            </a:pPr>
-            <a:r>
-              <a:rPr lang="en-US" sz="1200" b="1" spc="150" kern="0" dirty="0">
+              <a:t>34 of 37</a:t>
+            </a:r>
+            <a:endParaRPr lang="en-US" sz="4000" dirty="0"/>
+          </a:p>
+        </p:txBody>
+      </p:sp>
+      <p:sp>
+        <p:nvSpPr>
+          <p:cNvPr id="5" name="bigger number 1 label"/>
+          <p:cNvSpPr txBox="1"/>
+          <p:nvPr/>
+        </p:nvSpPr>
+        <p:spPr>
+          <a:xfrm>
+            <a:off x="822960" y="2103120"/>
+            <a:ext cx="3291840" cy="640080"/>
+          </a:xfrm>
+          <a:prstGeom prst="rect">
+            <a:avLst/>
+          </a:prstGeom>
+          <a:noFill/>
+          <a:ln/>
+        </p:spPr>
+        <p:txBody>
+          <a:bodyPr wrap="square" lIns="0" tIns="0" rIns="0" bIns="0" rtlCol="0" anchor="t"/>
+          <a:lstStyle/>
+          <a:p>
+            <a:pPr indent="0" marL="0">
+              <a:buNone/>
+            </a:pPr>
+            <a:r>
+              <a:rPr lang="en-US" sz="1500" dirty="0">
                 <a:solidFill>
                   <a:srgbClr val="6E6E73"/>
                 </a:solidFill>
@@ -8952,73 +9038,30 @@
                 <a:ea typeface="Arial" pitchFamily="34" charset="-122"/>
                 <a:cs typeface="Arial" pitchFamily="34" charset="-120"/>
               </a:rPr>
-              <a:t>GENUINE MESSAGES FLAGGED</a:t>
-            </a:r>
-            <a:endParaRPr lang="en-US" sz="1200" dirty="0"/>
-          </a:p>
-        </p:txBody>
-      </p:sp>
-      <p:sp>
-        <p:nvSpPr>
-          <p:cNvPr id="9" name="A 3B language model Genuine messages flagged"/>
-          <p:cNvSpPr txBox="1"/>
-          <p:nvPr/>
-        </p:nvSpPr>
-        <p:spPr>
-          <a:xfrm>
-            <a:off x="1188720" y="4251960"/>
-            <a:ext cx="4389120" cy="548640"/>
-          </a:xfrm>
-          <a:prstGeom prst="rect">
-            <a:avLst/>
-          </a:prstGeom>
-          <a:noFill/>
-          <a:ln/>
-        </p:spPr>
-        <p:txBody>
-          <a:bodyPr wrap="square" lIns="0" tIns="0" rIns="0" bIns="0" rtlCol="0" anchor="t"/>
-          <a:lstStyle/>
-          <a:p>
-            <a:pPr indent="0" marL="0">
-              <a:buNone/>
-            </a:pPr>
-            <a:r>
-              <a:rPr lang="en-US" sz="3600" b="1" dirty="0">
-                <a:solidFill>
-                  <a:srgbClr val="FF5A52"/>
-                </a:solidFill>
-                <a:latin typeface="Arial" pitchFamily="34" charset="0"/>
-                <a:ea typeface="Arial" pitchFamily="34" charset="-122"/>
-                <a:cs typeface="Arial" pitchFamily="34" charset="-120"/>
-              </a:rPr>
-              <a:t>21 of 34</a:t>
-            </a:r>
-            <a:endParaRPr lang="en-US" sz="3600" dirty="0"/>
-          </a:p>
-        </p:txBody>
-      </p:sp>
-      <p:sp>
-        <p:nvSpPr>
-          <p:cNvPr id="10" name="Sahayak panel"/>
+              <a:t>on messages we wrote</a:t>
+            </a:r>
+            <a:endParaRPr lang="en-US" sz="1500" dirty="0"/>
+          </a:p>
+        </p:txBody>
+      </p:sp>
+      <p:sp>
+        <p:nvSpPr>
+          <p:cNvPr id="6" name="bigger number 2 rule"/>
           <p:cNvSpPr/>
           <p:nvPr/>
         </p:nvSpPr>
         <p:spPr>
           <a:xfrm>
-            <a:off x="6172200" y="2148840"/>
-            <a:ext cx="5120640" cy="2788920"/>
-          </a:xfrm>
-          <a:prstGeom prst="roundRect">
-            <a:avLst>
-              <a:gd name="adj" fmla="val 5902"/>
-            </a:avLst>
-          </a:prstGeom>
-          <a:solidFill>
-            <a:srgbClr val="111B2B"/>
-          </a:solidFill>
-          <a:ln w="12700">
+            <a:off x="822960" y="2926080"/>
+            <a:ext cx="3291840" cy="0"/>
+          </a:xfrm>
+          <a:prstGeom prst="line">
+            <a:avLst/>
+          </a:prstGeom>
+          <a:noFill/>
+          <a:ln w="9525">
             <a:solidFill>
-              <a:srgbClr val="2F4A75"/>
+              <a:srgbClr val="3A3A3E"/>
             </a:solidFill>
             <a:prstDash val="solid"/>
           </a:ln>
@@ -9026,30 +9069,131 @@
       </p:sp>
       <p:sp>
         <p:nvSpPr>
-          <p:cNvPr id="11" name="Sahayak name"/>
-          <p:cNvSpPr txBox="1"/>
-          <p:nvPr/>
-        </p:nvSpPr>
-        <p:spPr>
-          <a:xfrm>
-            <a:off x="6537960" y="2423160"/>
-            <a:ext cx="4389120" cy="457200"/>
-          </a:xfrm>
-          <a:prstGeom prst="rect">
-            <a:avLst/>
-          </a:prstGeom>
-          <a:noFill/>
-          <a:ln/>
-        </p:spPr>
-        <p:txBody>
-          <a:bodyPr wrap="square" lIns="0" tIns="0" rIns="0" bIns="0" rtlCol="0" anchor="t"/>
-          <a:lstStyle/>
-          <a:p>
-            <a:pPr indent="0" marL="0">
-              <a:buNone/>
-            </a:pPr>
-            <a:r>
-              <a:rPr lang="en-US" sz="2400" b="1" dirty="0">
+          <p:cNvPr id="7" name="bigger number 2"/>
+          <p:cNvSpPr txBox="1"/>
+          <p:nvPr/>
+        </p:nvSpPr>
+        <p:spPr>
+          <a:xfrm>
+            <a:off x="822960" y="3063240"/>
+            <a:ext cx="3291840" cy="640080"/>
+          </a:xfrm>
+          <a:prstGeom prst="rect">
+            <a:avLst/>
+          </a:prstGeom>
+          <a:noFill/>
+          <a:ln/>
+        </p:spPr>
+        <p:txBody>
+          <a:bodyPr wrap="square" lIns="0" tIns="0" rIns="0" bIns="0" rtlCol="0" anchor="t"/>
+          <a:lstStyle/>
+          <a:p>
+            <a:pPr indent="0" marL="0">
+              <a:buNone/>
+            </a:pPr>
+            <a:r>
+              <a:rPr lang="en-US" sz="4000" b="1" dirty="0">
+                <a:solidFill>
+                  <a:srgbClr val="6E6E73"/>
+                </a:solidFill>
+                <a:latin typeface="Arial" pitchFamily="34" charset="0"/>
+                <a:ea typeface="Arial" pitchFamily="34" charset="-122"/>
+                <a:cs typeface="Arial" pitchFamily="34" charset="-120"/>
+              </a:rPr>
+              <a:t>92 of 103</a:t>
+            </a:r>
+            <a:endParaRPr lang="en-US" sz="4000" dirty="0"/>
+          </a:p>
+        </p:txBody>
+      </p:sp>
+      <p:sp>
+        <p:nvSpPr>
+          <p:cNvPr id="8" name="bigger number 2 label"/>
+          <p:cNvSpPr txBox="1"/>
+          <p:nvPr/>
+        </p:nvSpPr>
+        <p:spPr>
+          <a:xfrm>
+            <a:off x="822960" y="3703320"/>
+            <a:ext cx="3291840" cy="640080"/>
+          </a:xfrm>
+          <a:prstGeom prst="rect">
+            <a:avLst/>
+          </a:prstGeom>
+          <a:noFill/>
+          <a:ln/>
+        </p:spPr>
+        <p:txBody>
+          <a:bodyPr wrap="square" lIns="0" tIns="0" rIns="0" bIns="0" rtlCol="0" anchor="t"/>
+          <a:lstStyle/>
+          <a:p>
+            <a:pPr indent="0" marL="0">
+              <a:buNone/>
+            </a:pPr>
+            <a:r>
+              <a:rPr lang="en-US" sz="1500" dirty="0">
+                <a:solidFill>
+                  <a:srgbClr val="6E6E73"/>
+                </a:solidFill>
+                <a:latin typeface="Arial" pitchFamily="34" charset="0"/>
+                <a:ea typeface="Arial" pitchFamily="34" charset="-122"/>
+                <a:cs typeface="Arial" pitchFamily="34" charset="-120"/>
+              </a:rPr>
+              <a:t>on a blind red team, written by an AI that never saw our code</a:t>
+            </a:r>
+            <a:endParaRPr lang="en-US" sz="1500" dirty="0"/>
+          </a:p>
+        </p:txBody>
+      </p:sp>
+      <p:sp>
+        <p:nvSpPr>
+          <p:cNvPr id="9" name="divider"/>
+          <p:cNvSpPr/>
+          <p:nvPr/>
+        </p:nvSpPr>
+        <p:spPr>
+          <a:xfrm>
+            <a:off x="4572000" y="914400"/>
+            <a:ext cx="0" cy="4023360"/>
+          </a:xfrm>
+          <a:prstGeom prst="line">
+            <a:avLst/>
+          </a:prstGeom>
+          <a:noFill/>
+          <a:ln w="9525">
+            <a:solidFill>
+              <a:srgbClr val="3A3A3E"/>
+            </a:solidFill>
+            <a:prstDash val="solid"/>
+          </a:ln>
+        </p:spPr>
+      </p:sp>
+      <p:sp>
+        <p:nvSpPr>
+          <p:cNvPr id="10" name="eyebrow"/>
+          <p:cNvSpPr txBox="1"/>
+          <p:nvPr/>
+        </p:nvSpPr>
+        <p:spPr>
+          <a:xfrm>
+            <a:off x="5120640" y="868680"/>
+            <a:ext cx="5486400" cy="310896"/>
+          </a:xfrm>
+          <a:prstGeom prst="rect">
+            <a:avLst/>
+          </a:prstGeom>
+          <a:noFill/>
+          <a:ln/>
+        </p:spPr>
+        <p:txBody>
+          <a:bodyPr wrap="square" lIns="0" tIns="0" rIns="0" bIns="0" rtlCol="0" anchor="t"/>
+          <a:lstStyle/>
+          <a:p>
+            <a:pPr indent="0" marL="0">
+              <a:buNone/>
+            </a:pPr>
+            <a:r>
+              <a:rPr lang="en-US" sz="1400" b="1" spc="300" kern="0" dirty="0">
                 <a:solidFill>
                   <a:srgbClr val="6FA8FF"/>
                 </a:solidFill>
@@ -9057,77 +9201,77 @@
                 <a:ea typeface="Arial" pitchFamily="34" charset="-122"/>
                 <a:cs typeface="Arial" pitchFamily="34" charset="-120"/>
               </a:rPr>
-              <a:t>Sahayak</a:t>
-            </a:r>
-            <a:endParaRPr lang="en-US" sz="2400" dirty="0"/>
-          </a:p>
-        </p:txBody>
-      </p:sp>
-      <p:sp>
-        <p:nvSpPr>
-          <p:cNvPr id="12" name="Sahayak Scams caught label"/>
-          <p:cNvSpPr txBox="1"/>
-          <p:nvPr/>
-        </p:nvSpPr>
-        <p:spPr>
-          <a:xfrm>
-            <a:off x="6537960" y="3063240"/>
-            <a:ext cx="4389120" cy="274320"/>
-          </a:xfrm>
-          <a:prstGeom prst="rect">
-            <a:avLst/>
-          </a:prstGeom>
-          <a:noFill/>
-          <a:ln/>
-        </p:spPr>
-        <p:txBody>
-          <a:bodyPr wrap="square" lIns="0" tIns="0" rIns="0" bIns="0" rtlCol="0" anchor="t"/>
-          <a:lstStyle/>
-          <a:p>
-            <a:pPr indent="0" marL="0">
-              <a:buNone/>
-            </a:pPr>
-            <a:r>
-              <a:rPr lang="en-US" sz="1200" b="1" spc="150" kern="0" dirty="0">
-                <a:solidFill>
-                  <a:srgbClr val="6E6E73"/>
-                </a:solidFill>
-                <a:latin typeface="Arial" pitchFamily="34" charset="0"/>
-                <a:ea typeface="Arial" pitchFamily="34" charset="-122"/>
-                <a:cs typeface="Arial" pitchFamily="34" charset="-120"/>
-              </a:rPr>
-              <a:t>SCAMS CAUGHT</a:t>
-            </a:r>
-            <a:endParaRPr lang="en-US" sz="1200" dirty="0"/>
-          </a:p>
-        </p:txBody>
-      </p:sp>
-      <p:sp>
-        <p:nvSpPr>
-          <p:cNvPr id="13" name="Sahayak Scams caught"/>
-          <p:cNvSpPr txBox="1"/>
-          <p:nvPr/>
-        </p:nvSpPr>
-        <p:spPr>
-          <a:xfrm>
-            <a:off x="6537960" y="3337560"/>
-            <a:ext cx="4389120" cy="548640"/>
-          </a:xfrm>
-          <a:prstGeom prst="rect">
-            <a:avLst/>
-          </a:prstGeom>
-          <a:noFill/>
-          <a:ln/>
-        </p:spPr>
-        <p:txBody>
-          <a:bodyPr wrap="square" lIns="0" tIns="0" rIns="0" bIns="0" rtlCol="0" anchor="t"/>
-          <a:lstStyle/>
-          <a:p>
-            <a:pPr indent="0" marL="0">
-              <a:buNone/>
-            </a:pPr>
-            <a:r>
-              <a:rPr lang="en-US" sz="3600" b="1" dirty="0">
+              <a:t>THE HONEST NUMBER</a:t>
+            </a:r>
+            <a:endParaRPr lang="en-US" sz="1400" dirty="0"/>
+          </a:p>
+        </p:txBody>
+      </p:sp>
+      <p:sp>
+        <p:nvSpPr>
+          <p:cNvPr id="11" name="headline number"/>
+          <p:cNvSpPr txBox="1"/>
+          <p:nvPr/>
+        </p:nvSpPr>
+        <p:spPr>
+          <a:xfrm>
+            <a:off x="5074920" y="1143000"/>
+            <a:ext cx="6400800" cy="2103120"/>
+          </a:xfrm>
+          <a:prstGeom prst="rect">
+            <a:avLst/>
+          </a:prstGeom>
+          <a:noFill/>
+          <a:ln/>
+        </p:spPr>
+        <p:txBody>
+          <a:bodyPr wrap="square" lIns="0" tIns="0" rIns="0" bIns="0" rtlCol="0" anchor="ctr"/>
+          <a:lstStyle/>
+          <a:p>
+            <a:pPr indent="0" marL="0">
+              <a:buNone/>
+            </a:pPr>
+            <a:r>
+              <a:rPr lang="en-US" sz="15000" b="1" dirty="0">
+                <a:solidFill>
+                  <a:srgbClr val="6FA8FF"/>
+                </a:solidFill>
+                <a:latin typeface="Arial" pitchFamily="34" charset="0"/>
+                <a:ea typeface="Arial" pitchFamily="34" charset="-122"/>
+                <a:cs typeface="Arial" pitchFamily="34" charset="-120"/>
+              </a:rPr>
+              <a:t>7 in 10</a:t>
+            </a:r>
+            <a:endParaRPr lang="en-US" sz="15000" dirty="0"/>
+          </a:p>
+        </p:txBody>
+      </p:sp>
+      <p:sp>
+        <p:nvSpPr>
+          <p:cNvPr id="12" name="what it counts"/>
+          <p:cNvSpPr txBox="1"/>
+          <p:nvPr/>
+        </p:nvSpPr>
+        <p:spPr>
+          <a:xfrm>
+            <a:off x="5120640" y="3383280"/>
+            <a:ext cx="6309360" cy="868680"/>
+          </a:xfrm>
+          <a:prstGeom prst="rect">
+            <a:avLst/>
+          </a:prstGeom>
+          <a:noFill/>
+          <a:ln/>
+        </p:spPr>
+        <p:txBody>
+          <a:bodyPr wrap="square" lIns="0" tIns="0" rIns="0" bIns="0" rtlCol="0" anchor="t"/>
+          <a:lstStyle/>
+          <a:p>
+            <a:pPr indent="0" marL="0">
+              <a:buNone/>
+            </a:pPr>
+            <a:r>
+              <a:rPr lang="en-US" sz="2500" b="1" dirty="0">
                 <a:solidFill>
                   <a:srgbClr val="F5F5F7"/>
                 </a:solidFill>
@@ -9135,77 +9279,114 @@
                 <a:ea typeface="Arial" pitchFamily="34" charset="-122"/>
                 <a:cs typeface="Arial" pitchFamily="34" charset="-120"/>
               </a:rPr>
-              <a:t>67 of 103</a:t>
-            </a:r>
-            <a:endParaRPr lang="en-US" sz="3600" dirty="0"/>
-          </a:p>
-        </p:txBody>
-      </p:sp>
-      <p:sp>
-        <p:nvSpPr>
-          <p:cNvPr id="14" name="Sahayak Genuine messages flagged label"/>
-          <p:cNvSpPr txBox="1"/>
-          <p:nvPr/>
-        </p:nvSpPr>
-        <p:spPr>
-          <a:xfrm>
-            <a:off x="6537960" y="3977640"/>
-            <a:ext cx="4389120" cy="274320"/>
-          </a:xfrm>
-          <a:prstGeom prst="rect">
-            <a:avLst/>
-          </a:prstGeom>
-          <a:noFill/>
-          <a:ln/>
-        </p:spPr>
-        <p:txBody>
-          <a:bodyPr wrap="square" lIns="0" tIns="0" rIns="0" bIns="0" rtlCol="0" anchor="t"/>
-          <a:lstStyle/>
-          <a:p>
-            <a:pPr indent="0" marL="0">
-              <a:buNone/>
-            </a:pPr>
-            <a:r>
-              <a:rPr lang="en-US" sz="1200" b="1" spc="150" kern="0" dirty="0">
-                <a:solidFill>
-                  <a:srgbClr val="6E6E73"/>
-                </a:solidFill>
-                <a:latin typeface="Arial" pitchFamily="34" charset="0"/>
-                <a:ea typeface="Arial" pitchFamily="34" charset="-122"/>
-                <a:cs typeface="Arial" pitchFamily="34" charset="-120"/>
-              </a:rPr>
-              <a:t>GENUINE MESSAGES FLAGGED</a:t>
-            </a:r>
-            <a:endParaRPr lang="en-US" sz="1200" dirty="0"/>
-          </a:p>
-        </p:txBody>
-      </p:sp>
-      <p:sp>
-        <p:nvSpPr>
-          <p:cNvPr id="15" name="Sahayak Genuine messages flagged"/>
-          <p:cNvSpPr txBox="1"/>
-          <p:nvPr/>
-        </p:nvSpPr>
-        <p:spPr>
-          <a:xfrm>
-            <a:off x="6537960" y="4251960"/>
-            <a:ext cx="4389120" cy="548640"/>
-          </a:xfrm>
-          <a:prstGeom prst="rect">
-            <a:avLst/>
-          </a:prstGeom>
-          <a:noFill/>
-          <a:ln/>
-        </p:spPr>
-        <p:txBody>
-          <a:bodyPr wrap="square" lIns="0" tIns="0" rIns="0" bIns="0" rtlCol="0" anchor="t"/>
-          <a:lstStyle/>
-          <a:p>
-            <a:pPr indent="0" marL="0">
-              <a:buNone/>
-            </a:pPr>
-            <a:r>
-              <a:rPr lang="en-US" sz="3600" b="1" dirty="0">
+              <a:t>scams caught on 137 real messages people in India received.</a:t>
+            </a:r>
+            <a:endParaRPr lang="en-US" sz="2500" dirty="0"/>
+          </a:p>
+        </p:txBody>
+      </p:sp>
+      <p:sp>
+        <p:nvSpPr>
+          <p:cNvPr id="13" name="scored once"/>
+          <p:cNvSpPr txBox="1"/>
+          <p:nvPr/>
+        </p:nvSpPr>
+        <p:spPr>
+          <a:xfrm>
+            <a:off x="5120640" y="4297680"/>
+            <a:ext cx="6309360" cy="411480"/>
+          </a:xfrm>
+          <a:prstGeom prst="rect">
+            <a:avLst/>
+          </a:prstGeom>
+          <a:noFill/>
+          <a:ln/>
+        </p:spPr>
+        <p:txBody>
+          <a:bodyPr wrap="square" lIns="0" tIns="0" rIns="0" bIns="0" rtlCol="0" anchor="t"/>
+          <a:lstStyle/>
+          <a:p>
+            <a:pPr indent="0" marL="0">
+              <a:buNone/>
+            </a:pPr>
+            <a:r>
+              <a:rPr lang="en-US" sz="2200" dirty="0">
+                <a:solidFill>
+                  <a:srgbClr val="A1A1A6"/>
+                </a:solidFill>
+                <a:latin typeface="Arial" pitchFamily="34" charset="0"/>
+                <a:ea typeface="Arial" pitchFamily="34" charset="-122"/>
+                <a:cs typeface="Arial" pitchFamily="34" charset="-120"/>
+              </a:rPr>
+              <a:t>Scored once.</a:t>
+            </a:r>
+            <a:endParaRPr lang="en-US" sz="2200" dirty="0"/>
+          </a:p>
+        </p:txBody>
+      </p:sp>
+      <p:sp>
+        <p:nvSpPr>
+          <p:cNvPr id="14" name="not yet rule"/>
+          <p:cNvSpPr/>
+          <p:nvPr/>
+        </p:nvSpPr>
+        <p:spPr>
+          <a:xfrm>
+            <a:off x="822960" y="5257800"/>
+            <a:ext cx="10545775" cy="0"/>
+          </a:xfrm>
+          <a:prstGeom prst="line">
+            <a:avLst/>
+          </a:prstGeom>
+          <a:noFill/>
+          <a:ln w="9525">
+            <a:solidFill>
+              <a:srgbClr val="3A3A3E"/>
+            </a:solidFill>
+            <a:prstDash val="solid"/>
+          </a:ln>
+        </p:spPr>
+      </p:sp>
+      <p:sp>
+        <p:nvSpPr>
+          <p:cNvPr id="15" name="not yet"/>
+          <p:cNvSpPr txBox="1"/>
+          <p:nvPr/>
+        </p:nvSpPr>
+        <p:spPr>
+          <a:xfrm>
+            <a:off x="822960" y="5394960"/>
+            <a:ext cx="10545775" cy="411480"/>
+          </a:xfrm>
+          <a:prstGeom prst="rect">
+            <a:avLst/>
+          </a:prstGeom>
+          <a:noFill/>
+          <a:ln/>
+        </p:spPr>
+        <p:txBody>
+          <a:bodyPr wrap="square" lIns="0" tIns="0" rIns="0" bIns="0" rtlCol="0" anchor="t"/>
+          <a:lstStyle/>
+          <a:p>
+            <a:pPr indent="0" marL="0">
+              <a:buNone/>
+            </a:pPr>
+            <a:r>
+              <a:rPr lang="en-US" sz="2100" b="1" dirty="0">
+                <a:solidFill>
+                  <a:srgbClr val="E2C28A"/>
+                </a:solidFill>
+                <a:latin typeface="Arial" pitchFamily="34" charset="0"/>
+                <a:ea typeface="Arial" pitchFamily="34" charset="-122"/>
+                <a:cs typeface="Arial" pitchFamily="34" charset="-120"/>
+              </a:rPr>
+              <a:t>Not yet: </a:t>
+            </a:r>
+            <a:pPr indent="0" marL="0">
+              <a:buNone/>
+            </a:pPr>
+            <a:r>
+              <a:rPr lang="en-US" sz="2100" dirty="0">
                 <a:solidFill>
                   <a:srgbClr val="F5F5F7"/>
                 </a:solidFill>
@@ -9213,71 +9394,15 @@
                 <a:ea typeface="Arial" pitchFamily="34" charset="-122"/>
                 <a:cs typeface="Arial" pitchFamily="34" charset="-120"/>
               </a:rPr>
-              <a:t>11 of 34</a:t>
-            </a:r>
-            <a:endParaRPr lang="en-US" sz="3600" dirty="0"/>
-          </a:p>
-        </p:txBody>
-      </p:sp>
-      <p:sp>
-        <p:nvSpPr>
-          <p:cNvPr id="16" name="conclusion"/>
-          <p:cNvSpPr txBox="1"/>
-          <p:nvPr/>
-        </p:nvSpPr>
-        <p:spPr>
-          <a:xfrm>
-            <a:off x="822960" y="5120640"/>
-            <a:ext cx="10545775" cy="868680"/>
-          </a:xfrm>
-          <a:prstGeom prst="rect">
-            <a:avLst/>
-          </a:prstGeom>
-          <a:noFill/>
-          <a:ln/>
-        </p:spPr>
-        <p:txBody>
-          <a:bodyPr wrap="square" lIns="0" tIns="0" rIns="0" bIns="0" rtlCol="0" anchor="t"/>
-          <a:lstStyle/>
-          <a:p>
-            <a:pPr indent="0" marL="0">
-              <a:buNone/>
-            </a:pPr>
-            <a:r>
-              <a:rPr lang="en-US" sz="2400" b="1" dirty="0">
-                <a:solidFill>
-                  <a:srgbClr val="A1A1A6"/>
-                </a:solidFill>
-                <a:latin typeface="Arial" pitchFamily="34" charset="0"/>
-                <a:ea typeface="Arial" pitchFamily="34" charset="-122"/>
-                <a:cs typeface="Arial" pitchFamily="34" charset="-120"/>
-              </a:rPr>
-              <a:t>A warning that cries wolf gets ignored.</a:t>
-            </a:r>
-            <a:endParaRPr lang="en-US" sz="2400" dirty="0"/>
-          </a:p>
-          <a:p>
-            <a:pPr indent="0" marL="0">
-              <a:buNone/>
-            </a:pPr>
-            <a:r>
-              <a:rPr lang="en-US" sz="2400" b="1" dirty="0">
-                <a:solidFill>
-                  <a:srgbClr val="6FA8FF"/>
-                </a:solidFill>
-                <a:latin typeface="Arial" pitchFamily="34" charset="0"/>
-                <a:ea typeface="Arial" pitchFamily="34" charset="-122"/>
-                <a:cs typeface="Arial" pitchFamily="34" charset="-120"/>
-              </a:rPr>
-              <a:t>So rules decide, and every answer says why.</a:t>
-            </a:r>
-            <a:endParaRPr lang="en-US" sz="2400" dirty="0"/>
-          </a:p>
-        </p:txBody>
-      </p:sp>
-      <p:sp>
-        <p:nvSpPr>
-          <p:cNvPr id="17" name="source"/>
+              <a:t>real users, and messages from people’s own phones. That’s next.</a:t>
+            </a:r>
+            <a:endParaRPr lang="en-US" sz="2100" dirty="0"/>
+          </a:p>
+        </p:txBody>
+      </p:sp>
+      <p:sp>
+        <p:nvSpPr>
+          <p:cNvPr id="16" name="source"/>
           <p:cNvSpPr txBox="1"/>
           <p:nvPr/>
         </p:nvSpPr>
@@ -9308,7 +9433,7 @@
                 <a:ea typeface="Arial" pitchFamily="34" charset="-122"/>
                 <a:cs typeface="Arial" pitchFamily="34" charset="-120"/>
               </a:rPr>
-              <a:t>qwen2.5:3b, zero-shot, on the same 137 real published messages, first runs, 7 Oct 2026. In languages Sahayak can’t read yet, the model caught 14 of 15 scams.</a:t>
+              <a:t>In Hindi, English and Hinglish: 67 of 97 scams caught, 11 of 34 genuine flagged; published by the Income Tax portal, PIB Fact Check and fact-checkers · first runs, bench/results</a:t>
             </a:r>
             <a:endParaRPr lang="en-US" sz="1050" dirty="0"/>
           </a:p>

--- a/docs/deck/Sahayak_Keynote_v5.pptx
+++ b/docs/deck/Sahayak_Keynote_v5.pptx
@@ -120,72 +120,72 @@
   <p:extLst>
     <p:ext uri="{521415D9-36F7-43E2-AB2F-B90AF26B5E84}">
       <p14:sectionLst xmlns:p14="http://schemas.microsoft.com/office/powerpoint/2010/main">
-        <p14:section name="The message" id="{f3357668-4d6e-ff7d-3c1e-243e3222afa4}">
+        <p14:section name="The message" id="{49aa679d-7d06-e7a4-acdb-5e0177f5d0ae}">
           <p14:sldIdLst>
             <p14:sldId id="256"/>
           </p14:sldIdLst>
         </p14:section>
-        <p14:section name="Who reads it" id="{e63bdcd9-2913-d9ee-f241-567fa18ef701}">
+        <p14:section name="Who reads it" id="{0dbba5ee-b91b-0f27-eded-5063448cfee9}">
           <p14:sldIdLst>
             <p14:sldId id="257"/>
           </p14:sldIdLst>
         </p14:section>
-        <p14:section name="Every minute" id="{a89f94f2-d4b3-86cb-fe12-b4b85dc11b02}">
+        <p14:section name="Every minute" id="{5d4d0fd2-53ee-b18f-207c-659893ca60b3}">
           <p14:sldIdLst>
             <p14:sldId id="258"/>
           </p14:sldIdLst>
         </p14:section>
-        <p14:section name="Introducing Sahayak" id="{1d03d860-787b-d953-49fc-9b63904cbad0}">
+        <p14:section name="Introducing Sahayak" id="{2ba57fc1-dc5b-3b55-55d6-0f92c2ccff89}">
           <p14:sldIdLst>
             <p14:sldId id="259"/>
           </p14:sldIdLst>
         </p14:section>
-        <p14:section name="It tells her why" id="{cb9c9a6e-3090-b225-b7a0-ea142e59aa7b}">
+        <p14:section name="It tells her why" id="{af4af4fa-5849-913d-adab-f20666263e5e}">
           <p14:sldIdLst>
             <p14:sldId id="260"/>
           </p14:sldIdLst>
         </p14:section>
-        <p14:section name="What she is owed" id="{dd4d9e4b-c9bd-329d-0e17-be0ccdb458de}">
+        <p14:section name="What she is owed" id="{357c36a2-11d7-f1c6-b0bf-0bff62619b8a}">
           <p14:sldIdLst>
             <p14:sldId id="261"/>
           </p14:sldIdLst>
         </p14:section>
-        <p14:section name="How it works" id="{7f1a7c5e-24e5-5504-9841-1c87eb0dd541}">
+        <p14:section name="How it works" id="{245ffadb-cb3c-f3d5-3c05-323d9e3ea5c7}">
           <p14:sldIdLst>
             <p14:sldId id="262"/>
           </p14:sldIdLst>
         </p14:section>
-        <p14:section name="Why rules decide" id="{206d4183-4621-7d3e-04ff-9da9665b7923}">
+        <p14:section name="Why rules decide" id="{7e3e9699-2cbe-bcaa-3798-320df2092ef9}">
           <p14:sldIdLst>
             <p14:sldId id="263"/>
           </p14:sldIdLst>
         </p14:section>
-        <p14:section name="The honest number" id="{4d0f9a1f-dab4-7f98-7a2f-8753f77b2cb7}">
+        <p14:section name="The honest number" id="{e64c4381-1a17-669f-2323-6ef507713b5b}">
           <p14:sldIdLst>
             <p14:sldId id="264"/>
           </p14:sldIdLst>
         </p14:section>
-        <p14:section name="The pilot" id="{534112f2-29d3-b93b-b299-b7dfb18e82b8}">
+        <p14:section name="The pilot" id="{e863f05b-c1a9-a7d8-e61c-15407c6d51cf}">
           <p14:sldIdLst>
             <p14:sldId id="265"/>
           </p14:sldIdLst>
         </p14:section>
-        <p14:section name="The ask" id="{864aa731-9c78-7eb0-1868-87a2d8384dd7}">
+        <p14:section name="The ask" id="{96aae4a8-3d6c-613f-8576-0a33d732b6da}">
           <p14:sldIdLst>
             <p14:sldId id="266"/>
           </p14:sldIdLst>
         </p14:section>
-        <p14:section name="One more thing" id="{a3810166-43b9-a6bc-24db-f9a4eb474489}">
+        <p14:section name="One more thing" id="{833e6b93-8755-a61c-51e3-4ab480cc9373}">
           <p14:sldIdLst>
             <p14:sldId id="267"/>
           </p14:sldIdLst>
         </p14:section>
-        <p14:section name="Someone to ask" id="{7954f74c-1440-85d1-3594-adb9f7c1d7cd}">
+        <p14:section name="Someone to ask" id="{eb4e867c-0156-a046-2e94-4fc271defa35}">
           <p14:sldIdLst>
             <p14:sldId id="268"/>
           </p14:sldIdLst>
         </p14:section>
-        <p14:section name="Try it yourself" id="{cac7665d-4b20-ac8f-c45b-ac25e4a359cf}">
+        <p14:section name="Try it yourself" id="{ace00059-6b9d-48fa-ba6f-3f85600e3dbb}">
           <p14:sldIdLst>
             <p14:sldId id="269"/>
           </p14:sldIdLst>
@@ -685,9 +685,9 @@
           <a:p>
             <a:r>
               <a:rPr lang="en-US" dirty="0"/>
-              <a:t>SHOW: One district: 20 villages, 50 counters, six months, about ₹39 lakh. The next 30 days.
+              <a:t>SHOW: One district: 20 villages, 50 counters, six months, and ₹25–35k for a CSC’s computer, once. The next 30 days.
 DO: Click.
-ISHMIIT: So, the pilot. One district. Twenty villages. Fifty counters. Six months. About thirty-nine lakh rupees, and the biggest share goes to the local operator at each counter.</a:t>
+ISHMIIT: So, the pilot. One district. Twenty villages. Fifty counters. Six months. Each CSC needs one computer, twenty-five to thirty-five thousand rupees, once. After that, every check costs nothing.</a:t>
             </a:r>
             <a:endParaRPr lang="en-US" dirty="0"/>
           </a:p>
@@ -2444,45 +2444,6 @@
           </a:p>
         </p:txBody>
       </p:sp>
-      <p:sp>
-        <p:nvSpPr>
-          <p:cNvPr id="9" name="source"/>
-          <p:cNvSpPr txBox="1"/>
-          <p:nvPr/>
-        </p:nvSpPr>
-        <p:spPr>
-          <a:xfrm>
-            <a:off x="822960" y="6400800"/>
-            <a:ext cx="10545775" cy="256032"/>
-          </a:xfrm>
-          <a:prstGeom prst="rect">
-            <a:avLst/>
-          </a:prstGeom>
-          <a:noFill/>
-          <a:ln/>
-        </p:spPr>
-        <p:txBody>
-          <a:bodyPr wrap="square" lIns="0" tIns="0" rIns="0" bIns="0" rtlCol="0" anchor="t"/>
-          <a:lstStyle/>
-          <a:p>
-            <a:pPr indent="0" marL="0">
-              <a:buNone/>
-            </a:pPr>
-            <a:r>
-              <a:rPr lang="en-US" sz="1050" dirty="0">
-                <a:solidFill>
-                  <a:srgbClr val="6E6E73"/>
-                </a:solidFill>
-                <a:latin typeface="Arial" pitchFamily="34" charset="0"/>
-                <a:ea typeface="Arial" pitchFamily="34" charset="-122"/>
-                <a:cs typeface="Arial" pitchFamily="34" charset="-120"/>
-              </a:rPr>
-              <a:t>A demo message, written by the team in the style of real KYC scams</a:t>
-            </a:r>
-            <a:endParaRPr lang="en-US" sz="1050" dirty="0"/>
-          </a:p>
-        </p:txBody>
-      </p:sp>
     </p:spTree>
   </p:cSld>
   <p:clrMapOvr>
@@ -2945,7 +2906,7 @@
                 <a:ea typeface="Arial" pitchFamily="34" charset="-122"/>
                 <a:cs typeface="Arial" pitchFamily="34" charset="-120"/>
               </a:rPr>
-              <a:t>₹39 lakh</a:t>
+              <a:t>₹25–35k</a:t>
             </a:r>
             <a:endParaRPr lang="en-US" sz="5200" dirty="0"/>
           </a:p>
@@ -2984,7 +2945,7 @@
                 <a:ea typeface="Arial" pitchFamily="34" charset="-122"/>
                 <a:cs typeface="Arial" pitchFamily="34" charset="-120"/>
               </a:rPr>
-              <a:t>estimated</a:t>
+              <a:t>a CSC’s computer, once</a:t>
             </a:r>
             <a:endParaRPr lang="en-US" sz="1800" dirty="0"/>
           </a:p>
@@ -3320,45 +3281,6 @@
               <a:t>A district partner</a:t>
             </a:r>
             <a:endParaRPr lang="en-US" sz="1900" dirty="0"/>
-          </a:p>
-        </p:txBody>
-      </p:sp>
-      <p:sp>
-        <p:nvSpPr>
-          <p:cNvPr id="26" name="source"/>
-          <p:cNvSpPr txBox="1"/>
-          <p:nvPr/>
-        </p:nvSpPr>
-        <p:spPr>
-          <a:xfrm>
-            <a:off x="822960" y="6400800"/>
-            <a:ext cx="10545775" cy="256032"/>
-          </a:xfrm>
-          <a:prstGeom prst="rect">
-            <a:avLst/>
-          </a:prstGeom>
-          <a:noFill/>
-          <a:ln/>
-        </p:spPr>
-        <p:txBody>
-          <a:bodyPr wrap="square" lIns="0" tIns="0" rIns="0" bIns="0" rtlCol="0" anchor="t"/>
-          <a:lstStyle/>
-          <a:p>
-            <a:pPr indent="0" marL="0">
-              <a:buNone/>
-            </a:pPr>
-            <a:r>
-              <a:rPr lang="en-US" sz="1050" dirty="0">
-                <a:solidFill>
-                  <a:srgbClr val="6E6E73"/>
-                </a:solidFill>
-                <a:latin typeface="Arial" pitchFamily="34" charset="0"/>
-                <a:ea typeface="Arial" pitchFamily="34" charset="-122"/>
-                <a:cs typeface="Arial" pitchFamily="34" charset="-120"/>
-              </a:rPr>
-              <a:t>Estimates, not quotes: the team’s line-item budget, 7 Oct 2026 (₹39.2 lakh). At 500 counters, about ₹24,000 a counter a year; the operator’s ₹9,600 is the biggest part.</a:t>
-            </a:r>
-            <a:endParaRPr lang="en-US" sz="1050" dirty="0"/>
           </a:p>
         </p:txBody>
       </p:sp>
@@ -3732,45 +3654,6 @@
           </a:p>
         </p:txBody>
       </p:sp>
-      <p:sp>
-        <p:nvSpPr>
-          <p:cNvPr id="11" name="source"/>
-          <p:cNvSpPr txBox="1"/>
-          <p:nvPr/>
-        </p:nvSpPr>
-        <p:spPr>
-          <a:xfrm>
-            <a:off x="822960" y="6400800"/>
-            <a:ext cx="10545775" cy="256032"/>
-          </a:xfrm>
-          <a:prstGeom prst="rect">
-            <a:avLst/>
-          </a:prstGeom>
-          <a:noFill/>
-          <a:ln/>
-        </p:spPr>
-        <p:txBody>
-          <a:bodyPr wrap="square" lIns="0" tIns="0" rIns="0" bIns="0" rtlCol="0" anchor="t"/>
-          <a:lstStyle/>
-          <a:p>
-            <a:pPr indent="0" marL="0">
-              <a:buNone/>
-            </a:pPr>
-            <a:r>
-              <a:rPr lang="en-US" sz="1050" dirty="0">
-                <a:solidFill>
-                  <a:srgbClr val="6E6E73"/>
-                </a:solidFill>
-                <a:latin typeface="Arial" pitchFamily="34" charset="0"/>
-                <a:ea typeface="Arial" pitchFamily="34" charset="-122"/>
-                <a:cs typeface="Arial" pitchFamily="34" charset="-120"/>
-              </a:rPr>
-              <a:t>6 lakh functional CSCs, 4.7 lakh at gram-panchayat level (MeitY, Mar 2025) · the pilot’s 50 counters: nodes at 20 CSCs, the phone app at 30 bank-agent points</a:t>
-            </a:r>
-            <a:endParaRPr lang="en-US" sz="1050" dirty="0"/>
-          </a:p>
-        </p:txBody>
-      </p:sp>
     </p:spTree>
   </p:cSld>
   <p:clrMapOvr>
@@ -4189,45 +4072,6 @@
           </a:prstGeom>
         </p:spPr>
       </p:pic>
-      <p:sp>
-        <p:nvSpPr>
-          <p:cNvPr id="13" name="source"/>
-          <p:cNvSpPr txBox="1"/>
-          <p:nvPr/>
-        </p:nvSpPr>
-        <p:spPr>
-          <a:xfrm>
-            <a:off x="822960" y="6400800"/>
-            <a:ext cx="10545775" cy="256032"/>
-          </a:xfrm>
-          <a:prstGeom prst="rect">
-            <a:avLst/>
-          </a:prstGeom>
-          <a:noFill/>
-          <a:ln/>
-        </p:spPr>
-        <p:txBody>
-          <a:bodyPr wrap="square" lIns="0" tIns="0" rIns="0" bIns="0" rtlCol="0" anchor="t"/>
-          <a:lstStyle/>
-          <a:p>
-            <a:pPr indent="0" marL="0">
-              <a:buNone/>
-            </a:pPr>
-            <a:r>
-              <a:rPr lang="en-US" sz="1050" dirty="0">
-                <a:solidFill>
-                  <a:srgbClr val="6E6E73"/>
-                </a:solidFill>
-                <a:latin typeface="Arial" pitchFamily="34" charset="0"/>
-                <a:ea typeface="Arial" pitchFamily="34" charset="-122"/>
-                <a:cs typeface="Arial" pitchFamily="34" charset="-120"/>
-              </a:rPr>
-              <a:t>The Learn tab of the same app · every card agrees with Sahayak’s own check (tests/test_game.py) · nothing leaves the phone</a:t>
-            </a:r>
-            <a:endParaRPr lang="en-US" sz="1050" dirty="0"/>
-          </a:p>
-        </p:txBody>
-      </p:sp>
     </p:spTree>
   </p:cSld>
   <p:clrMapOvr>
@@ -4499,45 +4343,6 @@
           </a:p>
         </p:txBody>
       </p:sp>
-      <p:sp>
-        <p:nvSpPr>
-          <p:cNvPr id="8" name="repo"/>
-          <p:cNvSpPr txBox="1"/>
-          <p:nvPr/>
-        </p:nvSpPr>
-        <p:spPr>
-          <a:xfrm>
-            <a:off x="457200" y="6172200"/>
-            <a:ext cx="11277295" cy="274320"/>
-          </a:xfrm>
-          <a:prstGeom prst="rect">
-            <a:avLst/>
-          </a:prstGeom>
-          <a:noFill/>
-          <a:ln/>
-        </p:spPr>
-        <p:txBody>
-          <a:bodyPr wrap="square" lIns="0" tIns="0" rIns="0" bIns="0" rtlCol="0" anchor="t"/>
-          <a:lstStyle/>
-          <a:p>
-            <a:pPr algn="ctr" indent="0" marL="0">
-              <a:buNone/>
-            </a:pPr>
-            <a:r>
-              <a:rPr lang="en-US" sz="1200" dirty="0">
-                <a:solidFill>
-                  <a:srgbClr val="6E6E73"/>
-                </a:solidFill>
-                <a:latin typeface="Arial" pitchFamily="34" charset="0"/>
-                <a:ea typeface="Arial" pitchFamily="34" charset="-122"/>
-                <a:cs typeface="Arial" pitchFamily="34" charset="-120"/>
-              </a:rPr>
-              <a:t>Open source: github.com/ishmiit/Sahayak</a:t>
-            </a:r>
-            <a:endParaRPr lang="en-US" sz="1200" dirty="0"/>
-          </a:p>
-        </p:txBody>
-      </p:sp>
     </p:spTree>
   </p:cSld>
   <p:clrMapOvr>
@@ -5533,45 +5338,6 @@
           </a:p>
         </p:txBody>
       </p:sp>
-      <p:sp>
-        <p:nvSpPr>
-          <p:cNvPr id="7" name="source"/>
-          <p:cNvSpPr txBox="1"/>
-          <p:nvPr/>
-        </p:nvSpPr>
-        <p:spPr>
-          <a:xfrm>
-            <a:off x="822960" y="6400800"/>
-            <a:ext cx="10545775" cy="256032"/>
-          </a:xfrm>
-          <a:prstGeom prst="rect">
-            <a:avLst/>
-          </a:prstGeom>
-          <a:noFill/>
-          <a:ln/>
-        </p:spPr>
-        <p:txBody>
-          <a:bodyPr wrap="square" lIns="0" tIns="0" rIns="0" bIns="0" rtlCol="0" anchor="t"/>
-          <a:lstStyle/>
-          <a:p>
-            <a:pPr indent="0" marL="0">
-              <a:buNone/>
-            </a:pPr>
-            <a:r>
-              <a:rPr lang="en-US" sz="1050" dirty="0">
-                <a:solidFill>
-                  <a:srgbClr val="6E6E73"/>
-                </a:solidFill>
-                <a:latin typeface="Arial" pitchFamily="34" charset="0"/>
-                <a:ea typeface="Arial" pitchFamily="34" charset="-122"/>
-                <a:cs typeface="Arial" pitchFamily="34" charset="-120"/>
-              </a:rPr>
-              <a:t>A demo persona, not a real person</a:t>
-            </a:r>
-            <a:endParaRPr lang="en-US" sz="1050" dirty="0"/>
-          </a:p>
-        </p:txBody>
-      </p:sp>
     </p:spTree>
   </p:cSld>
   <p:clrMapOvr>
@@ -5874,45 +5640,6 @@
               <a:t>of it, from senior citizens</a:t>
             </a:r>
             <a:endParaRPr lang="en-US" sz="1700" dirty="0"/>
-          </a:p>
-        </p:txBody>
-      </p:sp>
-      <p:sp>
-        <p:nvSpPr>
-          <p:cNvPr id="10" name="source"/>
-          <p:cNvSpPr txBox="1"/>
-          <p:nvPr/>
-        </p:nvSpPr>
-        <p:spPr>
-          <a:xfrm>
-            <a:off x="822960" y="6400800"/>
-            <a:ext cx="10545775" cy="256032"/>
-          </a:xfrm>
-          <a:prstGeom prst="rect">
-            <a:avLst/>
-          </a:prstGeom>
-          <a:noFill/>
-          <a:ln/>
-        </p:spPr>
-        <p:txBody>
-          <a:bodyPr wrap="square" lIns="0" tIns="0" rIns="0" bIns="0" rtlCol="0" anchor="t"/>
-          <a:lstStyle/>
-          <a:p>
-            <a:pPr indent="0" marL="0">
-              <a:buNone/>
-            </a:pPr>
-            <a:r>
-              <a:rPr lang="en-US" sz="1050" dirty="0">
-                <a:solidFill>
-                  <a:srgbClr val="6E6E73"/>
-                </a:solidFill>
-                <a:latin typeface="Arial" pitchFamily="34" charset="0"/>
-                <a:ea typeface="Arial" pitchFamily="34" charset="-122"/>
-                <a:cs typeface="Arial" pitchFamily="34" charset="-120"/>
-              </a:rPr>
-              <a:t>MHA / I4C, Rajya Sabha, Feb 2026; seniors: MHA, Rajya Sabha, 5 Aug 2026. Spread evenly over the year, ₹22,495 crore is about ₹7,133 a second.</a:t>
-            </a:r>
-            <a:endParaRPr lang="en-US" sz="1050" dirty="0"/>
           </a:p>
         </p:txBody>
       </p:sp>
@@ -7034,45 +6761,6 @@
           </a:p>
         </p:txBody>
       </p:sp>
-      <p:sp>
-        <p:nvSpPr>
-          <p:cNvPr id="19" name="source"/>
-          <p:cNvSpPr txBox="1"/>
-          <p:nvPr/>
-        </p:nvSpPr>
-        <p:spPr>
-          <a:xfrm>
-            <a:off x="822960" y="6400800"/>
-            <a:ext cx="10545775" cy="256032"/>
-          </a:xfrm>
-          <a:prstGeom prst="rect">
-            <a:avLst/>
-          </a:prstGeom>
-          <a:noFill/>
-          <a:ln/>
-        </p:spPr>
-        <p:txBody>
-          <a:bodyPr wrap="square" lIns="0" tIns="0" rIns="0" bIns="0" rtlCol="0" anchor="t"/>
-          <a:lstStyle/>
-          <a:p>
-            <a:pPr indent="0" marL="0">
-              <a:buNone/>
-            </a:pPr>
-            <a:r>
-              <a:rPr lang="en-US" sz="1050" dirty="0">
-                <a:solidFill>
-                  <a:srgbClr val="6E6E73"/>
-                </a:solidFill>
-                <a:latin typeface="Arial" pitchFamily="34" charset="0"/>
-                <a:ea typeface="Arial" pitchFamily="34" charset="-122"/>
-                <a:cs typeface="Arial" pitchFamily="34" charset="-120"/>
-              </a:rPr>
-              <a:t>Demo persona and SMS written by the team · the app’s answer, on a phone, 14 Oct 2026</a:t>
-            </a:r>
-            <a:endParaRPr lang="en-US" sz="1050" dirty="0"/>
-          </a:p>
-        </p:txBody>
-      </p:sp>
     </p:spTree>
   </p:cSld>
   <p:clrMapOvr>
@@ -7496,48 +7184,9 @@
           </a:p>
         </p:txBody>
       </p:sp>
-      <p:sp>
-        <p:nvSpPr>
-          <p:cNvPr id="12" name="source"/>
-          <p:cNvSpPr txBox="1"/>
-          <p:nvPr/>
-        </p:nvSpPr>
-        <p:spPr>
-          <a:xfrm>
-            <a:off x="822960" y="6400800"/>
-            <a:ext cx="10545775" cy="256032"/>
-          </a:xfrm>
-          <a:prstGeom prst="rect">
-            <a:avLst/>
-          </a:prstGeom>
-          <a:noFill/>
-          <a:ln/>
-        </p:spPr>
-        <p:txBody>
-          <a:bodyPr wrap="square" lIns="0" tIns="0" rIns="0" bIns="0" rtlCol="0" anchor="t"/>
-          <a:lstStyle/>
-          <a:p>
-            <a:pPr indent="0" marL="0">
-              <a:buNone/>
-            </a:pPr>
-            <a:r>
-              <a:rPr lang="en-US" sz="1050" dirty="0">
-                <a:solidFill>
-                  <a:srgbClr val="6E6E73"/>
-                </a:solidFill>
-                <a:latin typeface="Arial" pitchFamily="34" charset="0"/>
-                <a:ea typeface="Arial" pitchFamily="34" charset="-122"/>
-                <a:cs typeface="Arial" pitchFamily="34" charset="-120"/>
-              </a:rPr>
-              <a:t>1.1 of ~6 crore aged 70+ had the card (MoHFW, Feb 2026) · shared with a spouse also 70+; hospital care only · screenshot: result for a 74-year-old</a:t>
-            </a:r>
-            <a:endParaRPr lang="en-US" sz="1050" dirty="0"/>
-          </a:p>
-        </p:txBody>
-      </p:sp>
       <p:pic>
         <p:nvPicPr>
-          <p:cNvPr id="13" name="Sahayak's benefits result for a 74-year-old" descr="Screenshot: Sahayak's benefits result for a 74-year-old">    </p:cNvPr>
+          <p:cNvPr id="12" name="Sahayak's benefits result for a 74-year-old" descr="Screenshot: Sahayak's benefits result for a 74-year-old">    </p:cNvPr>
           <p:cNvPicPr>
             <a:picLocks noChangeAspect="1"/>
           </p:cNvPicPr>
@@ -8840,45 +8489,6 @@
           </a:p>
         </p:txBody>
       </p:sp>
-      <p:sp>
-        <p:nvSpPr>
-          <p:cNvPr id="17" name="source"/>
-          <p:cNvSpPr txBox="1"/>
-          <p:nvPr/>
-        </p:nvSpPr>
-        <p:spPr>
-          <a:xfrm>
-            <a:off x="822960" y="6400800"/>
-            <a:ext cx="10545775" cy="256032"/>
-          </a:xfrm>
-          <a:prstGeom prst="rect">
-            <a:avLst/>
-          </a:prstGeom>
-          <a:noFill/>
-          <a:ln/>
-        </p:spPr>
-        <p:txBody>
-          <a:bodyPr wrap="square" lIns="0" tIns="0" rIns="0" bIns="0" rtlCol="0" anchor="t"/>
-          <a:lstStyle/>
-          <a:p>
-            <a:pPr indent="0" marL="0">
-              <a:buNone/>
-            </a:pPr>
-            <a:r>
-              <a:rPr lang="en-US" sz="1050" dirty="0">
-                <a:solidFill>
-                  <a:srgbClr val="6E6E73"/>
-                </a:solidFill>
-                <a:latin typeface="Arial" pitchFamily="34" charset="0"/>
-                <a:ea typeface="Arial" pitchFamily="34" charset="-122"/>
-                <a:cs typeface="Arial" pitchFamily="34" charset="-120"/>
-              </a:rPr>
-              <a:t>qwen2.5:3b, zero-shot, on the same 137 real published messages, first runs, 7 Oct 2026. In languages Sahayak can’t read yet, the model caught 14 of 15 scams.</a:t>
-            </a:r>
-            <a:endParaRPr lang="en-US" sz="1050" dirty="0"/>
-          </a:p>
-        </p:txBody>
-      </p:sp>
     </p:spTree>
   </p:cSld>
   <p:clrMapOvr>
@@ -9397,45 +9007,6 @@
               <a:t>real users, and messages from people’s own phones. That’s next.</a:t>
             </a:r>
             <a:endParaRPr lang="en-US" sz="2100" dirty="0"/>
-          </a:p>
-        </p:txBody>
-      </p:sp>
-      <p:sp>
-        <p:nvSpPr>
-          <p:cNvPr id="16" name="source"/>
-          <p:cNvSpPr txBox="1"/>
-          <p:nvPr/>
-        </p:nvSpPr>
-        <p:spPr>
-          <a:xfrm>
-            <a:off x="822960" y="6400800"/>
-            <a:ext cx="10545775" cy="256032"/>
-          </a:xfrm>
-          <a:prstGeom prst="rect">
-            <a:avLst/>
-          </a:prstGeom>
-          <a:noFill/>
-          <a:ln/>
-        </p:spPr>
-        <p:txBody>
-          <a:bodyPr wrap="square" lIns="0" tIns="0" rIns="0" bIns="0" rtlCol="0" anchor="t"/>
-          <a:lstStyle/>
-          <a:p>
-            <a:pPr indent="0" marL="0">
-              <a:buNone/>
-            </a:pPr>
-            <a:r>
-              <a:rPr lang="en-US" sz="1050" dirty="0">
-                <a:solidFill>
-                  <a:srgbClr val="6E6E73"/>
-                </a:solidFill>
-                <a:latin typeface="Arial" pitchFamily="34" charset="0"/>
-                <a:ea typeface="Arial" pitchFamily="34" charset="-122"/>
-                <a:cs typeface="Arial" pitchFamily="34" charset="-120"/>
-              </a:rPr>
-              <a:t>In Hindi, English and Hinglish: 67 of 97 scams caught, 11 of 34 genuine flagged; published by the Income Tax portal, PIB Fact Check and fact-checkers · first runs, bench/results</a:t>
-            </a:r>
-            <a:endParaRPr lang="en-US" sz="1050" dirty="0"/>
           </a:p>
         </p:txBody>
       </p:sp>
